--- a/deck1-motors-drivetrains.pptx
+++ b/deck1-motors-drivetrains.pptx
@@ -7683,41 +7683,48 @@
           <a:p/>
         </p:txBody>
       </p:sp>
-      <p:cxnSp>
-        <p:nvCxnSpPr>
-          <p:cNvPr id="5" name="Connector 4"/>
-          <p:cNvCxnSpPr/>
-          <p:nvPr/>
-        </p:nvCxnSpPr>
-        <p:spPr>
-          <a:xfrm>
-            <a:off x="2438400" y="6096000"/>
-            <a:ext cx="13411200" cy="0"/>
-          </a:xfrm>
-          <a:prstGeom prst="line">
-            <a:avLst/>
-          </a:prstGeom>
-          <a:ln w="76200">
-            <a:solidFill>
-              <a:srgbClr val="2A1A1A"/>
-            </a:solidFill>
-          </a:ln>
-        </p:spPr>
-        <p:style>
-          <a:lnRef idx="2">
-            <a:schemeClr val="accent1"/>
-          </a:lnRef>
-          <a:fillRef idx="0">
-            <a:schemeClr val="accent1"/>
-          </a:fillRef>
-          <a:effectRef idx="1">
-            <a:schemeClr val="accent1"/>
-          </a:effectRef>
-          <a:fontRef idx="minor">
-            <a:schemeClr val="tx1"/>
-          </a:fontRef>
-        </p:style>
-      </p:cxnSp>
+      <p:sp>
+        <p:nvSpPr>
+          <p:cNvPr id="5" name="Rectangle 4"/>
+          <p:cNvSpPr/>
+          <p:nvPr/>
+        </p:nvSpPr>
+        <p:spPr>
+          <a:xfrm>
+            <a:off x="2400300" y="6057900"/>
+            <a:ext cx="13487400" cy="76200"/>
+          </a:xfrm>
+          <a:prstGeom prst="rect">
+            <a:avLst/>
+          </a:prstGeom>
+          <a:solidFill>
+            <a:srgbClr val="2A1A1A"/>
+          </a:solidFill>
+          <a:ln>
+            <a:noFill/>
+          </a:ln>
+          <a:effectLst/>
+        </p:spPr>
+        <p:style>
+          <a:lnRef idx="1">
+            <a:schemeClr val="accent1"/>
+          </a:lnRef>
+          <a:fillRef idx="3">
+            <a:schemeClr val="accent1"/>
+          </a:fillRef>
+          <a:effectRef idx="2">
+            <a:schemeClr val="accent1"/>
+          </a:effectRef>
+          <a:fontRef idx="minor">
+            <a:schemeClr val="lt1"/>
+          </a:fontRef>
+        </p:style>
+        <p:txBody>
+          <a:bodyPr rtlCol="0" anchor="ctr"/>
+          <a:lstStyle/>
+          <a:p/>
+        </p:txBody>
+      </p:sp>
       <p:sp>
         <p:nvSpPr>
           <p:cNvPr id="6" name="Rectangle 5"/>
@@ -8348,81 +8355,181 @@
           </a:prstGeom>
         </p:spPr>
       </p:pic>
-      <p:cxnSp>
-        <p:nvCxnSpPr>
-          <p:cNvPr id="23" name="Connector 22"/>
-          <p:cNvCxnSpPr/>
-          <p:nvPr/>
-        </p:nvCxnSpPr>
-        <p:spPr>
-          <a:xfrm flipH="1">
-            <a:off x="342900" y="4953000"/>
-            <a:ext cx="762000" cy="0"/>
-          </a:xfrm>
-          <a:prstGeom prst="line">
-            <a:avLst/>
-          </a:prstGeom>
-          <a:ln w="57150">
-            <a:solidFill>
-              <a:srgbClr val="CC2200"/>
-            </a:solidFill>
-            <a:tailEnd type="triangle" w="med" len="med"/>
-          </a:ln>
-        </p:spPr>
-        <p:style>
-          <a:lnRef idx="2">
-            <a:schemeClr val="accent1"/>
-          </a:lnRef>
-          <a:fillRef idx="0">
-            <a:schemeClr val="accent1"/>
-          </a:fillRef>
-          <a:effectRef idx="1">
-            <a:schemeClr val="accent1"/>
-          </a:effectRef>
-          <a:fontRef idx="minor">
-            <a:schemeClr val="tx1"/>
-          </a:fontRef>
-        </p:style>
-      </p:cxnSp>
-      <p:cxnSp>
-        <p:nvCxnSpPr>
-          <p:cNvPr id="24" name="Connector 23"/>
-          <p:cNvCxnSpPr/>
-          <p:nvPr/>
-        </p:nvCxnSpPr>
-        <p:spPr>
-          <a:xfrm>
-            <a:off x="17183100" y="4953000"/>
-            <a:ext cx="762000" cy="0"/>
-          </a:xfrm>
-          <a:prstGeom prst="line">
-            <a:avLst/>
-          </a:prstGeom>
-          <a:ln w="57150">
-            <a:solidFill>
-              <a:srgbClr val="CC2200"/>
-            </a:solidFill>
-            <a:tailEnd type="triangle" w="med" len="med"/>
-          </a:ln>
-        </p:spPr>
-        <p:style>
-          <a:lnRef idx="2">
-            <a:schemeClr val="accent1"/>
-          </a:lnRef>
-          <a:fillRef idx="0">
-            <a:schemeClr val="accent1"/>
-          </a:fillRef>
-          <a:effectRef idx="1">
-            <a:schemeClr val="accent1"/>
-          </a:effectRef>
-          <a:fontRef idx="minor">
-            <a:schemeClr val="tx1"/>
-          </a:fontRef>
-        </p:style>
-      </p:cxnSp>
-      <p:sp>
-        <p:nvSpPr>
-          <p:cNvPr id="25" name="TextBox 24"/>
+      <p:sp>
+        <p:nvSpPr>
+          <p:cNvPr id="23" name="Rectangle 22"/>
+          <p:cNvSpPr/>
+          <p:nvPr/>
+        </p:nvSpPr>
+        <p:spPr>
+          <a:xfrm>
+            <a:off x="458343" y="4924425"/>
+            <a:ext cx="675132" cy="57150"/>
+          </a:xfrm>
+          <a:prstGeom prst="rect">
+            <a:avLst/>
+          </a:prstGeom>
+          <a:solidFill>
+            <a:srgbClr val="CC2200"/>
+          </a:solidFill>
+          <a:ln>
+            <a:noFill/>
+          </a:ln>
+          <a:effectLst/>
+        </p:spPr>
+        <p:style>
+          <a:lnRef idx="1">
+            <a:schemeClr val="accent1"/>
+          </a:lnRef>
+          <a:fillRef idx="3">
+            <a:schemeClr val="accent1"/>
+          </a:fillRef>
+          <a:effectRef idx="2">
+            <a:schemeClr val="accent1"/>
+          </a:effectRef>
+          <a:fontRef idx="minor">
+            <a:schemeClr val="lt1"/>
+          </a:fontRef>
+        </p:style>
+        <p:txBody>
+          <a:bodyPr rtlCol="0" anchor="ctr"/>
+          <a:lstStyle/>
+          <a:p/>
+        </p:txBody>
+      </p:sp>
+      <p:sp>
+        <p:nvSpPr>
+          <p:cNvPr id="24" name="Isosceles Triangle 23"/>
+          <p:cNvSpPr/>
+          <p:nvPr/>
+        </p:nvSpPr>
+        <p:spPr>
+          <a:xfrm rot="16200000">
+            <a:off x="342900" y="4872990"/>
+            <a:ext cx="160020" cy="160020"/>
+          </a:xfrm>
+          <a:prstGeom prst="triangle">
+            <a:avLst/>
+          </a:prstGeom>
+          <a:solidFill>
+            <a:srgbClr val="CC2200"/>
+          </a:solidFill>
+          <a:ln>
+            <a:noFill/>
+          </a:ln>
+          <a:effectLst/>
+        </p:spPr>
+        <p:style>
+          <a:lnRef idx="1">
+            <a:schemeClr val="accent1"/>
+          </a:lnRef>
+          <a:fillRef idx="3">
+            <a:schemeClr val="accent1"/>
+          </a:fillRef>
+          <a:effectRef idx="2">
+            <a:schemeClr val="accent1"/>
+          </a:effectRef>
+          <a:fontRef idx="minor">
+            <a:schemeClr val="lt1"/>
+          </a:fontRef>
+        </p:style>
+        <p:txBody>
+          <a:bodyPr rtlCol="0" anchor="ctr"/>
+          <a:lstStyle/>
+          <a:p>
+            <a:pPr algn="ctr"/>
+          </a:p>
+        </p:txBody>
+      </p:sp>
+      <p:sp>
+        <p:nvSpPr>
+          <p:cNvPr id="25" name="Rectangle 24"/>
+          <p:cNvSpPr/>
+          <p:nvPr/>
+        </p:nvSpPr>
+        <p:spPr>
+          <a:xfrm>
+            <a:off x="17154525" y="4924425"/>
+            <a:ext cx="675132" cy="57150"/>
+          </a:xfrm>
+          <a:prstGeom prst="rect">
+            <a:avLst/>
+          </a:prstGeom>
+          <a:solidFill>
+            <a:srgbClr val="CC2200"/>
+          </a:solidFill>
+          <a:ln>
+            <a:noFill/>
+          </a:ln>
+          <a:effectLst/>
+        </p:spPr>
+        <p:style>
+          <a:lnRef idx="1">
+            <a:schemeClr val="accent1"/>
+          </a:lnRef>
+          <a:fillRef idx="3">
+            <a:schemeClr val="accent1"/>
+          </a:fillRef>
+          <a:effectRef idx="2">
+            <a:schemeClr val="accent1"/>
+          </a:effectRef>
+          <a:fontRef idx="minor">
+            <a:schemeClr val="lt1"/>
+          </a:fontRef>
+        </p:style>
+        <p:txBody>
+          <a:bodyPr rtlCol="0" anchor="ctr"/>
+          <a:lstStyle/>
+          <a:p/>
+        </p:txBody>
+      </p:sp>
+      <p:sp>
+        <p:nvSpPr>
+          <p:cNvPr id="26" name="Isosceles Triangle 25"/>
+          <p:cNvSpPr/>
+          <p:nvPr/>
+        </p:nvSpPr>
+        <p:spPr>
+          <a:xfrm rot="5400000">
+            <a:off x="17785080" y="4872990"/>
+            <a:ext cx="160020" cy="160020"/>
+          </a:xfrm>
+          <a:prstGeom prst="triangle">
+            <a:avLst/>
+          </a:prstGeom>
+          <a:solidFill>
+            <a:srgbClr val="CC2200"/>
+          </a:solidFill>
+          <a:ln>
+            <a:noFill/>
+          </a:ln>
+          <a:effectLst/>
+        </p:spPr>
+        <p:style>
+          <a:lnRef idx="1">
+            <a:schemeClr val="accent1"/>
+          </a:lnRef>
+          <a:fillRef idx="3">
+            <a:schemeClr val="accent1"/>
+          </a:fillRef>
+          <a:effectRef idx="2">
+            <a:schemeClr val="accent1"/>
+          </a:effectRef>
+          <a:fontRef idx="minor">
+            <a:schemeClr val="lt1"/>
+          </a:fontRef>
+        </p:style>
+        <p:txBody>
+          <a:bodyPr rtlCol="0" anchor="ctr"/>
+          <a:lstStyle/>
+          <a:p>
+            <a:pPr algn="ctr"/>
+          </a:p>
+        </p:txBody>
+      </p:sp>
+      <p:sp>
+        <p:nvSpPr>
+          <p:cNvPr id="27" name="TextBox 26"/>
           <p:cNvSpPr txBox="1"/>
           <p:nvPr/>
         </p:nvSpPr>
@@ -8459,7 +8566,7 @@
       </p:sp>
       <p:sp>
         <p:nvSpPr>
-          <p:cNvPr id="26" name="Rounded Rectangle 25"/>
+          <p:cNvPr id="28" name="Rounded Rectangle 27"/>
           <p:cNvSpPr/>
           <p:nvPr/>
         </p:nvSpPr>
@@ -8503,7 +8610,7 @@
       </p:sp>
       <p:sp>
         <p:nvSpPr>
-          <p:cNvPr id="27" name="TextBox 26"/>
+          <p:cNvPr id="29" name="TextBox 28"/>
           <p:cNvSpPr txBox="1"/>
           <p:nvPr/>
         </p:nvSpPr>
@@ -8555,7 +8662,7 @@
       </p:sp>
       <p:sp>
         <p:nvSpPr>
-          <p:cNvPr id="28" name="TextBox 27"/>
+          <p:cNvPr id="30" name="TextBox 29"/>
           <p:cNvSpPr txBox="1"/>
           <p:nvPr/>
         </p:nvSpPr>
@@ -8603,7 +8710,7 @@
       </p:sp>
       <p:sp>
         <p:nvSpPr>
-          <p:cNvPr id="29" name="TextBox 28"/>
+          <p:cNvPr id="31" name="TextBox 30"/>
           <p:cNvSpPr txBox="1"/>
           <p:nvPr/>
         </p:nvSpPr>
@@ -8887,81 +8994,181 @@
           </a:prstGeom>
         </p:spPr>
       </p:pic>
-      <p:cxnSp>
-        <p:nvCxnSpPr>
-          <p:cNvPr id="8" name="Connector 7"/>
-          <p:cNvCxnSpPr/>
-          <p:nvPr/>
-        </p:nvCxnSpPr>
-        <p:spPr>
-          <a:xfrm flipV="1">
-            <a:off x="3524250" y="4905375"/>
-            <a:ext cx="0" cy="1238250"/>
-          </a:xfrm>
-          <a:prstGeom prst="line">
-            <a:avLst/>
-          </a:prstGeom>
-          <a:ln w="76200">
-            <a:solidFill>
-              <a:srgbClr val="CC2200"/>
-            </a:solidFill>
-            <a:tailEnd type="triangle" w="med" len="med"/>
-          </a:ln>
-        </p:spPr>
-        <p:style>
-          <a:lnRef idx="2">
-            <a:schemeClr val="accent1"/>
-          </a:lnRef>
-          <a:fillRef idx="0">
-            <a:schemeClr val="accent1"/>
-          </a:fillRef>
-          <a:effectRef idx="1">
-            <a:schemeClr val="accent1"/>
-          </a:effectRef>
-          <a:fontRef idx="minor">
-            <a:schemeClr val="tx1"/>
-          </a:fontRef>
-        </p:style>
-      </p:cxnSp>
-      <p:cxnSp>
-        <p:nvCxnSpPr>
-          <p:cNvPr id="9" name="Connector 8"/>
-          <p:cNvCxnSpPr/>
-          <p:nvPr/>
-        </p:nvCxnSpPr>
-        <p:spPr>
-          <a:xfrm>
-            <a:off x="6381750" y="4905375"/>
-            <a:ext cx="0" cy="1238250"/>
-          </a:xfrm>
-          <a:prstGeom prst="line">
-            <a:avLst/>
-          </a:prstGeom>
-          <a:ln w="76200">
-            <a:solidFill>
-              <a:srgbClr val="E05540"/>
-            </a:solidFill>
-            <a:tailEnd type="triangle" w="med" len="med"/>
-          </a:ln>
-        </p:spPr>
-        <p:style>
-          <a:lnRef idx="2">
-            <a:schemeClr val="accent1"/>
-          </a:lnRef>
-          <a:fillRef idx="0">
-            <a:schemeClr val="accent1"/>
-          </a:fillRef>
-          <a:effectRef idx="1">
-            <a:schemeClr val="accent1"/>
-          </a:effectRef>
-          <a:fontRef idx="minor">
-            <a:schemeClr val="tx1"/>
-          </a:fontRef>
-        </p:style>
-      </p:cxnSp>
-      <p:sp>
-        <p:nvSpPr>
-          <p:cNvPr id="10" name="TextBox 9"/>
+      <p:sp>
+        <p:nvSpPr>
+          <p:cNvPr id="8" name="Rectangle 7"/>
+          <p:cNvSpPr/>
+          <p:nvPr/>
+        </p:nvSpPr>
+        <p:spPr>
+          <a:xfrm>
+            <a:off x="3486150" y="5059299"/>
+            <a:ext cx="76200" cy="1122426"/>
+          </a:xfrm>
+          <a:prstGeom prst="rect">
+            <a:avLst/>
+          </a:prstGeom>
+          <a:solidFill>
+            <a:srgbClr val="CC2200"/>
+          </a:solidFill>
+          <a:ln>
+            <a:noFill/>
+          </a:ln>
+          <a:effectLst/>
+        </p:spPr>
+        <p:style>
+          <a:lnRef idx="1">
+            <a:schemeClr val="accent1"/>
+          </a:lnRef>
+          <a:fillRef idx="3">
+            <a:schemeClr val="accent1"/>
+          </a:fillRef>
+          <a:effectRef idx="2">
+            <a:schemeClr val="accent1"/>
+          </a:effectRef>
+          <a:fontRef idx="minor">
+            <a:schemeClr val="lt1"/>
+          </a:fontRef>
+        </p:style>
+        <p:txBody>
+          <a:bodyPr rtlCol="0" anchor="ctr"/>
+          <a:lstStyle/>
+          <a:p/>
+        </p:txBody>
+      </p:sp>
+      <p:sp>
+        <p:nvSpPr>
+          <p:cNvPr id="9" name="Isosceles Triangle 8"/>
+          <p:cNvSpPr/>
+          <p:nvPr/>
+        </p:nvSpPr>
+        <p:spPr>
+          <a:xfrm>
+            <a:off x="3417570" y="4905375"/>
+            <a:ext cx="213360" cy="213360"/>
+          </a:xfrm>
+          <a:prstGeom prst="triangle">
+            <a:avLst/>
+          </a:prstGeom>
+          <a:solidFill>
+            <a:srgbClr val="CC2200"/>
+          </a:solidFill>
+          <a:ln>
+            <a:noFill/>
+          </a:ln>
+          <a:effectLst/>
+        </p:spPr>
+        <p:style>
+          <a:lnRef idx="1">
+            <a:schemeClr val="accent1"/>
+          </a:lnRef>
+          <a:fillRef idx="3">
+            <a:schemeClr val="accent1"/>
+          </a:fillRef>
+          <a:effectRef idx="2">
+            <a:schemeClr val="accent1"/>
+          </a:effectRef>
+          <a:fontRef idx="minor">
+            <a:schemeClr val="lt1"/>
+          </a:fontRef>
+        </p:style>
+        <p:txBody>
+          <a:bodyPr rtlCol="0" anchor="ctr"/>
+          <a:lstStyle/>
+          <a:p>
+            <a:pPr algn="ctr"/>
+          </a:p>
+        </p:txBody>
+      </p:sp>
+      <p:sp>
+        <p:nvSpPr>
+          <p:cNvPr id="10" name="Rectangle 9"/>
+          <p:cNvSpPr/>
+          <p:nvPr/>
+        </p:nvSpPr>
+        <p:spPr>
+          <a:xfrm>
+            <a:off x="6343650" y="4867275"/>
+            <a:ext cx="76200" cy="1122426"/>
+          </a:xfrm>
+          <a:prstGeom prst="rect">
+            <a:avLst/>
+          </a:prstGeom>
+          <a:solidFill>
+            <a:srgbClr val="E05540"/>
+          </a:solidFill>
+          <a:ln>
+            <a:noFill/>
+          </a:ln>
+          <a:effectLst/>
+        </p:spPr>
+        <p:style>
+          <a:lnRef idx="1">
+            <a:schemeClr val="accent1"/>
+          </a:lnRef>
+          <a:fillRef idx="3">
+            <a:schemeClr val="accent1"/>
+          </a:fillRef>
+          <a:effectRef idx="2">
+            <a:schemeClr val="accent1"/>
+          </a:effectRef>
+          <a:fontRef idx="minor">
+            <a:schemeClr val="lt1"/>
+          </a:fontRef>
+        </p:style>
+        <p:txBody>
+          <a:bodyPr rtlCol="0" anchor="ctr"/>
+          <a:lstStyle/>
+          <a:p/>
+        </p:txBody>
+      </p:sp>
+      <p:sp>
+        <p:nvSpPr>
+          <p:cNvPr id="11" name="Isosceles Triangle 10"/>
+          <p:cNvSpPr/>
+          <p:nvPr/>
+        </p:nvSpPr>
+        <p:spPr>
+          <a:xfrm rot="10800000">
+            <a:off x="6275070" y="5930265"/>
+            <a:ext cx="213360" cy="213360"/>
+          </a:xfrm>
+          <a:prstGeom prst="triangle">
+            <a:avLst/>
+          </a:prstGeom>
+          <a:solidFill>
+            <a:srgbClr val="E05540"/>
+          </a:solidFill>
+          <a:ln>
+            <a:noFill/>
+          </a:ln>
+          <a:effectLst/>
+        </p:spPr>
+        <p:style>
+          <a:lnRef idx="1">
+            <a:schemeClr val="accent1"/>
+          </a:lnRef>
+          <a:fillRef idx="3">
+            <a:schemeClr val="accent1"/>
+          </a:fillRef>
+          <a:effectRef idx="2">
+            <a:schemeClr val="accent1"/>
+          </a:effectRef>
+          <a:fontRef idx="minor">
+            <a:schemeClr val="lt1"/>
+          </a:fontRef>
+        </p:style>
+        <p:txBody>
+          <a:bodyPr rtlCol="0" anchor="ctr"/>
+          <a:lstStyle/>
+          <a:p>
+            <a:pPr algn="ctr"/>
+          </a:p>
+        </p:txBody>
+      </p:sp>
+      <p:sp>
+        <p:nvSpPr>
+          <p:cNvPr id="12" name="TextBox 11"/>
           <p:cNvSpPr txBox="1"/>
           <p:nvPr/>
         </p:nvSpPr>
@@ -8998,7 +9205,7 @@
       </p:sp>
       <p:sp>
         <p:nvSpPr>
-          <p:cNvPr id="11" name="TextBox 10"/>
+          <p:cNvPr id="13" name="TextBox 12"/>
           <p:cNvSpPr txBox="1"/>
           <p:nvPr/>
         </p:nvSpPr>
@@ -9035,7 +9242,7 @@
       </p:sp>
       <p:pic>
         <p:nvPicPr>
-          <p:cNvPr id="12" name="Picture 11" descr="arrow-repeat.png"/>
+          <p:cNvPr id="14" name="Picture 13" descr="arrow-repeat.png"/>
           <p:cNvPicPr>
             <a:picLocks noChangeAspect="1"/>
           </p:cNvPicPr>
@@ -9059,7 +9266,7 @@
       </p:pic>
       <p:pic>
         <p:nvPicPr>
-          <p:cNvPr id="13" name="Picture 12" descr="dozer_wide.png"/>
+          <p:cNvPr id="15" name="Picture 14" descr="dozer_wide.png"/>
           <p:cNvPicPr>
             <a:picLocks noChangeAspect="1"/>
           </p:cNvPicPr>
@@ -9083,7 +9290,7 @@
       </p:pic>
       <p:sp>
         <p:nvSpPr>
-          <p:cNvPr id="14" name="TextBox 13"/>
+          <p:cNvPr id="16" name="TextBox 15"/>
           <p:cNvSpPr txBox="1"/>
           <p:nvPr/>
         </p:nvSpPr>
@@ -9124,7 +9331,7 @@
       </p:sp>
       <p:sp>
         <p:nvSpPr>
-          <p:cNvPr id="15" name="Rounded Rectangle 14"/>
+          <p:cNvPr id="17" name="Rounded Rectangle 16"/>
           <p:cNvSpPr/>
           <p:nvPr/>
         </p:nvSpPr>
@@ -9170,7 +9377,7 @@
       </p:sp>
       <p:sp>
         <p:nvSpPr>
-          <p:cNvPr id="16" name="TextBox 15"/>
+          <p:cNvPr id="18" name="TextBox 17"/>
           <p:cNvSpPr txBox="1"/>
           <p:nvPr/>
         </p:nvSpPr>
@@ -9207,7 +9414,7 @@
       </p:sp>
       <p:pic>
         <p:nvPicPr>
-          <p:cNvPr id="17" name="Picture 16" descr="dozer_top.png"/>
+          <p:cNvPr id="19" name="Picture 18" descr="dozer_top.png"/>
           <p:cNvPicPr>
             <a:picLocks noChangeAspect="1"/>
           </p:cNvPicPr>
@@ -9229,81 +9436,181 @@
           </a:prstGeom>
         </p:spPr>
       </p:pic>
-      <p:cxnSp>
-        <p:nvCxnSpPr>
-          <p:cNvPr id="18" name="Connector 17"/>
-          <p:cNvCxnSpPr/>
-          <p:nvPr/>
-        </p:nvCxnSpPr>
-        <p:spPr>
-          <a:xfrm flipV="1">
-            <a:off x="11906250" y="4905375"/>
-            <a:ext cx="0" cy="1238250"/>
-          </a:xfrm>
-          <a:prstGeom prst="line">
-            <a:avLst/>
-          </a:prstGeom>
-          <a:ln w="76200">
-            <a:solidFill>
-              <a:srgbClr val="CC2200"/>
-            </a:solidFill>
-            <a:tailEnd type="triangle" w="med" len="med"/>
-          </a:ln>
-        </p:spPr>
-        <p:style>
-          <a:lnRef idx="2">
-            <a:schemeClr val="accent1"/>
-          </a:lnRef>
-          <a:fillRef idx="0">
-            <a:schemeClr val="accent1"/>
-          </a:fillRef>
-          <a:effectRef idx="1">
-            <a:schemeClr val="accent1"/>
-          </a:effectRef>
-          <a:fontRef idx="minor">
-            <a:schemeClr val="tx1"/>
-          </a:fontRef>
-        </p:style>
-      </p:cxnSp>
-      <p:cxnSp>
-        <p:nvCxnSpPr>
-          <p:cNvPr id="19" name="Connector 18"/>
-          <p:cNvCxnSpPr/>
-          <p:nvPr/>
-        </p:nvCxnSpPr>
-        <p:spPr>
-          <a:xfrm flipV="1">
-            <a:off x="14763750" y="4905375"/>
-            <a:ext cx="0" cy="1238250"/>
-          </a:xfrm>
-          <a:prstGeom prst="line">
-            <a:avLst/>
-          </a:prstGeom>
-          <a:ln w="76200">
-            <a:solidFill>
-              <a:srgbClr val="CC2200"/>
-            </a:solidFill>
-            <a:tailEnd type="triangle" w="med" len="med"/>
-          </a:ln>
-        </p:spPr>
-        <p:style>
-          <a:lnRef idx="2">
-            <a:schemeClr val="accent1"/>
-          </a:lnRef>
-          <a:fillRef idx="0">
-            <a:schemeClr val="accent1"/>
-          </a:fillRef>
-          <a:effectRef idx="1">
-            <a:schemeClr val="accent1"/>
-          </a:effectRef>
-          <a:fontRef idx="minor">
-            <a:schemeClr val="tx1"/>
-          </a:fontRef>
-        </p:style>
-      </p:cxnSp>
-      <p:sp>
-        <p:nvSpPr>
-          <p:cNvPr id="20" name="TextBox 19"/>
+      <p:sp>
+        <p:nvSpPr>
+          <p:cNvPr id="20" name="Rectangle 19"/>
+          <p:cNvSpPr/>
+          <p:nvPr/>
+        </p:nvSpPr>
+        <p:spPr>
+          <a:xfrm>
+            <a:off x="11868150" y="5059299"/>
+            <a:ext cx="76200" cy="1122426"/>
+          </a:xfrm>
+          <a:prstGeom prst="rect">
+            <a:avLst/>
+          </a:prstGeom>
+          <a:solidFill>
+            <a:srgbClr val="CC2200"/>
+          </a:solidFill>
+          <a:ln>
+            <a:noFill/>
+          </a:ln>
+          <a:effectLst/>
+        </p:spPr>
+        <p:style>
+          <a:lnRef idx="1">
+            <a:schemeClr val="accent1"/>
+          </a:lnRef>
+          <a:fillRef idx="3">
+            <a:schemeClr val="accent1"/>
+          </a:fillRef>
+          <a:effectRef idx="2">
+            <a:schemeClr val="accent1"/>
+          </a:effectRef>
+          <a:fontRef idx="minor">
+            <a:schemeClr val="lt1"/>
+          </a:fontRef>
+        </p:style>
+        <p:txBody>
+          <a:bodyPr rtlCol="0" anchor="ctr"/>
+          <a:lstStyle/>
+          <a:p/>
+        </p:txBody>
+      </p:sp>
+      <p:sp>
+        <p:nvSpPr>
+          <p:cNvPr id="21" name="Isosceles Triangle 20"/>
+          <p:cNvSpPr/>
+          <p:nvPr/>
+        </p:nvSpPr>
+        <p:spPr>
+          <a:xfrm>
+            <a:off x="11799570" y="4905375"/>
+            <a:ext cx="213360" cy="213360"/>
+          </a:xfrm>
+          <a:prstGeom prst="triangle">
+            <a:avLst/>
+          </a:prstGeom>
+          <a:solidFill>
+            <a:srgbClr val="CC2200"/>
+          </a:solidFill>
+          <a:ln>
+            <a:noFill/>
+          </a:ln>
+          <a:effectLst/>
+        </p:spPr>
+        <p:style>
+          <a:lnRef idx="1">
+            <a:schemeClr val="accent1"/>
+          </a:lnRef>
+          <a:fillRef idx="3">
+            <a:schemeClr val="accent1"/>
+          </a:fillRef>
+          <a:effectRef idx="2">
+            <a:schemeClr val="accent1"/>
+          </a:effectRef>
+          <a:fontRef idx="minor">
+            <a:schemeClr val="lt1"/>
+          </a:fontRef>
+        </p:style>
+        <p:txBody>
+          <a:bodyPr rtlCol="0" anchor="ctr"/>
+          <a:lstStyle/>
+          <a:p>
+            <a:pPr algn="ctr"/>
+          </a:p>
+        </p:txBody>
+      </p:sp>
+      <p:sp>
+        <p:nvSpPr>
+          <p:cNvPr id="22" name="Rectangle 21"/>
+          <p:cNvSpPr/>
+          <p:nvPr/>
+        </p:nvSpPr>
+        <p:spPr>
+          <a:xfrm>
+            <a:off x="14725650" y="5059299"/>
+            <a:ext cx="76200" cy="1122426"/>
+          </a:xfrm>
+          <a:prstGeom prst="rect">
+            <a:avLst/>
+          </a:prstGeom>
+          <a:solidFill>
+            <a:srgbClr val="CC2200"/>
+          </a:solidFill>
+          <a:ln>
+            <a:noFill/>
+          </a:ln>
+          <a:effectLst/>
+        </p:spPr>
+        <p:style>
+          <a:lnRef idx="1">
+            <a:schemeClr val="accent1"/>
+          </a:lnRef>
+          <a:fillRef idx="3">
+            <a:schemeClr val="accent1"/>
+          </a:fillRef>
+          <a:effectRef idx="2">
+            <a:schemeClr val="accent1"/>
+          </a:effectRef>
+          <a:fontRef idx="minor">
+            <a:schemeClr val="lt1"/>
+          </a:fontRef>
+        </p:style>
+        <p:txBody>
+          <a:bodyPr rtlCol="0" anchor="ctr"/>
+          <a:lstStyle/>
+          <a:p/>
+        </p:txBody>
+      </p:sp>
+      <p:sp>
+        <p:nvSpPr>
+          <p:cNvPr id="23" name="Isosceles Triangle 22"/>
+          <p:cNvSpPr/>
+          <p:nvPr/>
+        </p:nvSpPr>
+        <p:spPr>
+          <a:xfrm>
+            <a:off x="14657070" y="4905375"/>
+            <a:ext cx="213360" cy="213360"/>
+          </a:xfrm>
+          <a:prstGeom prst="triangle">
+            <a:avLst/>
+          </a:prstGeom>
+          <a:solidFill>
+            <a:srgbClr val="CC2200"/>
+          </a:solidFill>
+          <a:ln>
+            <a:noFill/>
+          </a:ln>
+          <a:effectLst/>
+        </p:spPr>
+        <p:style>
+          <a:lnRef idx="1">
+            <a:schemeClr val="accent1"/>
+          </a:lnRef>
+          <a:fillRef idx="3">
+            <a:schemeClr val="accent1"/>
+          </a:fillRef>
+          <a:effectRef idx="2">
+            <a:schemeClr val="accent1"/>
+          </a:effectRef>
+          <a:fontRef idx="minor">
+            <a:schemeClr val="lt1"/>
+          </a:fontRef>
+        </p:style>
+        <p:txBody>
+          <a:bodyPr rtlCol="0" anchor="ctr"/>
+          <a:lstStyle/>
+          <a:p>
+            <a:pPr algn="ctr"/>
+          </a:p>
+        </p:txBody>
+      </p:sp>
+      <p:sp>
+        <p:nvSpPr>
+          <p:cNvPr id="24" name="TextBox 23"/>
           <p:cNvSpPr txBox="1"/>
           <p:nvPr/>
         </p:nvSpPr>
@@ -9340,7 +9647,7 @@
       </p:sp>
       <p:sp>
         <p:nvSpPr>
-          <p:cNvPr id="21" name="TextBox 20"/>
+          <p:cNvPr id="25" name="TextBox 24"/>
           <p:cNvSpPr txBox="1"/>
           <p:nvPr/>
         </p:nvSpPr>
@@ -9375,45 +9682,95 @@
           </a:p>
         </p:txBody>
       </p:sp>
-      <p:cxnSp>
-        <p:nvCxnSpPr>
-          <p:cNvPr id="22" name="Connector 21"/>
-          <p:cNvCxnSpPr/>
-          <p:nvPr/>
-        </p:nvCxnSpPr>
-        <p:spPr>
-          <a:xfrm flipV="1">
-            <a:off x="13335000" y="3762375"/>
-            <a:ext cx="0" cy="333375"/>
-          </a:xfrm>
-          <a:prstGeom prst="line">
-            <a:avLst/>
-          </a:prstGeom>
-          <a:ln w="57150">
-            <a:solidFill>
-              <a:srgbClr val="CC2200"/>
-            </a:solidFill>
-            <a:tailEnd type="triangle" w="med" len="med"/>
-          </a:ln>
-        </p:spPr>
-        <p:style>
-          <a:lnRef idx="2">
-            <a:schemeClr val="accent1"/>
-          </a:lnRef>
-          <a:fillRef idx="0">
-            <a:schemeClr val="accent1"/>
-          </a:fillRef>
-          <a:effectRef idx="1">
-            <a:schemeClr val="accent1"/>
-          </a:effectRef>
-          <a:fontRef idx="minor">
-            <a:schemeClr val="tx1"/>
-          </a:fontRef>
-        </p:style>
-      </p:cxnSp>
-      <p:sp>
-        <p:nvSpPr>
-          <p:cNvPr id="23" name="TextBox 22"/>
+      <p:sp>
+        <p:nvSpPr>
+          <p:cNvPr id="26" name="Rectangle 25"/>
+          <p:cNvSpPr/>
+          <p:nvPr/>
+        </p:nvSpPr>
+        <p:spPr>
+          <a:xfrm>
+            <a:off x="13306425" y="3877818"/>
+            <a:ext cx="57150" cy="246507"/>
+          </a:xfrm>
+          <a:prstGeom prst="rect">
+            <a:avLst/>
+          </a:prstGeom>
+          <a:solidFill>
+            <a:srgbClr val="CC2200"/>
+          </a:solidFill>
+          <a:ln>
+            <a:noFill/>
+          </a:ln>
+          <a:effectLst/>
+        </p:spPr>
+        <p:style>
+          <a:lnRef idx="1">
+            <a:schemeClr val="accent1"/>
+          </a:lnRef>
+          <a:fillRef idx="3">
+            <a:schemeClr val="accent1"/>
+          </a:fillRef>
+          <a:effectRef idx="2">
+            <a:schemeClr val="accent1"/>
+          </a:effectRef>
+          <a:fontRef idx="minor">
+            <a:schemeClr val="lt1"/>
+          </a:fontRef>
+        </p:style>
+        <p:txBody>
+          <a:bodyPr rtlCol="0" anchor="ctr"/>
+          <a:lstStyle/>
+          <a:p/>
+        </p:txBody>
+      </p:sp>
+      <p:sp>
+        <p:nvSpPr>
+          <p:cNvPr id="27" name="Isosceles Triangle 26"/>
+          <p:cNvSpPr/>
+          <p:nvPr/>
+        </p:nvSpPr>
+        <p:spPr>
+          <a:xfrm>
+            <a:off x="13254990" y="3762375"/>
+            <a:ext cx="160020" cy="160020"/>
+          </a:xfrm>
+          <a:prstGeom prst="triangle">
+            <a:avLst/>
+          </a:prstGeom>
+          <a:solidFill>
+            <a:srgbClr val="CC2200"/>
+          </a:solidFill>
+          <a:ln>
+            <a:noFill/>
+          </a:ln>
+          <a:effectLst/>
+        </p:spPr>
+        <p:style>
+          <a:lnRef idx="1">
+            <a:schemeClr val="accent1"/>
+          </a:lnRef>
+          <a:fillRef idx="3">
+            <a:schemeClr val="accent1"/>
+          </a:fillRef>
+          <a:effectRef idx="2">
+            <a:schemeClr val="accent1"/>
+          </a:effectRef>
+          <a:fontRef idx="minor">
+            <a:schemeClr val="lt1"/>
+          </a:fontRef>
+        </p:style>
+        <p:txBody>
+          <a:bodyPr rtlCol="0" anchor="ctr"/>
+          <a:lstStyle/>
+          <a:p>
+            <a:pPr algn="ctr"/>
+          </a:p>
+        </p:txBody>
+      </p:sp>
+      <p:sp>
+        <p:nvSpPr>
+          <p:cNvPr id="28" name="TextBox 27"/>
           <p:cNvSpPr txBox="1"/>
           <p:nvPr/>
         </p:nvSpPr>
@@ -9454,7 +9811,7 @@
       </p:sp>
       <p:sp>
         <p:nvSpPr>
-          <p:cNvPr id="24" name="TextBox 23"/>
+          <p:cNvPr id="29" name="TextBox 28"/>
           <p:cNvSpPr txBox="1"/>
           <p:nvPr/>
         </p:nvSpPr>
@@ -9535,7 +9892,7 @@
       </p:sp>
       <p:sp>
         <p:nvSpPr>
-          <p:cNvPr id="25" name="TextBox 24"/>
+          <p:cNvPr id="30" name="TextBox 29"/>
           <p:cNvSpPr txBox="1"/>
           <p:nvPr/>
         </p:nvSpPr>
@@ -9583,7 +9940,7 @@
       </p:sp>
       <p:sp>
         <p:nvSpPr>
-          <p:cNvPr id="26" name="TextBox 25"/>
+          <p:cNvPr id="31" name="TextBox 30"/>
           <p:cNvSpPr txBox="1"/>
           <p:nvPr/>
         </p:nvSpPr>
@@ -12330,41 +12687,48 @@
           </a:p>
         </p:txBody>
       </p:sp>
-      <p:cxnSp>
-        <p:nvCxnSpPr>
-          <p:cNvPr id="10" name="Connector 9"/>
-          <p:cNvCxnSpPr/>
-          <p:nvPr/>
-        </p:nvCxnSpPr>
-        <p:spPr>
-          <a:xfrm>
-            <a:off x="914400" y="4533900"/>
-            <a:ext cx="16440150" cy="0"/>
-          </a:xfrm>
-          <a:prstGeom prst="line">
-            <a:avLst/>
-          </a:prstGeom>
-          <a:ln w="19050">
-            <a:solidFill>
-              <a:srgbClr val="2A1A1A"/>
-            </a:solidFill>
-          </a:ln>
-        </p:spPr>
-        <p:style>
-          <a:lnRef idx="2">
-            <a:schemeClr val="accent1"/>
-          </a:lnRef>
-          <a:fillRef idx="0">
-            <a:schemeClr val="accent1"/>
-          </a:fillRef>
-          <a:effectRef idx="1">
-            <a:schemeClr val="accent1"/>
-          </a:effectRef>
-          <a:fontRef idx="minor">
-            <a:schemeClr val="tx1"/>
-          </a:fontRef>
-        </p:style>
-      </p:cxnSp>
+      <p:sp>
+        <p:nvSpPr>
+          <p:cNvPr id="10" name="Rectangle 9"/>
+          <p:cNvSpPr/>
+          <p:nvPr/>
+        </p:nvSpPr>
+        <p:spPr>
+          <a:xfrm>
+            <a:off x="904875" y="4524375"/>
+            <a:ext cx="16459200" cy="19050"/>
+          </a:xfrm>
+          <a:prstGeom prst="rect">
+            <a:avLst/>
+          </a:prstGeom>
+          <a:solidFill>
+            <a:srgbClr val="2A1A1A"/>
+          </a:solidFill>
+          <a:ln>
+            <a:noFill/>
+          </a:ln>
+          <a:effectLst/>
+        </p:spPr>
+        <p:style>
+          <a:lnRef idx="1">
+            <a:schemeClr val="accent1"/>
+          </a:lnRef>
+          <a:fillRef idx="3">
+            <a:schemeClr val="accent1"/>
+          </a:fillRef>
+          <a:effectRef idx="2">
+            <a:schemeClr val="accent1"/>
+          </a:effectRef>
+          <a:fontRef idx="minor">
+            <a:schemeClr val="lt1"/>
+          </a:fontRef>
+        </p:style>
+        <p:txBody>
+          <a:bodyPr rtlCol="0" anchor="ctr"/>
+          <a:lstStyle/>
+          <a:p/>
+        </p:txBody>
+      </p:sp>
       <p:sp>
         <p:nvSpPr>
           <p:cNvPr id="11" name="TextBox 10"/>
@@ -12513,41 +12877,48 @@
           </a:p>
         </p:txBody>
       </p:sp>
-      <p:cxnSp>
-        <p:nvCxnSpPr>
-          <p:cNvPr id="15" name="Connector 14"/>
-          <p:cNvCxnSpPr/>
-          <p:nvPr/>
-        </p:nvCxnSpPr>
-        <p:spPr>
-          <a:xfrm>
-            <a:off x="914400" y="5524500"/>
-            <a:ext cx="16440150" cy="0"/>
-          </a:xfrm>
-          <a:prstGeom prst="line">
-            <a:avLst/>
-          </a:prstGeom>
-          <a:ln w="19050">
-            <a:solidFill>
-              <a:srgbClr val="2A1A1A"/>
-            </a:solidFill>
-          </a:ln>
-        </p:spPr>
-        <p:style>
-          <a:lnRef idx="2">
-            <a:schemeClr val="accent1"/>
-          </a:lnRef>
-          <a:fillRef idx="0">
-            <a:schemeClr val="accent1"/>
-          </a:fillRef>
-          <a:effectRef idx="1">
-            <a:schemeClr val="accent1"/>
-          </a:effectRef>
-          <a:fontRef idx="minor">
-            <a:schemeClr val="tx1"/>
-          </a:fontRef>
-        </p:style>
-      </p:cxnSp>
+      <p:sp>
+        <p:nvSpPr>
+          <p:cNvPr id="15" name="Rectangle 14"/>
+          <p:cNvSpPr/>
+          <p:nvPr/>
+        </p:nvSpPr>
+        <p:spPr>
+          <a:xfrm>
+            <a:off x="904875" y="5514975"/>
+            <a:ext cx="16459200" cy="19050"/>
+          </a:xfrm>
+          <a:prstGeom prst="rect">
+            <a:avLst/>
+          </a:prstGeom>
+          <a:solidFill>
+            <a:srgbClr val="2A1A1A"/>
+          </a:solidFill>
+          <a:ln>
+            <a:noFill/>
+          </a:ln>
+          <a:effectLst/>
+        </p:spPr>
+        <p:style>
+          <a:lnRef idx="1">
+            <a:schemeClr val="accent1"/>
+          </a:lnRef>
+          <a:fillRef idx="3">
+            <a:schemeClr val="accent1"/>
+          </a:fillRef>
+          <a:effectRef idx="2">
+            <a:schemeClr val="accent1"/>
+          </a:effectRef>
+          <a:fontRef idx="minor">
+            <a:schemeClr val="lt1"/>
+          </a:fontRef>
+        </p:style>
+        <p:txBody>
+          <a:bodyPr rtlCol="0" anchor="ctr"/>
+          <a:lstStyle/>
+          <a:p/>
+        </p:txBody>
+      </p:sp>
       <p:sp>
         <p:nvSpPr>
           <p:cNvPr id="16" name="TextBox 15"/>
@@ -12733,41 +13104,48 @@
           </a:p>
         </p:txBody>
       </p:sp>
-      <p:cxnSp>
-        <p:nvCxnSpPr>
-          <p:cNvPr id="21" name="Connector 20"/>
-          <p:cNvCxnSpPr/>
-          <p:nvPr/>
-        </p:nvCxnSpPr>
-        <p:spPr>
-          <a:xfrm>
-            <a:off x="914400" y="6515100"/>
-            <a:ext cx="16440150" cy="0"/>
-          </a:xfrm>
-          <a:prstGeom prst="line">
-            <a:avLst/>
-          </a:prstGeom>
-          <a:ln w="19050">
-            <a:solidFill>
-              <a:srgbClr val="2A1A1A"/>
-            </a:solidFill>
-          </a:ln>
-        </p:spPr>
-        <p:style>
-          <a:lnRef idx="2">
-            <a:schemeClr val="accent1"/>
-          </a:lnRef>
-          <a:fillRef idx="0">
-            <a:schemeClr val="accent1"/>
-          </a:fillRef>
-          <a:effectRef idx="1">
-            <a:schemeClr val="accent1"/>
-          </a:effectRef>
-          <a:fontRef idx="minor">
-            <a:schemeClr val="tx1"/>
-          </a:fontRef>
-        </p:style>
-      </p:cxnSp>
+      <p:sp>
+        <p:nvSpPr>
+          <p:cNvPr id="21" name="Rectangle 20"/>
+          <p:cNvSpPr/>
+          <p:nvPr/>
+        </p:nvSpPr>
+        <p:spPr>
+          <a:xfrm>
+            <a:off x="904875" y="6505575"/>
+            <a:ext cx="16459200" cy="19050"/>
+          </a:xfrm>
+          <a:prstGeom prst="rect">
+            <a:avLst/>
+          </a:prstGeom>
+          <a:solidFill>
+            <a:srgbClr val="2A1A1A"/>
+          </a:solidFill>
+          <a:ln>
+            <a:noFill/>
+          </a:ln>
+          <a:effectLst/>
+        </p:spPr>
+        <p:style>
+          <a:lnRef idx="1">
+            <a:schemeClr val="accent1"/>
+          </a:lnRef>
+          <a:fillRef idx="3">
+            <a:schemeClr val="accent1"/>
+          </a:fillRef>
+          <a:effectRef idx="2">
+            <a:schemeClr val="accent1"/>
+          </a:effectRef>
+          <a:fontRef idx="minor">
+            <a:schemeClr val="lt1"/>
+          </a:fontRef>
+        </p:style>
+        <p:txBody>
+          <a:bodyPr rtlCol="0" anchor="ctr"/>
+          <a:lstStyle/>
+          <a:p/>
+        </p:txBody>
+      </p:sp>
       <p:sp>
         <p:nvSpPr>
           <p:cNvPr id="22" name="TextBox 21"/>
@@ -12953,41 +13331,48 @@
           </a:p>
         </p:txBody>
       </p:sp>
-      <p:cxnSp>
-        <p:nvCxnSpPr>
-          <p:cNvPr id="27" name="Connector 26"/>
-          <p:cNvCxnSpPr/>
-          <p:nvPr/>
-        </p:nvCxnSpPr>
-        <p:spPr>
-          <a:xfrm>
-            <a:off x="914400" y="7505700"/>
-            <a:ext cx="16440150" cy="0"/>
-          </a:xfrm>
-          <a:prstGeom prst="line">
-            <a:avLst/>
-          </a:prstGeom>
-          <a:ln w="19050">
-            <a:solidFill>
-              <a:srgbClr val="2A1A1A"/>
-            </a:solidFill>
-          </a:ln>
-        </p:spPr>
-        <p:style>
-          <a:lnRef idx="2">
-            <a:schemeClr val="accent1"/>
-          </a:lnRef>
-          <a:fillRef idx="0">
-            <a:schemeClr val="accent1"/>
-          </a:fillRef>
-          <a:effectRef idx="1">
-            <a:schemeClr val="accent1"/>
-          </a:effectRef>
-          <a:fontRef idx="minor">
-            <a:schemeClr val="tx1"/>
-          </a:fontRef>
-        </p:style>
-      </p:cxnSp>
+      <p:sp>
+        <p:nvSpPr>
+          <p:cNvPr id="27" name="Rectangle 26"/>
+          <p:cNvSpPr/>
+          <p:nvPr/>
+        </p:nvSpPr>
+        <p:spPr>
+          <a:xfrm>
+            <a:off x="904875" y="7496175"/>
+            <a:ext cx="16459200" cy="19050"/>
+          </a:xfrm>
+          <a:prstGeom prst="rect">
+            <a:avLst/>
+          </a:prstGeom>
+          <a:solidFill>
+            <a:srgbClr val="2A1A1A"/>
+          </a:solidFill>
+          <a:ln>
+            <a:noFill/>
+          </a:ln>
+          <a:effectLst/>
+        </p:spPr>
+        <p:style>
+          <a:lnRef idx="1">
+            <a:schemeClr val="accent1"/>
+          </a:lnRef>
+          <a:fillRef idx="3">
+            <a:schemeClr val="accent1"/>
+          </a:fillRef>
+          <a:effectRef idx="2">
+            <a:schemeClr val="accent1"/>
+          </a:effectRef>
+          <a:fontRef idx="minor">
+            <a:schemeClr val="lt1"/>
+          </a:fontRef>
+        </p:style>
+        <p:txBody>
+          <a:bodyPr rtlCol="0" anchor="ctr"/>
+          <a:lstStyle/>
+          <a:p/>
+        </p:txBody>
+      </p:sp>
       <p:sp>
         <p:nvSpPr>
           <p:cNvPr id="28" name="TextBox 27"/>
@@ -13219,41 +13604,48 @@
           </a:p>
         </p:txBody>
       </p:sp>
-      <p:cxnSp>
-        <p:nvCxnSpPr>
-          <p:cNvPr id="34" name="Connector 33"/>
-          <p:cNvCxnSpPr/>
-          <p:nvPr/>
-        </p:nvCxnSpPr>
-        <p:spPr>
-          <a:xfrm>
-            <a:off x="914400" y="8496300"/>
-            <a:ext cx="16440150" cy="0"/>
-          </a:xfrm>
-          <a:prstGeom prst="line">
-            <a:avLst/>
-          </a:prstGeom>
-          <a:ln w="19050">
-            <a:solidFill>
-              <a:srgbClr val="2A1A1A"/>
-            </a:solidFill>
-          </a:ln>
-        </p:spPr>
-        <p:style>
-          <a:lnRef idx="2">
-            <a:schemeClr val="accent1"/>
-          </a:lnRef>
-          <a:fillRef idx="0">
-            <a:schemeClr val="accent1"/>
-          </a:fillRef>
-          <a:effectRef idx="1">
-            <a:schemeClr val="accent1"/>
-          </a:effectRef>
-          <a:fontRef idx="minor">
-            <a:schemeClr val="tx1"/>
-          </a:fontRef>
-        </p:style>
-      </p:cxnSp>
+      <p:sp>
+        <p:nvSpPr>
+          <p:cNvPr id="34" name="Rectangle 33"/>
+          <p:cNvSpPr/>
+          <p:nvPr/>
+        </p:nvSpPr>
+        <p:spPr>
+          <a:xfrm>
+            <a:off x="904875" y="8486775"/>
+            <a:ext cx="16459200" cy="19050"/>
+          </a:xfrm>
+          <a:prstGeom prst="rect">
+            <a:avLst/>
+          </a:prstGeom>
+          <a:solidFill>
+            <a:srgbClr val="2A1A1A"/>
+          </a:solidFill>
+          <a:ln>
+            <a:noFill/>
+          </a:ln>
+          <a:effectLst/>
+        </p:spPr>
+        <p:style>
+          <a:lnRef idx="1">
+            <a:schemeClr val="accent1"/>
+          </a:lnRef>
+          <a:fillRef idx="3">
+            <a:schemeClr val="accent1"/>
+          </a:fillRef>
+          <a:effectRef idx="2">
+            <a:schemeClr val="accent1"/>
+          </a:effectRef>
+          <a:fontRef idx="minor">
+            <a:schemeClr val="lt1"/>
+          </a:fontRef>
+        </p:style>
+        <p:txBody>
+          <a:bodyPr rtlCol="0" anchor="ctr"/>
+          <a:lstStyle/>
+          <a:p/>
+        </p:txBody>
+      </p:sp>
       <p:sp>
         <p:nvSpPr>
           <p:cNvPr id="35" name="TextBox 34"/>
@@ -13849,45 +14241,95 @@
           </a:p>
         </p:txBody>
       </p:sp>
-      <p:cxnSp>
-        <p:nvCxnSpPr>
-          <p:cNvPr id="8" name="Connector 7"/>
-          <p:cNvCxnSpPr/>
-          <p:nvPr/>
-        </p:nvCxnSpPr>
-        <p:spPr>
-          <a:xfrm>
-            <a:off x="4546600" y="3810000"/>
-            <a:ext cx="704850" cy="0"/>
-          </a:xfrm>
-          <a:prstGeom prst="line">
-            <a:avLst/>
-          </a:prstGeom>
-          <a:ln w="28575">
-            <a:solidFill>
-              <a:srgbClr val="9A7878"/>
-            </a:solidFill>
-            <a:tailEnd type="triangle" w="med" len="med"/>
-          </a:ln>
-        </p:spPr>
-        <p:style>
-          <a:lnRef idx="2">
-            <a:schemeClr val="accent1"/>
-          </a:lnRef>
-          <a:fillRef idx="0">
-            <a:schemeClr val="accent1"/>
-          </a:fillRef>
-          <a:effectRef idx="1">
-            <a:schemeClr val="accent1"/>
-          </a:effectRef>
-          <a:fontRef idx="minor">
-            <a:schemeClr val="tx1"/>
-          </a:fontRef>
-        </p:style>
-      </p:cxnSp>
-      <p:sp>
-        <p:nvSpPr>
-          <p:cNvPr id="9" name="Rounded Rectangle 8"/>
+      <p:sp>
+        <p:nvSpPr>
+          <p:cNvPr id="8" name="Rectangle 7"/>
+          <p:cNvSpPr/>
+          <p:nvPr/>
+        </p:nvSpPr>
+        <p:spPr>
+          <a:xfrm>
+            <a:off x="4532312" y="3795712"/>
+            <a:ext cx="596265" cy="28575"/>
+          </a:xfrm>
+          <a:prstGeom prst="rect">
+            <a:avLst/>
+          </a:prstGeom>
+          <a:solidFill>
+            <a:srgbClr val="9A7878"/>
+          </a:solidFill>
+          <a:ln>
+            <a:noFill/>
+          </a:ln>
+          <a:effectLst/>
+        </p:spPr>
+        <p:style>
+          <a:lnRef idx="1">
+            <a:schemeClr val="accent1"/>
+          </a:lnRef>
+          <a:fillRef idx="3">
+            <a:schemeClr val="accent1"/>
+          </a:fillRef>
+          <a:effectRef idx="2">
+            <a:schemeClr val="accent1"/>
+          </a:effectRef>
+          <a:fontRef idx="minor">
+            <a:schemeClr val="lt1"/>
+          </a:fontRef>
+        </p:style>
+        <p:txBody>
+          <a:bodyPr rtlCol="0" anchor="ctr"/>
+          <a:lstStyle/>
+          <a:p/>
+        </p:txBody>
+      </p:sp>
+      <p:sp>
+        <p:nvSpPr>
+          <p:cNvPr id="9" name="Isosceles Triangle 8"/>
+          <p:cNvSpPr/>
+          <p:nvPr/>
+        </p:nvSpPr>
+        <p:spPr>
+          <a:xfrm rot="5400000">
+            <a:off x="5099050" y="3733800"/>
+            <a:ext cx="152400" cy="152400"/>
+          </a:xfrm>
+          <a:prstGeom prst="triangle">
+            <a:avLst/>
+          </a:prstGeom>
+          <a:solidFill>
+            <a:srgbClr val="E05540"/>
+          </a:solidFill>
+          <a:ln>
+            <a:noFill/>
+          </a:ln>
+          <a:effectLst/>
+        </p:spPr>
+        <p:style>
+          <a:lnRef idx="1">
+            <a:schemeClr val="accent1"/>
+          </a:lnRef>
+          <a:fillRef idx="3">
+            <a:schemeClr val="accent1"/>
+          </a:fillRef>
+          <a:effectRef idx="2">
+            <a:schemeClr val="accent1"/>
+          </a:effectRef>
+          <a:fontRef idx="minor">
+            <a:schemeClr val="lt1"/>
+          </a:fontRef>
+        </p:style>
+        <p:txBody>
+          <a:bodyPr rtlCol="0" anchor="ctr"/>
+          <a:lstStyle/>
+          <a:p>
+            <a:pPr algn="ctr"/>
+          </a:p>
+        </p:txBody>
+      </p:sp>
+      <p:sp>
+        <p:nvSpPr>
+          <p:cNvPr id="10" name="Rounded Rectangle 9"/>
           <p:cNvSpPr/>
           <p:nvPr/>
         </p:nvSpPr>
@@ -13933,7 +14375,7 @@
       </p:sp>
       <p:sp>
         <p:nvSpPr>
-          <p:cNvPr id="10" name="TextBox 9"/>
+          <p:cNvPr id="11" name="TextBox 10"/>
           <p:cNvSpPr txBox="1"/>
           <p:nvPr/>
         </p:nvSpPr>
@@ -13970,7 +14412,7 @@
       </p:sp>
       <p:sp>
         <p:nvSpPr>
-          <p:cNvPr id="11" name="TextBox 10"/>
+          <p:cNvPr id="12" name="TextBox 11"/>
           <p:cNvSpPr txBox="1"/>
           <p:nvPr/>
         </p:nvSpPr>
@@ -14009,45 +14451,95 @@
           </a:p>
         </p:txBody>
       </p:sp>
-      <p:cxnSp>
-        <p:nvCxnSpPr>
-          <p:cNvPr id="12" name="Connector 11"/>
-          <p:cNvCxnSpPr/>
-          <p:nvPr/>
-        </p:nvCxnSpPr>
-        <p:spPr>
-          <a:xfrm>
-            <a:off x="8959850" y="3810000"/>
-            <a:ext cx="704850" cy="0"/>
-          </a:xfrm>
-          <a:prstGeom prst="line">
-            <a:avLst/>
-          </a:prstGeom>
-          <a:ln w="28575">
-            <a:solidFill>
-              <a:srgbClr val="9A7878"/>
-            </a:solidFill>
-            <a:tailEnd type="triangle" w="med" len="med"/>
-          </a:ln>
-        </p:spPr>
-        <p:style>
-          <a:lnRef idx="2">
-            <a:schemeClr val="accent1"/>
-          </a:lnRef>
-          <a:fillRef idx="0">
-            <a:schemeClr val="accent1"/>
-          </a:fillRef>
-          <a:effectRef idx="1">
-            <a:schemeClr val="accent1"/>
-          </a:effectRef>
-          <a:fontRef idx="minor">
-            <a:schemeClr val="tx1"/>
-          </a:fontRef>
-        </p:style>
-      </p:cxnSp>
-      <p:sp>
-        <p:nvSpPr>
-          <p:cNvPr id="13" name="Rounded Rectangle 12"/>
+      <p:sp>
+        <p:nvSpPr>
+          <p:cNvPr id="13" name="Rectangle 12"/>
+          <p:cNvSpPr/>
+          <p:nvPr/>
+        </p:nvSpPr>
+        <p:spPr>
+          <a:xfrm>
+            <a:off x="8945562" y="3795712"/>
+            <a:ext cx="596265" cy="28575"/>
+          </a:xfrm>
+          <a:prstGeom prst="rect">
+            <a:avLst/>
+          </a:prstGeom>
+          <a:solidFill>
+            <a:srgbClr val="9A7878"/>
+          </a:solidFill>
+          <a:ln>
+            <a:noFill/>
+          </a:ln>
+          <a:effectLst/>
+        </p:spPr>
+        <p:style>
+          <a:lnRef idx="1">
+            <a:schemeClr val="accent1"/>
+          </a:lnRef>
+          <a:fillRef idx="3">
+            <a:schemeClr val="accent1"/>
+          </a:fillRef>
+          <a:effectRef idx="2">
+            <a:schemeClr val="accent1"/>
+          </a:effectRef>
+          <a:fontRef idx="minor">
+            <a:schemeClr val="lt1"/>
+          </a:fontRef>
+        </p:style>
+        <p:txBody>
+          <a:bodyPr rtlCol="0" anchor="ctr"/>
+          <a:lstStyle/>
+          <a:p/>
+        </p:txBody>
+      </p:sp>
+      <p:sp>
+        <p:nvSpPr>
+          <p:cNvPr id="14" name="Isosceles Triangle 13"/>
+          <p:cNvSpPr/>
+          <p:nvPr/>
+        </p:nvSpPr>
+        <p:spPr>
+          <a:xfrm rot="5400000">
+            <a:off x="9512300" y="3733800"/>
+            <a:ext cx="152400" cy="152400"/>
+          </a:xfrm>
+          <a:prstGeom prst="triangle">
+            <a:avLst/>
+          </a:prstGeom>
+          <a:solidFill>
+            <a:srgbClr val="E05540"/>
+          </a:solidFill>
+          <a:ln>
+            <a:noFill/>
+          </a:ln>
+          <a:effectLst/>
+        </p:spPr>
+        <p:style>
+          <a:lnRef idx="1">
+            <a:schemeClr val="accent1"/>
+          </a:lnRef>
+          <a:fillRef idx="3">
+            <a:schemeClr val="accent1"/>
+          </a:fillRef>
+          <a:effectRef idx="2">
+            <a:schemeClr val="accent1"/>
+          </a:effectRef>
+          <a:fontRef idx="minor">
+            <a:schemeClr val="lt1"/>
+          </a:fontRef>
+        </p:style>
+        <p:txBody>
+          <a:bodyPr rtlCol="0" anchor="ctr"/>
+          <a:lstStyle/>
+          <a:p>
+            <a:pPr algn="ctr"/>
+          </a:p>
+        </p:txBody>
+      </p:sp>
+      <p:sp>
+        <p:nvSpPr>
+          <p:cNvPr id="15" name="Rounded Rectangle 14"/>
           <p:cNvSpPr/>
           <p:nvPr/>
         </p:nvSpPr>
@@ -14093,7 +14585,7 @@
       </p:sp>
       <p:sp>
         <p:nvSpPr>
-          <p:cNvPr id="14" name="TextBox 13"/>
+          <p:cNvPr id="16" name="TextBox 15"/>
           <p:cNvSpPr txBox="1"/>
           <p:nvPr/>
         </p:nvSpPr>
@@ -14130,7 +14622,7 @@
       </p:sp>
       <p:sp>
         <p:nvSpPr>
-          <p:cNvPr id="15" name="TextBox 14"/>
+          <p:cNvPr id="17" name="TextBox 16"/>
           <p:cNvSpPr txBox="1"/>
           <p:nvPr/>
         </p:nvSpPr>
@@ -14171,7 +14663,7 @@
       </p:sp>
       <p:pic>
         <p:nvPicPr>
-          <p:cNvPr id="16" name="Picture 15" descr="repeat.png"/>
+          <p:cNvPr id="18" name="Picture 17" descr="repeat.png"/>
           <p:cNvPicPr>
             <a:picLocks noChangeAspect="1"/>
           </p:cNvPicPr>
@@ -14195,7 +14687,7 @@
       </p:pic>
       <p:sp>
         <p:nvSpPr>
-          <p:cNvPr id="17" name="TextBox 16"/>
+          <p:cNvPr id="19" name="TextBox 18"/>
           <p:cNvSpPr txBox="1"/>
           <p:nvPr/>
         </p:nvSpPr>
@@ -14230,44 +14722,51 @@
           </a:p>
         </p:txBody>
       </p:sp>
-      <p:cxnSp>
-        <p:nvCxnSpPr>
-          <p:cNvPr id="18" name="Connector 17"/>
-          <p:cNvCxnSpPr/>
-          <p:nvPr/>
-        </p:nvCxnSpPr>
-        <p:spPr>
-          <a:xfrm>
-            <a:off x="1485900" y="6477000"/>
-            <a:ext cx="15316200" cy="0"/>
-          </a:xfrm>
-          <a:prstGeom prst="line">
-            <a:avLst/>
-          </a:prstGeom>
-          <a:ln w="38100">
-            <a:solidFill>
-              <a:srgbClr val="2A1A1A"/>
-            </a:solidFill>
-          </a:ln>
-        </p:spPr>
-        <p:style>
-          <a:lnRef idx="2">
-            <a:schemeClr val="accent1"/>
-          </a:lnRef>
-          <a:fillRef idx="0">
-            <a:schemeClr val="accent1"/>
-          </a:fillRef>
-          <a:effectRef idx="1">
-            <a:schemeClr val="accent1"/>
-          </a:effectRef>
-          <a:fontRef idx="minor">
-            <a:schemeClr val="tx1"/>
-          </a:fontRef>
-        </p:style>
-      </p:cxnSp>
-      <p:sp>
-        <p:nvSpPr>
-          <p:cNvPr id="19" name="Oval 18"/>
+      <p:sp>
+        <p:nvSpPr>
+          <p:cNvPr id="20" name="Rectangle 19"/>
+          <p:cNvSpPr/>
+          <p:nvPr/>
+        </p:nvSpPr>
+        <p:spPr>
+          <a:xfrm>
+            <a:off x="1466850" y="6457950"/>
+            <a:ext cx="15354300" cy="38100"/>
+          </a:xfrm>
+          <a:prstGeom prst="rect">
+            <a:avLst/>
+          </a:prstGeom>
+          <a:solidFill>
+            <a:srgbClr val="2A1A1A"/>
+          </a:solidFill>
+          <a:ln>
+            <a:noFill/>
+          </a:ln>
+          <a:effectLst/>
+        </p:spPr>
+        <p:style>
+          <a:lnRef idx="1">
+            <a:schemeClr val="accent1"/>
+          </a:lnRef>
+          <a:fillRef idx="3">
+            <a:schemeClr val="accent1"/>
+          </a:fillRef>
+          <a:effectRef idx="2">
+            <a:schemeClr val="accent1"/>
+          </a:effectRef>
+          <a:fontRef idx="minor">
+            <a:schemeClr val="lt1"/>
+          </a:fontRef>
+        </p:style>
+        <p:txBody>
+          <a:bodyPr rtlCol="0" anchor="ctr"/>
+          <a:lstStyle/>
+          <a:p/>
+        </p:txBody>
+      </p:sp>
+      <p:sp>
+        <p:nvSpPr>
+          <p:cNvPr id="21" name="Oval 20"/>
           <p:cNvSpPr/>
           <p:nvPr/>
         </p:nvSpPr>
@@ -14311,7 +14810,7 @@
       </p:sp>
       <p:sp>
         <p:nvSpPr>
-          <p:cNvPr id="20" name="TextBox 19"/>
+          <p:cNvPr id="22" name="TextBox 21"/>
           <p:cNvSpPr txBox="1"/>
           <p:nvPr/>
         </p:nvSpPr>
@@ -14348,7 +14847,7 @@
       </p:sp>
       <p:sp>
         <p:nvSpPr>
-          <p:cNvPr id="21" name="Rounded Rectangle 20"/>
+          <p:cNvPr id="23" name="Rounded Rectangle 22"/>
           <p:cNvSpPr/>
           <p:nvPr/>
         </p:nvSpPr>
@@ -14394,7 +14893,7 @@
       </p:sp>
       <p:sp>
         <p:nvSpPr>
-          <p:cNvPr id="22" name="TextBox 21"/>
+          <p:cNvPr id="24" name="TextBox 23"/>
           <p:cNvSpPr txBox="1"/>
           <p:nvPr/>
         </p:nvSpPr>
@@ -14431,7 +14930,7 @@
       </p:sp>
       <p:sp>
         <p:nvSpPr>
-          <p:cNvPr id="23" name="Oval 22"/>
+          <p:cNvPr id="25" name="Oval 24"/>
           <p:cNvSpPr/>
           <p:nvPr/>
         </p:nvSpPr>
@@ -14475,7 +14974,7 @@
       </p:sp>
       <p:sp>
         <p:nvSpPr>
-          <p:cNvPr id="24" name="TextBox 23"/>
+          <p:cNvPr id="26" name="TextBox 25"/>
           <p:cNvSpPr txBox="1"/>
           <p:nvPr/>
         </p:nvSpPr>
@@ -14512,7 +15011,7 @@
       </p:sp>
       <p:sp>
         <p:nvSpPr>
-          <p:cNvPr id="25" name="Rounded Rectangle 24"/>
+          <p:cNvPr id="27" name="Rounded Rectangle 26"/>
           <p:cNvSpPr/>
           <p:nvPr/>
         </p:nvSpPr>
@@ -14558,7 +15057,7 @@
       </p:sp>
       <p:sp>
         <p:nvSpPr>
-          <p:cNvPr id="26" name="TextBox 25"/>
+          <p:cNvPr id="28" name="TextBox 27"/>
           <p:cNvSpPr txBox="1"/>
           <p:nvPr/>
         </p:nvSpPr>
@@ -14595,7 +15094,7 @@
       </p:sp>
       <p:sp>
         <p:nvSpPr>
-          <p:cNvPr id="27" name="Oval 26"/>
+          <p:cNvPr id="29" name="Oval 28"/>
           <p:cNvSpPr/>
           <p:nvPr/>
         </p:nvSpPr>
@@ -14639,7 +15138,7 @@
       </p:sp>
       <p:sp>
         <p:nvSpPr>
-          <p:cNvPr id="28" name="TextBox 27"/>
+          <p:cNvPr id="30" name="TextBox 29"/>
           <p:cNvSpPr txBox="1"/>
           <p:nvPr/>
         </p:nvSpPr>
@@ -14676,7 +15175,7 @@
       </p:sp>
       <p:sp>
         <p:nvSpPr>
-          <p:cNvPr id="29" name="Rounded Rectangle 28"/>
+          <p:cNvPr id="31" name="Rounded Rectangle 30"/>
           <p:cNvSpPr/>
           <p:nvPr/>
         </p:nvSpPr>
@@ -14722,7 +15221,7 @@
       </p:sp>
       <p:sp>
         <p:nvSpPr>
-          <p:cNvPr id="30" name="TextBox 29"/>
+          <p:cNvPr id="32" name="TextBox 31"/>
           <p:cNvSpPr txBox="1"/>
           <p:nvPr/>
         </p:nvSpPr>
@@ -14759,7 +15258,7 @@
       </p:sp>
       <p:sp>
         <p:nvSpPr>
-          <p:cNvPr id="31" name="Oval 30"/>
+          <p:cNvPr id="33" name="Oval 32"/>
           <p:cNvSpPr/>
           <p:nvPr/>
         </p:nvSpPr>
@@ -14803,7 +15302,7 @@
       </p:sp>
       <p:sp>
         <p:nvSpPr>
-          <p:cNvPr id="32" name="TextBox 31"/>
+          <p:cNvPr id="34" name="TextBox 33"/>
           <p:cNvSpPr txBox="1"/>
           <p:nvPr/>
         </p:nvSpPr>
@@ -14840,7 +15339,7 @@
       </p:sp>
       <p:sp>
         <p:nvSpPr>
-          <p:cNvPr id="33" name="Rounded Rectangle 32"/>
+          <p:cNvPr id="35" name="Rounded Rectangle 34"/>
           <p:cNvSpPr/>
           <p:nvPr/>
         </p:nvSpPr>
@@ -14886,7 +15385,7 @@
       </p:sp>
       <p:sp>
         <p:nvSpPr>
-          <p:cNvPr id="34" name="TextBox 33"/>
+          <p:cNvPr id="36" name="TextBox 35"/>
           <p:cNvSpPr txBox="1"/>
           <p:nvPr/>
         </p:nvSpPr>
@@ -14923,7 +15422,7 @@
       </p:sp>
       <p:sp>
         <p:nvSpPr>
-          <p:cNvPr id="35" name="Oval 34"/>
+          <p:cNvPr id="37" name="Oval 36"/>
           <p:cNvSpPr/>
           <p:nvPr/>
         </p:nvSpPr>
@@ -14967,7 +15466,7 @@
       </p:sp>
       <p:sp>
         <p:nvSpPr>
-          <p:cNvPr id="36" name="TextBox 35"/>
+          <p:cNvPr id="38" name="TextBox 37"/>
           <p:cNvSpPr txBox="1"/>
           <p:nvPr/>
         </p:nvSpPr>
@@ -15004,7 +15503,7 @@
       </p:sp>
       <p:sp>
         <p:nvSpPr>
-          <p:cNvPr id="37" name="Rounded Rectangle 36"/>
+          <p:cNvPr id="39" name="Rounded Rectangle 38"/>
           <p:cNvSpPr/>
           <p:nvPr/>
         </p:nvSpPr>
@@ -15050,7 +15549,7 @@
       </p:sp>
       <p:sp>
         <p:nvSpPr>
-          <p:cNvPr id="38" name="TextBox 37"/>
+          <p:cNvPr id="40" name="TextBox 39"/>
           <p:cNvSpPr txBox="1"/>
           <p:nvPr/>
         </p:nvSpPr>
@@ -15087,7 +15586,7 @@
       </p:sp>
       <p:sp>
         <p:nvSpPr>
-          <p:cNvPr id="39" name="Oval 38"/>
+          <p:cNvPr id="41" name="Oval 40"/>
           <p:cNvSpPr/>
           <p:nvPr/>
         </p:nvSpPr>
@@ -15131,7 +15630,7 @@
       </p:sp>
       <p:sp>
         <p:nvSpPr>
-          <p:cNvPr id="40" name="TextBox 39"/>
+          <p:cNvPr id="42" name="TextBox 41"/>
           <p:cNvSpPr txBox="1"/>
           <p:nvPr/>
         </p:nvSpPr>
@@ -15168,7 +15667,7 @@
       </p:sp>
       <p:sp>
         <p:nvSpPr>
-          <p:cNvPr id="41" name="Rounded Rectangle 40"/>
+          <p:cNvPr id="43" name="Rounded Rectangle 42"/>
           <p:cNvSpPr/>
           <p:nvPr/>
         </p:nvSpPr>
@@ -15214,7 +15713,7 @@
       </p:sp>
       <p:sp>
         <p:nvSpPr>
-          <p:cNvPr id="42" name="TextBox 41"/>
+          <p:cNvPr id="44" name="TextBox 43"/>
           <p:cNvSpPr txBox="1"/>
           <p:nvPr/>
         </p:nvSpPr>
@@ -15251,7 +15750,7 @@
       </p:sp>
       <p:sp>
         <p:nvSpPr>
-          <p:cNvPr id="43" name="Oval 42"/>
+          <p:cNvPr id="45" name="Oval 44"/>
           <p:cNvSpPr/>
           <p:nvPr/>
         </p:nvSpPr>
@@ -15295,7 +15794,7 @@
       </p:sp>
       <p:sp>
         <p:nvSpPr>
-          <p:cNvPr id="44" name="TextBox 43"/>
+          <p:cNvPr id="46" name="TextBox 45"/>
           <p:cNvSpPr txBox="1"/>
           <p:nvPr/>
         </p:nvSpPr>
@@ -15332,7 +15831,7 @@
       </p:sp>
       <p:sp>
         <p:nvSpPr>
-          <p:cNvPr id="45" name="Rounded Rectangle 44"/>
+          <p:cNvPr id="47" name="Rounded Rectangle 46"/>
           <p:cNvSpPr/>
           <p:nvPr/>
         </p:nvSpPr>
@@ -15378,7 +15877,7 @@
       </p:sp>
       <p:sp>
         <p:nvSpPr>
-          <p:cNvPr id="46" name="TextBox 45"/>
+          <p:cNvPr id="48" name="TextBox 47"/>
           <p:cNvSpPr txBox="1"/>
           <p:nvPr/>
         </p:nvSpPr>
@@ -15415,7 +15914,7 @@
       </p:sp>
       <p:sp>
         <p:nvSpPr>
-          <p:cNvPr id="47" name="Oval 46"/>
+          <p:cNvPr id="49" name="Oval 48"/>
           <p:cNvSpPr/>
           <p:nvPr/>
         </p:nvSpPr>
@@ -15459,7 +15958,7 @@
       </p:sp>
       <p:sp>
         <p:nvSpPr>
-          <p:cNvPr id="48" name="TextBox 47"/>
+          <p:cNvPr id="50" name="TextBox 49"/>
           <p:cNvSpPr txBox="1"/>
           <p:nvPr/>
         </p:nvSpPr>
@@ -15496,7 +15995,7 @@
       </p:sp>
       <p:sp>
         <p:nvSpPr>
-          <p:cNvPr id="49" name="Rounded Rectangle 48"/>
+          <p:cNvPr id="51" name="Rounded Rectangle 50"/>
           <p:cNvSpPr/>
           <p:nvPr/>
         </p:nvSpPr>
@@ -15542,7 +16041,7 @@
       </p:sp>
       <p:sp>
         <p:nvSpPr>
-          <p:cNvPr id="50" name="TextBox 49"/>
+          <p:cNvPr id="52" name="TextBox 51"/>
           <p:cNvSpPr txBox="1"/>
           <p:nvPr/>
         </p:nvSpPr>
@@ -15579,7 +16078,7 @@
       </p:sp>
       <p:sp>
         <p:nvSpPr>
-          <p:cNvPr id="51" name="Oval 50"/>
+          <p:cNvPr id="53" name="Oval 52"/>
           <p:cNvSpPr/>
           <p:nvPr/>
         </p:nvSpPr>
@@ -15623,7 +16122,7 @@
       </p:sp>
       <p:sp>
         <p:nvSpPr>
-          <p:cNvPr id="52" name="TextBox 51"/>
+          <p:cNvPr id="54" name="TextBox 53"/>
           <p:cNvSpPr txBox="1"/>
           <p:nvPr/>
         </p:nvSpPr>
@@ -15660,7 +16159,7 @@
       </p:sp>
       <p:sp>
         <p:nvSpPr>
-          <p:cNvPr id="53" name="Rounded Rectangle 52"/>
+          <p:cNvPr id="55" name="Rounded Rectangle 54"/>
           <p:cNvSpPr/>
           <p:nvPr/>
         </p:nvSpPr>
@@ -15704,7 +16203,7 @@
       </p:sp>
       <p:pic>
         <p:nvPicPr>
-          <p:cNvPr id="54" name="Picture 53" descr="stopwatch.png"/>
+          <p:cNvPr id="56" name="Picture 55" descr="stopwatch.png"/>
           <p:cNvPicPr>
             <a:picLocks noChangeAspect="1"/>
           </p:cNvPicPr>
@@ -15728,7 +16227,7 @@
       </p:pic>
       <p:sp>
         <p:nvSpPr>
-          <p:cNvPr id="55" name="TextBox 54"/>
+          <p:cNvPr id="57" name="TextBox 56"/>
           <p:cNvSpPr txBox="1"/>
           <p:nvPr/>
         </p:nvSpPr>
@@ -15780,7 +16279,7 @@
       </p:sp>
       <p:sp>
         <p:nvSpPr>
-          <p:cNvPr id="56" name="TextBox 55"/>
+          <p:cNvPr id="58" name="TextBox 57"/>
           <p:cNvSpPr txBox="1"/>
           <p:nvPr/>
         </p:nvSpPr>
@@ -15828,7 +16327,7 @@
       </p:sp>
       <p:sp>
         <p:nvSpPr>
-          <p:cNvPr id="57" name="TextBox 56"/>
+          <p:cNvPr id="59" name="TextBox 58"/>
           <p:cNvSpPr txBox="1"/>
           <p:nvPr/>
         </p:nvSpPr>
@@ -20757,41 +21256,48 @@
           </a:p>
         </p:txBody>
       </p:sp>
-      <p:cxnSp>
-        <p:nvCxnSpPr>
-          <p:cNvPr id="7" name="Connector 6"/>
-          <p:cNvCxnSpPr/>
-          <p:nvPr/>
-        </p:nvCxnSpPr>
-        <p:spPr>
-          <a:xfrm>
-            <a:off x="1466850" y="4248150"/>
-            <a:ext cx="1569720" cy="0"/>
-          </a:xfrm>
-          <a:prstGeom prst="line">
-            <a:avLst/>
-          </a:prstGeom>
-          <a:ln w="28575">
-            <a:solidFill>
-              <a:srgbClr val="9A7878"/>
-            </a:solidFill>
-          </a:ln>
-        </p:spPr>
-        <p:style>
-          <a:lnRef idx="2">
-            <a:schemeClr val="accent1"/>
-          </a:lnRef>
-          <a:fillRef idx="0">
-            <a:schemeClr val="accent1"/>
-          </a:fillRef>
-          <a:effectRef idx="1">
-            <a:schemeClr val="accent1"/>
-          </a:effectRef>
-          <a:fontRef idx="minor">
-            <a:schemeClr val="tx1"/>
-          </a:fontRef>
-        </p:style>
-      </p:cxnSp>
+      <p:sp>
+        <p:nvSpPr>
+          <p:cNvPr id="7" name="Rectangle 6"/>
+          <p:cNvSpPr/>
+          <p:nvPr/>
+        </p:nvSpPr>
+        <p:spPr>
+          <a:xfrm>
+            <a:off x="1452562" y="4233862"/>
+            <a:ext cx="1598295" cy="28575"/>
+          </a:xfrm>
+          <a:prstGeom prst="rect">
+            <a:avLst/>
+          </a:prstGeom>
+          <a:solidFill>
+            <a:srgbClr val="9A7878"/>
+          </a:solidFill>
+          <a:ln>
+            <a:noFill/>
+          </a:ln>
+          <a:effectLst/>
+        </p:spPr>
+        <p:style>
+          <a:lnRef idx="1">
+            <a:schemeClr val="accent1"/>
+          </a:lnRef>
+          <a:fillRef idx="3">
+            <a:schemeClr val="accent1"/>
+          </a:fillRef>
+          <a:effectRef idx="2">
+            <a:schemeClr val="accent1"/>
+          </a:effectRef>
+          <a:fontRef idx="minor">
+            <a:schemeClr val="lt1"/>
+          </a:fontRef>
+        </p:style>
+        <p:txBody>
+          <a:bodyPr rtlCol="0" anchor="ctr"/>
+          <a:lstStyle/>
+          <a:p/>
+        </p:txBody>
+      </p:sp>
       <p:sp>
         <p:nvSpPr>
           <p:cNvPr id="8" name="TextBox 7"/>
@@ -20866,41 +21372,48 @@
           </a:p>
         </p:txBody>
       </p:sp>
-      <p:cxnSp>
-        <p:nvCxnSpPr>
-          <p:cNvPr id="10" name="Connector 9"/>
-          <p:cNvCxnSpPr/>
-          <p:nvPr/>
-        </p:nvCxnSpPr>
-        <p:spPr>
-          <a:xfrm>
-            <a:off x="3112770" y="4248150"/>
-            <a:ext cx="3764280" cy="0"/>
-          </a:xfrm>
-          <a:prstGeom prst="line">
-            <a:avLst/>
-          </a:prstGeom>
-          <a:ln w="28575">
-            <a:solidFill>
-              <a:srgbClr val="9A7878"/>
-            </a:solidFill>
-          </a:ln>
-        </p:spPr>
-        <p:style>
-          <a:lnRef idx="2">
-            <a:schemeClr val="accent1"/>
-          </a:lnRef>
-          <a:fillRef idx="0">
-            <a:schemeClr val="accent1"/>
-          </a:fillRef>
-          <a:effectRef idx="1">
-            <a:schemeClr val="accent1"/>
-          </a:effectRef>
-          <a:fontRef idx="minor">
-            <a:schemeClr val="tx1"/>
-          </a:fontRef>
-        </p:style>
-      </p:cxnSp>
+      <p:sp>
+        <p:nvSpPr>
+          <p:cNvPr id="10" name="Rectangle 9"/>
+          <p:cNvSpPr/>
+          <p:nvPr/>
+        </p:nvSpPr>
+        <p:spPr>
+          <a:xfrm>
+            <a:off x="3098482" y="4233862"/>
+            <a:ext cx="3792855" cy="28575"/>
+          </a:xfrm>
+          <a:prstGeom prst="rect">
+            <a:avLst/>
+          </a:prstGeom>
+          <a:solidFill>
+            <a:srgbClr val="9A7878"/>
+          </a:solidFill>
+          <a:ln>
+            <a:noFill/>
+          </a:ln>
+          <a:effectLst/>
+        </p:spPr>
+        <p:style>
+          <a:lnRef idx="1">
+            <a:schemeClr val="accent1"/>
+          </a:lnRef>
+          <a:fillRef idx="3">
+            <a:schemeClr val="accent1"/>
+          </a:fillRef>
+          <a:effectRef idx="2">
+            <a:schemeClr val="accent1"/>
+          </a:effectRef>
+          <a:fontRef idx="minor">
+            <a:schemeClr val="lt1"/>
+          </a:fontRef>
+        </p:style>
+        <p:txBody>
+          <a:bodyPr rtlCol="0" anchor="ctr"/>
+          <a:lstStyle/>
+          <a:p/>
+        </p:txBody>
+      </p:sp>
       <p:sp>
         <p:nvSpPr>
           <p:cNvPr id="11" name="TextBox 10"/>
@@ -20975,41 +21488,48 @@
           </a:p>
         </p:txBody>
       </p:sp>
-      <p:cxnSp>
-        <p:nvCxnSpPr>
-          <p:cNvPr id="13" name="Connector 12"/>
-          <p:cNvCxnSpPr/>
-          <p:nvPr/>
-        </p:nvCxnSpPr>
-        <p:spPr>
-          <a:xfrm>
-            <a:off x="6953250" y="4248150"/>
-            <a:ext cx="2667000" cy="0"/>
-          </a:xfrm>
-          <a:prstGeom prst="line">
-            <a:avLst/>
-          </a:prstGeom>
-          <a:ln w="28575">
-            <a:solidFill>
-              <a:srgbClr val="9A7878"/>
-            </a:solidFill>
-          </a:ln>
-        </p:spPr>
-        <p:style>
-          <a:lnRef idx="2">
-            <a:schemeClr val="accent1"/>
-          </a:lnRef>
-          <a:fillRef idx="0">
-            <a:schemeClr val="accent1"/>
-          </a:fillRef>
-          <a:effectRef idx="1">
-            <a:schemeClr val="accent1"/>
-          </a:effectRef>
-          <a:fontRef idx="minor">
-            <a:schemeClr val="tx1"/>
-          </a:fontRef>
-        </p:style>
-      </p:cxnSp>
+      <p:sp>
+        <p:nvSpPr>
+          <p:cNvPr id="13" name="Rectangle 12"/>
+          <p:cNvSpPr/>
+          <p:nvPr/>
+        </p:nvSpPr>
+        <p:spPr>
+          <a:xfrm>
+            <a:off x="6938962" y="4233862"/>
+            <a:ext cx="2695575" cy="28575"/>
+          </a:xfrm>
+          <a:prstGeom prst="rect">
+            <a:avLst/>
+          </a:prstGeom>
+          <a:solidFill>
+            <a:srgbClr val="9A7878"/>
+          </a:solidFill>
+          <a:ln>
+            <a:noFill/>
+          </a:ln>
+          <a:effectLst/>
+        </p:spPr>
+        <p:style>
+          <a:lnRef idx="1">
+            <a:schemeClr val="accent1"/>
+          </a:lnRef>
+          <a:fillRef idx="3">
+            <a:schemeClr val="accent1"/>
+          </a:fillRef>
+          <a:effectRef idx="2">
+            <a:schemeClr val="accent1"/>
+          </a:effectRef>
+          <a:fontRef idx="minor">
+            <a:schemeClr val="lt1"/>
+          </a:fontRef>
+        </p:style>
+        <p:txBody>
+          <a:bodyPr rtlCol="0" anchor="ctr"/>
+          <a:lstStyle/>
+          <a:p/>
+        </p:txBody>
+      </p:sp>
       <p:sp>
         <p:nvSpPr>
           <p:cNvPr id="14" name="TextBox 13"/>
@@ -21208,41 +21728,48 @@
           </a:p>
         </p:txBody>
       </p:sp>
-      <p:cxnSp>
-        <p:nvCxnSpPr>
-          <p:cNvPr id="19" name="Connector 18"/>
-          <p:cNvCxnSpPr/>
-          <p:nvPr/>
-        </p:nvCxnSpPr>
-        <p:spPr>
-          <a:xfrm>
-            <a:off x="1466850" y="7105650"/>
-            <a:ext cx="2941320" cy="0"/>
-          </a:xfrm>
-          <a:prstGeom prst="line">
-            <a:avLst/>
-          </a:prstGeom>
-          <a:ln w="28575">
-            <a:solidFill>
-              <a:srgbClr val="9A7878"/>
-            </a:solidFill>
-          </a:ln>
-        </p:spPr>
-        <p:style>
-          <a:lnRef idx="2">
-            <a:schemeClr val="accent1"/>
-          </a:lnRef>
-          <a:fillRef idx="0">
-            <a:schemeClr val="accent1"/>
-          </a:fillRef>
-          <a:effectRef idx="1">
-            <a:schemeClr val="accent1"/>
-          </a:effectRef>
-          <a:fontRef idx="minor">
-            <a:schemeClr val="tx1"/>
-          </a:fontRef>
-        </p:style>
-      </p:cxnSp>
+      <p:sp>
+        <p:nvSpPr>
+          <p:cNvPr id="19" name="Rectangle 18"/>
+          <p:cNvSpPr/>
+          <p:nvPr/>
+        </p:nvSpPr>
+        <p:spPr>
+          <a:xfrm>
+            <a:off x="1452562" y="7091362"/>
+            <a:ext cx="2969895" cy="28575"/>
+          </a:xfrm>
+          <a:prstGeom prst="rect">
+            <a:avLst/>
+          </a:prstGeom>
+          <a:solidFill>
+            <a:srgbClr val="9A7878"/>
+          </a:solidFill>
+          <a:ln>
+            <a:noFill/>
+          </a:ln>
+          <a:effectLst/>
+        </p:spPr>
+        <p:style>
+          <a:lnRef idx="1">
+            <a:schemeClr val="accent1"/>
+          </a:lnRef>
+          <a:fillRef idx="3">
+            <a:schemeClr val="accent1"/>
+          </a:fillRef>
+          <a:effectRef idx="2">
+            <a:schemeClr val="accent1"/>
+          </a:effectRef>
+          <a:fontRef idx="minor">
+            <a:schemeClr val="lt1"/>
+          </a:fontRef>
+        </p:style>
+        <p:txBody>
+          <a:bodyPr rtlCol="0" anchor="ctr"/>
+          <a:lstStyle/>
+          <a:p/>
+        </p:txBody>
+      </p:sp>
       <p:sp>
         <p:nvSpPr>
           <p:cNvPr id="20" name="TextBox 19"/>
@@ -21317,41 +21844,48 @@
           </a:p>
         </p:txBody>
       </p:sp>
-      <p:cxnSp>
-        <p:nvCxnSpPr>
-          <p:cNvPr id="22" name="Connector 21"/>
-          <p:cNvCxnSpPr/>
-          <p:nvPr/>
-        </p:nvCxnSpPr>
-        <p:spPr>
-          <a:xfrm>
-            <a:off x="4484370" y="7105650"/>
-            <a:ext cx="2392680" cy="0"/>
-          </a:xfrm>
-          <a:prstGeom prst="line">
-            <a:avLst/>
-          </a:prstGeom>
-          <a:ln w="28575">
-            <a:solidFill>
-              <a:srgbClr val="9A7878"/>
-            </a:solidFill>
-          </a:ln>
-        </p:spPr>
-        <p:style>
-          <a:lnRef idx="2">
-            <a:schemeClr val="accent1"/>
-          </a:lnRef>
-          <a:fillRef idx="0">
-            <a:schemeClr val="accent1"/>
-          </a:fillRef>
-          <a:effectRef idx="1">
-            <a:schemeClr val="accent1"/>
-          </a:effectRef>
-          <a:fontRef idx="minor">
-            <a:schemeClr val="tx1"/>
-          </a:fontRef>
-        </p:style>
-      </p:cxnSp>
+      <p:sp>
+        <p:nvSpPr>
+          <p:cNvPr id="22" name="Rectangle 21"/>
+          <p:cNvSpPr/>
+          <p:nvPr/>
+        </p:nvSpPr>
+        <p:spPr>
+          <a:xfrm>
+            <a:off x="4470082" y="7091362"/>
+            <a:ext cx="2421255" cy="28575"/>
+          </a:xfrm>
+          <a:prstGeom prst="rect">
+            <a:avLst/>
+          </a:prstGeom>
+          <a:solidFill>
+            <a:srgbClr val="9A7878"/>
+          </a:solidFill>
+          <a:ln>
+            <a:noFill/>
+          </a:ln>
+          <a:effectLst/>
+        </p:spPr>
+        <p:style>
+          <a:lnRef idx="1">
+            <a:schemeClr val="accent1"/>
+          </a:lnRef>
+          <a:fillRef idx="3">
+            <a:schemeClr val="accent1"/>
+          </a:fillRef>
+          <a:effectRef idx="2">
+            <a:schemeClr val="accent1"/>
+          </a:effectRef>
+          <a:fontRef idx="minor">
+            <a:schemeClr val="lt1"/>
+          </a:fontRef>
+        </p:style>
+        <p:txBody>
+          <a:bodyPr rtlCol="0" anchor="ctr"/>
+          <a:lstStyle/>
+          <a:p/>
+        </p:txBody>
+      </p:sp>
       <p:sp>
         <p:nvSpPr>
           <p:cNvPr id="23" name="TextBox 22"/>
@@ -21426,41 +21960,48 @@
           </a:p>
         </p:txBody>
       </p:sp>
-      <p:cxnSp>
-        <p:nvCxnSpPr>
-          <p:cNvPr id="25" name="Connector 24"/>
-          <p:cNvCxnSpPr/>
-          <p:nvPr/>
-        </p:nvCxnSpPr>
-        <p:spPr>
-          <a:xfrm>
-            <a:off x="6953250" y="7105650"/>
-            <a:ext cx="472440" cy="0"/>
-          </a:xfrm>
-          <a:prstGeom prst="line">
-            <a:avLst/>
-          </a:prstGeom>
-          <a:ln w="28575">
-            <a:solidFill>
-              <a:srgbClr val="9A7878"/>
-            </a:solidFill>
-          </a:ln>
-        </p:spPr>
-        <p:style>
-          <a:lnRef idx="2">
-            <a:schemeClr val="accent1"/>
-          </a:lnRef>
-          <a:fillRef idx="0">
-            <a:schemeClr val="accent1"/>
-          </a:fillRef>
-          <a:effectRef idx="1">
-            <a:schemeClr val="accent1"/>
-          </a:effectRef>
-          <a:fontRef idx="minor">
-            <a:schemeClr val="tx1"/>
-          </a:fontRef>
-        </p:style>
-      </p:cxnSp>
+      <p:sp>
+        <p:nvSpPr>
+          <p:cNvPr id="25" name="Rectangle 24"/>
+          <p:cNvSpPr/>
+          <p:nvPr/>
+        </p:nvSpPr>
+        <p:spPr>
+          <a:xfrm>
+            <a:off x="6938962" y="7091362"/>
+            <a:ext cx="501015" cy="28575"/>
+          </a:xfrm>
+          <a:prstGeom prst="rect">
+            <a:avLst/>
+          </a:prstGeom>
+          <a:solidFill>
+            <a:srgbClr val="9A7878"/>
+          </a:solidFill>
+          <a:ln>
+            <a:noFill/>
+          </a:ln>
+          <a:effectLst/>
+        </p:spPr>
+        <p:style>
+          <a:lnRef idx="1">
+            <a:schemeClr val="accent1"/>
+          </a:lnRef>
+          <a:fillRef idx="3">
+            <a:schemeClr val="accent1"/>
+          </a:fillRef>
+          <a:effectRef idx="2">
+            <a:schemeClr val="accent1"/>
+          </a:effectRef>
+          <a:fontRef idx="minor">
+            <a:schemeClr val="lt1"/>
+          </a:fontRef>
+        </p:style>
+        <p:txBody>
+          <a:bodyPr rtlCol="0" anchor="ctr"/>
+          <a:lstStyle/>
+          <a:p/>
+        </p:txBody>
+      </p:sp>
       <p:sp>
         <p:nvSpPr>
           <p:cNvPr id="26" name="TextBox 25"/>
@@ -21958,41 +22499,48 @@
           </a:p>
         </p:txBody>
       </p:sp>
-      <p:cxnSp>
-        <p:nvCxnSpPr>
-          <p:cNvPr id="7" name="Connector 6"/>
-          <p:cNvCxnSpPr/>
-          <p:nvPr/>
-        </p:nvCxnSpPr>
-        <p:spPr>
-          <a:xfrm>
-            <a:off x="1295400" y="3924300"/>
-            <a:ext cx="1165860" cy="0"/>
-          </a:xfrm>
-          <a:prstGeom prst="line">
-            <a:avLst/>
-          </a:prstGeom>
-          <a:ln w="28575">
-            <a:solidFill>
-              <a:srgbClr val="9A7878"/>
-            </a:solidFill>
-          </a:ln>
-        </p:spPr>
-        <p:style>
-          <a:lnRef idx="2">
-            <a:schemeClr val="accent1"/>
-          </a:lnRef>
-          <a:fillRef idx="0">
-            <a:schemeClr val="accent1"/>
-          </a:fillRef>
-          <a:effectRef idx="1">
-            <a:schemeClr val="accent1"/>
-          </a:effectRef>
-          <a:fontRef idx="minor">
-            <a:schemeClr val="tx1"/>
-          </a:fontRef>
-        </p:style>
-      </p:cxnSp>
+      <p:sp>
+        <p:nvSpPr>
+          <p:cNvPr id="7" name="Rectangle 6"/>
+          <p:cNvSpPr/>
+          <p:nvPr/>
+        </p:nvSpPr>
+        <p:spPr>
+          <a:xfrm>
+            <a:off x="1281112" y="3910012"/>
+            <a:ext cx="1194435" cy="28575"/>
+          </a:xfrm>
+          <a:prstGeom prst="rect">
+            <a:avLst/>
+          </a:prstGeom>
+          <a:solidFill>
+            <a:srgbClr val="9A7878"/>
+          </a:solidFill>
+          <a:ln>
+            <a:noFill/>
+          </a:ln>
+          <a:effectLst/>
+        </p:spPr>
+        <p:style>
+          <a:lnRef idx="1">
+            <a:schemeClr val="accent1"/>
+          </a:lnRef>
+          <a:fillRef idx="3">
+            <a:schemeClr val="accent1"/>
+          </a:fillRef>
+          <a:effectRef idx="2">
+            <a:schemeClr val="accent1"/>
+          </a:effectRef>
+          <a:fontRef idx="minor">
+            <a:schemeClr val="lt1"/>
+          </a:fontRef>
+        </p:style>
+        <p:txBody>
+          <a:bodyPr rtlCol="0" anchor="ctr"/>
+          <a:lstStyle/>
+          <a:p/>
+        </p:txBody>
+      </p:sp>
       <p:sp>
         <p:nvSpPr>
           <p:cNvPr id="8" name="TextBox 7"/>
@@ -22030,41 +22578,48 @@
           </a:p>
         </p:txBody>
       </p:sp>
-      <p:cxnSp>
-        <p:nvCxnSpPr>
-          <p:cNvPr id="9" name="Connector 8"/>
-          <p:cNvCxnSpPr/>
-          <p:nvPr/>
-        </p:nvCxnSpPr>
-        <p:spPr>
-          <a:xfrm>
-            <a:off x="2655570" y="3924300"/>
-            <a:ext cx="1360170" cy="0"/>
-          </a:xfrm>
-          <a:prstGeom prst="line">
-            <a:avLst/>
-          </a:prstGeom>
-          <a:ln w="28575">
-            <a:solidFill>
-              <a:srgbClr val="9A7878"/>
-            </a:solidFill>
-          </a:ln>
-        </p:spPr>
-        <p:style>
-          <a:lnRef idx="2">
-            <a:schemeClr val="accent1"/>
-          </a:lnRef>
-          <a:fillRef idx="0">
-            <a:schemeClr val="accent1"/>
-          </a:fillRef>
-          <a:effectRef idx="1">
-            <a:schemeClr val="accent1"/>
-          </a:effectRef>
-          <a:fontRef idx="minor">
-            <a:schemeClr val="tx1"/>
-          </a:fontRef>
-        </p:style>
-      </p:cxnSp>
+      <p:sp>
+        <p:nvSpPr>
+          <p:cNvPr id="9" name="Rectangle 8"/>
+          <p:cNvSpPr/>
+          <p:nvPr/>
+        </p:nvSpPr>
+        <p:spPr>
+          <a:xfrm>
+            <a:off x="2641282" y="3910012"/>
+            <a:ext cx="1388745" cy="28575"/>
+          </a:xfrm>
+          <a:prstGeom prst="rect">
+            <a:avLst/>
+          </a:prstGeom>
+          <a:solidFill>
+            <a:srgbClr val="9A7878"/>
+          </a:solidFill>
+          <a:ln>
+            <a:noFill/>
+          </a:ln>
+          <a:effectLst/>
+        </p:spPr>
+        <p:style>
+          <a:lnRef idx="1">
+            <a:schemeClr val="accent1"/>
+          </a:lnRef>
+          <a:fillRef idx="3">
+            <a:schemeClr val="accent1"/>
+          </a:fillRef>
+          <a:effectRef idx="2">
+            <a:schemeClr val="accent1"/>
+          </a:effectRef>
+          <a:fontRef idx="minor">
+            <a:schemeClr val="lt1"/>
+          </a:fontRef>
+        </p:style>
+        <p:txBody>
+          <a:bodyPr rtlCol="0" anchor="ctr"/>
+          <a:lstStyle/>
+          <a:p/>
+        </p:txBody>
+      </p:sp>
       <p:sp>
         <p:nvSpPr>
           <p:cNvPr id="10" name="TextBox 9"/>
@@ -22102,41 +22657,48 @@
           </a:p>
         </p:txBody>
       </p:sp>
-      <p:cxnSp>
-        <p:nvCxnSpPr>
-          <p:cNvPr id="11" name="Connector 10"/>
-          <p:cNvCxnSpPr/>
-          <p:nvPr/>
-        </p:nvCxnSpPr>
-        <p:spPr>
-          <a:xfrm>
-            <a:off x="4210050" y="3924300"/>
-            <a:ext cx="194310" cy="0"/>
-          </a:xfrm>
-          <a:prstGeom prst="line">
-            <a:avLst/>
-          </a:prstGeom>
-          <a:ln w="28575">
-            <a:solidFill>
-              <a:srgbClr val="9A7878"/>
-            </a:solidFill>
-          </a:ln>
-        </p:spPr>
-        <p:style>
-          <a:lnRef idx="2">
-            <a:schemeClr val="accent1"/>
-          </a:lnRef>
-          <a:fillRef idx="0">
-            <a:schemeClr val="accent1"/>
-          </a:fillRef>
-          <a:effectRef idx="1">
-            <a:schemeClr val="accent1"/>
-          </a:effectRef>
-          <a:fontRef idx="minor">
-            <a:schemeClr val="tx1"/>
-          </a:fontRef>
-        </p:style>
-      </p:cxnSp>
+      <p:sp>
+        <p:nvSpPr>
+          <p:cNvPr id="11" name="Rectangle 10"/>
+          <p:cNvSpPr/>
+          <p:nvPr/>
+        </p:nvSpPr>
+        <p:spPr>
+          <a:xfrm>
+            <a:off x="4195762" y="3910012"/>
+            <a:ext cx="222885" cy="28575"/>
+          </a:xfrm>
+          <a:prstGeom prst="rect">
+            <a:avLst/>
+          </a:prstGeom>
+          <a:solidFill>
+            <a:srgbClr val="9A7878"/>
+          </a:solidFill>
+          <a:ln>
+            <a:noFill/>
+          </a:ln>
+          <a:effectLst/>
+        </p:spPr>
+        <p:style>
+          <a:lnRef idx="1">
+            <a:schemeClr val="accent1"/>
+          </a:lnRef>
+          <a:fillRef idx="3">
+            <a:schemeClr val="accent1"/>
+          </a:fillRef>
+          <a:effectRef idx="2">
+            <a:schemeClr val="accent1"/>
+          </a:effectRef>
+          <a:fontRef idx="minor">
+            <a:schemeClr val="lt1"/>
+          </a:fontRef>
+        </p:style>
+        <p:txBody>
+          <a:bodyPr rtlCol="0" anchor="ctr"/>
+          <a:lstStyle/>
+          <a:p/>
+        </p:txBody>
+      </p:sp>
       <p:sp>
         <p:nvSpPr>
           <p:cNvPr id="12" name="TextBox 11"/>
@@ -22174,41 +22736,48 @@
           </a:p>
         </p:txBody>
       </p:sp>
-      <p:cxnSp>
-        <p:nvCxnSpPr>
-          <p:cNvPr id="13" name="Connector 12"/>
-          <p:cNvCxnSpPr/>
-          <p:nvPr/>
-        </p:nvCxnSpPr>
-        <p:spPr>
-          <a:xfrm>
-            <a:off x="4598670" y="3924300"/>
-            <a:ext cx="4663440" cy="0"/>
-          </a:xfrm>
-          <a:prstGeom prst="line">
-            <a:avLst/>
-          </a:prstGeom>
-          <a:ln w="28575">
-            <a:solidFill>
-              <a:srgbClr val="9A7878"/>
-            </a:solidFill>
-          </a:ln>
-        </p:spPr>
-        <p:style>
-          <a:lnRef idx="2">
-            <a:schemeClr val="accent1"/>
-          </a:lnRef>
-          <a:fillRef idx="0">
-            <a:schemeClr val="accent1"/>
-          </a:fillRef>
-          <a:effectRef idx="1">
-            <a:schemeClr val="accent1"/>
-          </a:effectRef>
-          <a:fontRef idx="minor">
-            <a:schemeClr val="tx1"/>
-          </a:fontRef>
-        </p:style>
-      </p:cxnSp>
+      <p:sp>
+        <p:nvSpPr>
+          <p:cNvPr id="13" name="Rectangle 12"/>
+          <p:cNvSpPr/>
+          <p:nvPr/>
+        </p:nvSpPr>
+        <p:spPr>
+          <a:xfrm>
+            <a:off x="4584382" y="3910012"/>
+            <a:ext cx="4692015" cy="28575"/>
+          </a:xfrm>
+          <a:prstGeom prst="rect">
+            <a:avLst/>
+          </a:prstGeom>
+          <a:solidFill>
+            <a:srgbClr val="9A7878"/>
+          </a:solidFill>
+          <a:ln>
+            <a:noFill/>
+          </a:ln>
+          <a:effectLst/>
+        </p:spPr>
+        <p:style>
+          <a:lnRef idx="1">
+            <a:schemeClr val="accent1"/>
+          </a:lnRef>
+          <a:fillRef idx="3">
+            <a:schemeClr val="accent1"/>
+          </a:fillRef>
+          <a:effectRef idx="2">
+            <a:schemeClr val="accent1"/>
+          </a:effectRef>
+          <a:fontRef idx="minor">
+            <a:schemeClr val="lt1"/>
+          </a:fontRef>
+        </p:style>
+        <p:txBody>
+          <a:bodyPr rtlCol="0" anchor="ctr"/>
+          <a:lstStyle/>
+          <a:p/>
+        </p:txBody>
+      </p:sp>
       <p:sp>
         <p:nvSpPr>
           <p:cNvPr id="14" name="TextBox 13"/>
@@ -25026,78 +25595,92 @@
           </a:p>
         </p:txBody>
       </p:sp>
-      <p:cxnSp>
-        <p:nvCxnSpPr>
-          <p:cNvPr id="7" name="Connector 6"/>
-          <p:cNvCxnSpPr/>
-          <p:nvPr/>
-        </p:nvCxnSpPr>
-        <p:spPr>
-          <a:xfrm>
-            <a:off x="2381250" y="6096000"/>
-            <a:ext cx="4762500" cy="0"/>
-          </a:xfrm>
-          <a:prstGeom prst="line">
-            <a:avLst/>
-          </a:prstGeom>
-          <a:ln w="19050">
-            <a:solidFill>
-              <a:srgbClr val="9A7878"/>
-            </a:solidFill>
+      <p:sp>
+        <p:nvSpPr>
+          <p:cNvPr id="7" name="Rectangle 6"/>
+          <p:cNvSpPr/>
+          <p:nvPr/>
+        </p:nvSpPr>
+        <p:spPr>
+          <a:xfrm>
+            <a:off x="2371725" y="6086475"/>
+            <a:ext cx="4781550" cy="19050"/>
+          </a:xfrm>
+          <a:prstGeom prst="rect">
+            <a:avLst/>
+          </a:prstGeom>
+          <a:solidFill>
+            <a:srgbClr val="9A7878"/>
+          </a:solidFill>
+          <a:ln>
+            <a:noFill/>
             <a:prstDash val="dash"/>
           </a:ln>
-        </p:spPr>
-        <p:style>
-          <a:lnRef idx="2">
-            <a:schemeClr val="accent1"/>
-          </a:lnRef>
-          <a:fillRef idx="0">
-            <a:schemeClr val="accent1"/>
-          </a:fillRef>
-          <a:effectRef idx="1">
-            <a:schemeClr val="accent1"/>
-          </a:effectRef>
-          <a:fontRef idx="minor">
-            <a:schemeClr val="tx1"/>
-          </a:fontRef>
-        </p:style>
-      </p:cxnSp>
-      <p:cxnSp>
-        <p:nvCxnSpPr>
-          <p:cNvPr id="8" name="Connector 7"/>
-          <p:cNvCxnSpPr/>
-          <p:nvPr/>
-        </p:nvCxnSpPr>
-        <p:spPr>
-          <a:xfrm>
-            <a:off x="4762500" y="3714750"/>
-            <a:ext cx="0" cy="4762500"/>
-          </a:xfrm>
-          <a:prstGeom prst="line">
-            <a:avLst/>
-          </a:prstGeom>
-          <a:ln w="19050">
-            <a:solidFill>
-              <a:srgbClr val="9A7878"/>
-            </a:solidFill>
+          <a:effectLst/>
+        </p:spPr>
+        <p:style>
+          <a:lnRef idx="1">
+            <a:schemeClr val="accent1"/>
+          </a:lnRef>
+          <a:fillRef idx="3">
+            <a:schemeClr val="accent1"/>
+          </a:fillRef>
+          <a:effectRef idx="2">
+            <a:schemeClr val="accent1"/>
+          </a:effectRef>
+          <a:fontRef idx="minor">
+            <a:schemeClr val="lt1"/>
+          </a:fontRef>
+        </p:style>
+        <p:txBody>
+          <a:bodyPr rtlCol="0" anchor="ctr"/>
+          <a:lstStyle/>
+          <a:p/>
+        </p:txBody>
+      </p:sp>
+      <p:sp>
+        <p:nvSpPr>
+          <p:cNvPr id="8" name="Rectangle 7"/>
+          <p:cNvSpPr/>
+          <p:nvPr/>
+        </p:nvSpPr>
+        <p:spPr>
+          <a:xfrm>
+            <a:off x="4752975" y="3705225"/>
+            <a:ext cx="19050" cy="4781550"/>
+          </a:xfrm>
+          <a:prstGeom prst="rect">
+            <a:avLst/>
+          </a:prstGeom>
+          <a:solidFill>
+            <a:srgbClr val="9A7878"/>
+          </a:solidFill>
+          <a:ln>
+            <a:noFill/>
             <a:prstDash val="dash"/>
           </a:ln>
-        </p:spPr>
-        <p:style>
-          <a:lnRef idx="2">
-            <a:schemeClr val="accent1"/>
-          </a:lnRef>
-          <a:fillRef idx="0">
-            <a:schemeClr val="accent1"/>
-          </a:fillRef>
-          <a:effectRef idx="1">
-            <a:schemeClr val="accent1"/>
-          </a:effectRef>
-          <a:fontRef idx="minor">
-            <a:schemeClr val="tx1"/>
-          </a:fontRef>
-        </p:style>
-      </p:cxnSp>
+          <a:effectLst/>
+        </p:spPr>
+        <p:style>
+          <a:lnRef idx="1">
+            <a:schemeClr val="accent1"/>
+          </a:lnRef>
+          <a:fillRef idx="3">
+            <a:schemeClr val="accent1"/>
+          </a:fillRef>
+          <a:effectRef idx="2">
+            <a:schemeClr val="accent1"/>
+          </a:effectRef>
+          <a:fontRef idx="minor">
+            <a:schemeClr val="lt1"/>
+          </a:fontRef>
+        </p:style>
+        <p:txBody>
+          <a:bodyPr rtlCol="0" anchor="ctr"/>
+          <a:lstStyle/>
+          <a:p/>
+        </p:txBody>
+      </p:sp>
       <p:sp>
         <p:nvSpPr>
           <p:cNvPr id="9" name="Oval 8"/>
@@ -25142,45 +25725,95 @@
           </a:p>
         </p:txBody>
       </p:sp>
-      <p:cxnSp>
-        <p:nvCxnSpPr>
-          <p:cNvPr id="10" name="Connector 9"/>
-          <p:cNvCxnSpPr/>
-          <p:nvPr/>
-        </p:nvCxnSpPr>
-        <p:spPr>
-          <a:xfrm flipV="1">
-            <a:off x="4762500" y="5143500"/>
-            <a:ext cx="0" cy="952500"/>
-          </a:xfrm>
-          <a:prstGeom prst="line">
-            <a:avLst/>
-          </a:prstGeom>
-          <a:ln w="57150">
-            <a:solidFill>
-              <a:srgbClr val="CC2200"/>
-            </a:solidFill>
-            <a:tailEnd type="triangle" w="med" len="med"/>
-          </a:ln>
-        </p:spPr>
-        <p:style>
-          <a:lnRef idx="2">
-            <a:schemeClr val="accent1"/>
-          </a:lnRef>
-          <a:fillRef idx="0">
-            <a:schemeClr val="accent1"/>
-          </a:fillRef>
-          <a:effectRef idx="1">
-            <a:schemeClr val="accent1"/>
-          </a:effectRef>
-          <a:fontRef idx="minor">
-            <a:schemeClr val="tx1"/>
-          </a:fontRef>
-        </p:style>
-      </p:cxnSp>
-      <p:sp>
-        <p:nvSpPr>
-          <p:cNvPr id="11" name="TextBox 10"/>
+      <p:sp>
+        <p:nvSpPr>
+          <p:cNvPr id="10" name="Rectangle 9"/>
+          <p:cNvSpPr/>
+          <p:nvPr/>
+        </p:nvSpPr>
+        <p:spPr>
+          <a:xfrm>
+            <a:off x="4733925" y="5258943"/>
+            <a:ext cx="57150" cy="865632"/>
+          </a:xfrm>
+          <a:prstGeom prst="rect">
+            <a:avLst/>
+          </a:prstGeom>
+          <a:solidFill>
+            <a:srgbClr val="CC2200"/>
+          </a:solidFill>
+          <a:ln>
+            <a:noFill/>
+          </a:ln>
+          <a:effectLst/>
+        </p:spPr>
+        <p:style>
+          <a:lnRef idx="1">
+            <a:schemeClr val="accent1"/>
+          </a:lnRef>
+          <a:fillRef idx="3">
+            <a:schemeClr val="accent1"/>
+          </a:fillRef>
+          <a:effectRef idx="2">
+            <a:schemeClr val="accent1"/>
+          </a:effectRef>
+          <a:fontRef idx="minor">
+            <a:schemeClr val="lt1"/>
+          </a:fontRef>
+        </p:style>
+        <p:txBody>
+          <a:bodyPr rtlCol="0" anchor="ctr"/>
+          <a:lstStyle/>
+          <a:p/>
+        </p:txBody>
+      </p:sp>
+      <p:sp>
+        <p:nvSpPr>
+          <p:cNvPr id="11" name="Isosceles Triangle 10"/>
+          <p:cNvSpPr/>
+          <p:nvPr/>
+        </p:nvSpPr>
+        <p:spPr>
+          <a:xfrm>
+            <a:off x="4682490" y="5143500"/>
+            <a:ext cx="160020" cy="160020"/>
+          </a:xfrm>
+          <a:prstGeom prst="triangle">
+            <a:avLst/>
+          </a:prstGeom>
+          <a:solidFill>
+            <a:srgbClr val="CC2200"/>
+          </a:solidFill>
+          <a:ln>
+            <a:noFill/>
+          </a:ln>
+          <a:effectLst/>
+        </p:spPr>
+        <p:style>
+          <a:lnRef idx="1">
+            <a:schemeClr val="accent1"/>
+          </a:lnRef>
+          <a:fillRef idx="3">
+            <a:schemeClr val="accent1"/>
+          </a:fillRef>
+          <a:effectRef idx="2">
+            <a:schemeClr val="accent1"/>
+          </a:effectRef>
+          <a:fontRef idx="minor">
+            <a:schemeClr val="lt1"/>
+          </a:fontRef>
+        </p:style>
+        <p:txBody>
+          <a:bodyPr rtlCol="0" anchor="ctr"/>
+          <a:lstStyle/>
+          <a:p>
+            <a:pPr algn="ctr"/>
+          </a:p>
+        </p:txBody>
+      </p:sp>
+      <p:sp>
+        <p:nvSpPr>
+          <p:cNvPr id="12" name="TextBox 11"/>
           <p:cNvSpPr txBox="1"/>
           <p:nvPr/>
         </p:nvSpPr>
@@ -25217,7 +25850,7 @@
       </p:sp>
       <p:sp>
         <p:nvSpPr>
-          <p:cNvPr id="12" name="TextBox 11"/>
+          <p:cNvPr id="13" name="TextBox 12"/>
           <p:cNvSpPr txBox="1"/>
           <p:nvPr/>
         </p:nvSpPr>
@@ -25254,7 +25887,7 @@
       </p:sp>
       <p:sp>
         <p:nvSpPr>
-          <p:cNvPr id="13" name="TextBox 12"/>
+          <p:cNvPr id="14" name="TextBox 13"/>
           <p:cNvSpPr txBox="1"/>
           <p:nvPr/>
         </p:nvSpPr>
@@ -25291,7 +25924,7 @@
       </p:sp>
       <p:sp>
         <p:nvSpPr>
-          <p:cNvPr id="14" name="TextBox 13"/>
+          <p:cNvPr id="15" name="TextBox 14"/>
           <p:cNvSpPr txBox="1"/>
           <p:nvPr/>
         </p:nvSpPr>
@@ -25328,7 +25961,7 @@
       </p:sp>
       <p:sp>
         <p:nvSpPr>
-          <p:cNvPr id="15" name="TextBox 14"/>
+          <p:cNvPr id="16" name="TextBox 15"/>
           <p:cNvSpPr txBox="1"/>
           <p:nvPr/>
         </p:nvSpPr>
@@ -25365,7 +25998,7 @@
       </p:sp>
       <p:sp>
         <p:nvSpPr>
-          <p:cNvPr id="16" name="TextBox 15"/>
+          <p:cNvPr id="17" name="TextBox 16"/>
           <p:cNvSpPr txBox="1"/>
           <p:nvPr/>
         </p:nvSpPr>
@@ -25402,7 +26035,7 @@
       </p:sp>
       <p:sp>
         <p:nvSpPr>
-          <p:cNvPr id="17" name="Rounded Rectangle 16"/>
+          <p:cNvPr id="18" name="Rounded Rectangle 17"/>
           <p:cNvSpPr/>
           <p:nvPr/>
         </p:nvSpPr>
@@ -25448,7 +26081,7 @@
       </p:sp>
       <p:sp>
         <p:nvSpPr>
-          <p:cNvPr id="18" name="TextBox 17"/>
+          <p:cNvPr id="19" name="TextBox 18"/>
           <p:cNvSpPr txBox="1"/>
           <p:nvPr/>
         </p:nvSpPr>
@@ -25496,7 +26129,7 @@
       </p:sp>
       <p:sp>
         <p:nvSpPr>
-          <p:cNvPr id="19" name="TextBox 18"/>
+          <p:cNvPr id="20" name="TextBox 19"/>
           <p:cNvSpPr txBox="1"/>
           <p:nvPr/>
         </p:nvSpPr>
@@ -25559,7 +26192,7 @@
       </p:sp>
       <p:sp>
         <p:nvSpPr>
-          <p:cNvPr id="20" name="Rounded Rectangle 19"/>
+          <p:cNvPr id="21" name="Rounded Rectangle 20"/>
           <p:cNvSpPr/>
           <p:nvPr/>
         </p:nvSpPr>
@@ -25603,7 +26236,7 @@
       </p:sp>
       <p:sp>
         <p:nvSpPr>
-          <p:cNvPr id="21" name="TextBox 20"/>
+          <p:cNvPr id="22" name="TextBox 21"/>
           <p:cNvSpPr txBox="1"/>
           <p:nvPr/>
         </p:nvSpPr>
@@ -25655,7 +26288,7 @@
       </p:sp>
       <p:pic>
         <p:nvPicPr>
-          <p:cNvPr id="22" name="Picture 21" descr="dozer_wide_left.png"/>
+          <p:cNvPr id="23" name="Picture 22" descr="dozer_wide_left.png"/>
           <p:cNvPicPr>
             <a:picLocks noChangeAspect="1"/>
           </p:cNvPicPr>
@@ -25679,7 +26312,7 @@
       </p:pic>
       <p:sp>
         <p:nvSpPr>
-          <p:cNvPr id="23" name="TextBox 22"/>
+          <p:cNvPr id="24" name="TextBox 23"/>
           <p:cNvSpPr txBox="1"/>
           <p:nvPr/>
         </p:nvSpPr>
@@ -25727,7 +26360,7 @@
       </p:sp>
       <p:sp>
         <p:nvSpPr>
-          <p:cNvPr id="24" name="TextBox 23"/>
+          <p:cNvPr id="25" name="TextBox 24"/>
           <p:cNvSpPr txBox="1"/>
           <p:nvPr/>
         </p:nvSpPr>
@@ -26637,45 +27270,95 @@
           <a:p/>
         </p:txBody>
       </p:sp>
-      <p:cxnSp>
-        <p:nvCxnSpPr>
-          <p:cNvPr id="13" name="Connector 12"/>
-          <p:cNvCxnSpPr/>
-          <p:nvPr/>
-        </p:nvCxnSpPr>
-        <p:spPr>
-          <a:xfrm flipV="1">
-            <a:off x="3505200" y="4095750"/>
-            <a:ext cx="0" cy="952500"/>
-          </a:xfrm>
-          <a:prstGeom prst="line">
-            <a:avLst/>
-          </a:prstGeom>
-          <a:ln w="38100">
-            <a:solidFill>
-              <a:srgbClr val="9A7878"/>
-            </a:solidFill>
-            <a:tailEnd type="triangle" w="med" len="med"/>
-          </a:ln>
-        </p:spPr>
-        <p:style>
-          <a:lnRef idx="2">
-            <a:schemeClr val="accent1"/>
-          </a:lnRef>
-          <a:fillRef idx="0">
-            <a:schemeClr val="accent1"/>
-          </a:fillRef>
-          <a:effectRef idx="1">
-            <a:schemeClr val="accent1"/>
-          </a:effectRef>
-          <a:fontRef idx="minor">
-            <a:schemeClr val="tx1"/>
-          </a:fontRef>
-        </p:style>
-      </p:cxnSp>
-      <p:sp>
-        <p:nvSpPr>
-          <p:cNvPr id="14" name="TextBox 13"/>
+      <p:sp>
+        <p:nvSpPr>
+          <p:cNvPr id="13" name="Rectangle 12"/>
+          <p:cNvSpPr/>
+          <p:nvPr/>
+        </p:nvSpPr>
+        <p:spPr>
+          <a:xfrm>
+            <a:off x="3486150" y="4213860"/>
+            <a:ext cx="38100" cy="853440"/>
+          </a:xfrm>
+          <a:prstGeom prst="rect">
+            <a:avLst/>
+          </a:prstGeom>
+          <a:solidFill>
+            <a:srgbClr val="9A7878"/>
+          </a:solidFill>
+          <a:ln>
+            <a:noFill/>
+          </a:ln>
+          <a:effectLst/>
+        </p:spPr>
+        <p:style>
+          <a:lnRef idx="1">
+            <a:schemeClr val="accent1"/>
+          </a:lnRef>
+          <a:fillRef idx="3">
+            <a:schemeClr val="accent1"/>
+          </a:fillRef>
+          <a:effectRef idx="2">
+            <a:schemeClr val="accent1"/>
+          </a:effectRef>
+          <a:fontRef idx="minor">
+            <a:schemeClr val="lt1"/>
+          </a:fontRef>
+        </p:style>
+        <p:txBody>
+          <a:bodyPr rtlCol="0" anchor="ctr"/>
+          <a:lstStyle/>
+          <a:p/>
+        </p:txBody>
+      </p:sp>
+      <p:sp>
+        <p:nvSpPr>
+          <p:cNvPr id="14" name="Isosceles Triangle 13"/>
+          <p:cNvSpPr/>
+          <p:nvPr/>
+        </p:nvSpPr>
+        <p:spPr>
+          <a:xfrm>
+            <a:off x="3429000" y="4095750"/>
+            <a:ext cx="152400" cy="152400"/>
+          </a:xfrm>
+          <a:prstGeom prst="triangle">
+            <a:avLst/>
+          </a:prstGeom>
+          <a:solidFill>
+            <a:srgbClr val="E05540"/>
+          </a:solidFill>
+          <a:ln>
+            <a:noFill/>
+          </a:ln>
+          <a:effectLst/>
+        </p:spPr>
+        <p:style>
+          <a:lnRef idx="1">
+            <a:schemeClr val="accent1"/>
+          </a:lnRef>
+          <a:fillRef idx="3">
+            <a:schemeClr val="accent1"/>
+          </a:fillRef>
+          <a:effectRef idx="2">
+            <a:schemeClr val="accent1"/>
+          </a:effectRef>
+          <a:fontRef idx="minor">
+            <a:schemeClr val="lt1"/>
+          </a:fontRef>
+        </p:style>
+        <p:txBody>
+          <a:bodyPr rtlCol="0" anchor="ctr"/>
+          <a:lstStyle/>
+          <a:p>
+            <a:pPr algn="ctr"/>
+          </a:p>
+        </p:txBody>
+      </p:sp>
+      <p:sp>
+        <p:nvSpPr>
+          <p:cNvPr id="15" name="TextBox 14"/>
           <p:cNvSpPr txBox="1"/>
           <p:nvPr/>
         </p:nvSpPr>
@@ -26712,7 +27395,7 @@
       </p:sp>
       <p:sp>
         <p:nvSpPr>
-          <p:cNvPr id="15" name="TextBox 14"/>
+          <p:cNvPr id="16" name="TextBox 15"/>
           <p:cNvSpPr txBox="1"/>
           <p:nvPr/>
         </p:nvSpPr>
@@ -26753,7 +27436,7 @@
       </p:sp>
       <p:sp>
         <p:nvSpPr>
-          <p:cNvPr id="16" name="Rounded Rectangle 15"/>
+          <p:cNvPr id="17" name="Rounded Rectangle 16"/>
           <p:cNvSpPr/>
           <p:nvPr/>
         </p:nvSpPr>
@@ -26799,7 +27482,7 @@
       </p:sp>
       <p:sp>
         <p:nvSpPr>
-          <p:cNvPr id="17" name="Rounded Rectangle 16"/>
+          <p:cNvPr id="18" name="Rounded Rectangle 17"/>
           <p:cNvSpPr/>
           <p:nvPr/>
         </p:nvSpPr>
@@ -26845,7 +27528,7 @@
       </p:sp>
       <p:sp>
         <p:nvSpPr>
-          <p:cNvPr id="18" name="Rounded Rectangle 17"/>
+          <p:cNvPr id="19" name="Rounded Rectangle 18"/>
           <p:cNvSpPr/>
           <p:nvPr/>
         </p:nvSpPr>
@@ -26889,48 +27572,13 @@
       </p:sp>
       <p:cxnSp>
         <p:nvCxnSpPr>
-          <p:cNvPr id="19" name="Connector 18"/>
+          <p:cNvPr id="20" name="Connector 19"/>
           <p:cNvCxnSpPr/>
           <p:nvPr/>
         </p:nvCxnSpPr>
         <p:spPr>
           <a:xfrm flipV="1">
             <a:off x="7524750" y="3448050"/>
-            <a:ext cx="361950" cy="266700"/>
-          </a:xfrm>
-          <a:prstGeom prst="line">
-            <a:avLst/>
-          </a:prstGeom>
-          <a:ln w="38100">
-            <a:solidFill>
-              <a:srgbClr val="0A0A0A"/>
-            </a:solidFill>
-          </a:ln>
-        </p:spPr>
-        <p:style>
-          <a:lnRef idx="2">
-            <a:schemeClr val="accent1"/>
-          </a:lnRef>
-          <a:fillRef idx="0">
-            <a:schemeClr val="accent1"/>
-          </a:fillRef>
-          <a:effectRef idx="1">
-            <a:schemeClr val="accent1"/>
-          </a:effectRef>
-          <a:fontRef idx="minor">
-            <a:schemeClr val="tx1"/>
-          </a:fontRef>
-        </p:style>
-      </p:cxnSp>
-      <p:cxnSp>
-        <p:nvCxnSpPr>
-          <p:cNvPr id="20" name="Connector 19"/>
-          <p:cNvCxnSpPr/>
-          <p:nvPr/>
-        </p:nvCxnSpPr>
-        <p:spPr>
-          <a:xfrm flipV="1">
-            <a:off x="7524750" y="3676650"/>
             <a:ext cx="361950" cy="266700"/>
           </a:xfrm>
           <a:prstGeom prst="line">
@@ -26965,7 +27613,7 @@
         </p:nvCxnSpPr>
         <p:spPr>
           <a:xfrm flipV="1">
-            <a:off x="7524750" y="3905250"/>
+            <a:off x="7524750" y="3676650"/>
             <a:ext cx="361950" cy="266700"/>
           </a:xfrm>
           <a:prstGeom prst="line">
@@ -26992,9 +27640,44 @@
           </a:fontRef>
         </p:style>
       </p:cxnSp>
-      <p:sp>
-        <p:nvSpPr>
-          <p:cNvPr id="22" name="Rounded Rectangle 21"/>
+      <p:cxnSp>
+        <p:nvCxnSpPr>
+          <p:cNvPr id="22" name="Connector 21"/>
+          <p:cNvCxnSpPr/>
+          <p:nvPr/>
+        </p:nvCxnSpPr>
+        <p:spPr>
+          <a:xfrm flipV="1">
+            <a:off x="7524750" y="3905250"/>
+            <a:ext cx="361950" cy="266700"/>
+          </a:xfrm>
+          <a:prstGeom prst="line">
+            <a:avLst/>
+          </a:prstGeom>
+          <a:ln w="38100">
+            <a:solidFill>
+              <a:srgbClr val="0A0A0A"/>
+            </a:solidFill>
+          </a:ln>
+        </p:spPr>
+        <p:style>
+          <a:lnRef idx="2">
+            <a:schemeClr val="accent1"/>
+          </a:lnRef>
+          <a:fillRef idx="0">
+            <a:schemeClr val="accent1"/>
+          </a:fillRef>
+          <a:effectRef idx="1">
+            <a:schemeClr val="accent1"/>
+          </a:effectRef>
+          <a:fontRef idx="minor">
+            <a:schemeClr val="tx1"/>
+          </a:fontRef>
+        </p:style>
+      </p:cxnSp>
+      <p:sp>
+        <p:nvSpPr>
+          <p:cNvPr id="23" name="Rounded Rectangle 22"/>
           <p:cNvSpPr/>
           <p:nvPr/>
         </p:nvSpPr>
@@ -27038,48 +27721,13 @@
       </p:sp>
       <p:cxnSp>
         <p:nvCxnSpPr>
-          <p:cNvPr id="23" name="Connector 22"/>
-          <p:cNvCxnSpPr/>
-          <p:nvPr/>
-        </p:nvCxnSpPr>
-        <p:spPr>
-          <a:xfrm>
-            <a:off x="7524750" y="5162550"/>
-            <a:ext cx="361950" cy="266700"/>
-          </a:xfrm>
-          <a:prstGeom prst="line">
-            <a:avLst/>
-          </a:prstGeom>
-          <a:ln w="38100">
-            <a:solidFill>
-              <a:srgbClr val="0A0A0A"/>
-            </a:solidFill>
-          </a:ln>
-        </p:spPr>
-        <p:style>
-          <a:lnRef idx="2">
-            <a:schemeClr val="accent1"/>
-          </a:lnRef>
-          <a:fillRef idx="0">
-            <a:schemeClr val="accent1"/>
-          </a:fillRef>
-          <a:effectRef idx="1">
-            <a:schemeClr val="accent1"/>
-          </a:effectRef>
-          <a:fontRef idx="minor">
-            <a:schemeClr val="tx1"/>
-          </a:fontRef>
-        </p:style>
-      </p:cxnSp>
-      <p:cxnSp>
-        <p:nvCxnSpPr>
           <p:cNvPr id="24" name="Connector 23"/>
           <p:cNvCxnSpPr/>
           <p:nvPr/>
         </p:nvCxnSpPr>
         <p:spPr>
           <a:xfrm>
-            <a:off x="7524750" y="5391150"/>
+            <a:off x="7524750" y="5162550"/>
             <a:ext cx="361950" cy="266700"/>
           </a:xfrm>
           <a:prstGeom prst="line">
@@ -27114,7 +27762,7 @@
         </p:nvCxnSpPr>
         <p:spPr>
           <a:xfrm>
-            <a:off x="7524750" y="5619750"/>
+            <a:off x="7524750" y="5391150"/>
             <a:ext cx="361950" cy="266700"/>
           </a:xfrm>
           <a:prstGeom prst="line">
@@ -27141,9 +27789,44 @@
           </a:fontRef>
         </p:style>
       </p:cxnSp>
-      <p:sp>
-        <p:nvSpPr>
-          <p:cNvPr id="26" name="Rounded Rectangle 25"/>
+      <p:cxnSp>
+        <p:nvCxnSpPr>
+          <p:cNvPr id="26" name="Connector 25"/>
+          <p:cNvCxnSpPr/>
+          <p:nvPr/>
+        </p:nvCxnSpPr>
+        <p:spPr>
+          <a:xfrm>
+            <a:off x="7524750" y="5619750"/>
+            <a:ext cx="361950" cy="266700"/>
+          </a:xfrm>
+          <a:prstGeom prst="line">
+            <a:avLst/>
+          </a:prstGeom>
+          <a:ln w="38100">
+            <a:solidFill>
+              <a:srgbClr val="0A0A0A"/>
+            </a:solidFill>
+          </a:ln>
+        </p:spPr>
+        <p:style>
+          <a:lnRef idx="2">
+            <a:schemeClr val="accent1"/>
+          </a:lnRef>
+          <a:fillRef idx="0">
+            <a:schemeClr val="accent1"/>
+          </a:fillRef>
+          <a:effectRef idx="1">
+            <a:schemeClr val="accent1"/>
+          </a:effectRef>
+          <a:fontRef idx="minor">
+            <a:schemeClr val="tx1"/>
+          </a:fontRef>
+        </p:style>
+      </p:cxnSp>
+      <p:sp>
+        <p:nvSpPr>
+          <p:cNvPr id="27" name="Rounded Rectangle 26"/>
           <p:cNvSpPr/>
           <p:nvPr/>
         </p:nvSpPr>
@@ -27187,48 +27870,13 @@
       </p:sp>
       <p:cxnSp>
         <p:nvCxnSpPr>
-          <p:cNvPr id="27" name="Connector 26"/>
-          <p:cNvCxnSpPr/>
-          <p:nvPr/>
-        </p:nvCxnSpPr>
-        <p:spPr>
-          <a:xfrm>
-            <a:off x="10401300" y="3448050"/>
-            <a:ext cx="361950" cy="266700"/>
-          </a:xfrm>
-          <a:prstGeom prst="line">
-            <a:avLst/>
-          </a:prstGeom>
-          <a:ln w="38100">
-            <a:solidFill>
-              <a:srgbClr val="0A0A0A"/>
-            </a:solidFill>
-          </a:ln>
-        </p:spPr>
-        <p:style>
-          <a:lnRef idx="2">
-            <a:schemeClr val="accent1"/>
-          </a:lnRef>
-          <a:fillRef idx="0">
-            <a:schemeClr val="accent1"/>
-          </a:fillRef>
-          <a:effectRef idx="1">
-            <a:schemeClr val="accent1"/>
-          </a:effectRef>
-          <a:fontRef idx="minor">
-            <a:schemeClr val="tx1"/>
-          </a:fontRef>
-        </p:style>
-      </p:cxnSp>
-      <p:cxnSp>
-        <p:nvCxnSpPr>
           <p:cNvPr id="28" name="Connector 27"/>
           <p:cNvCxnSpPr/>
           <p:nvPr/>
         </p:nvCxnSpPr>
         <p:spPr>
           <a:xfrm>
-            <a:off x="10401300" y="3676650"/>
+            <a:off x="10401300" y="3448050"/>
             <a:ext cx="361950" cy="266700"/>
           </a:xfrm>
           <a:prstGeom prst="line">
@@ -27263,7 +27911,7 @@
         </p:nvCxnSpPr>
         <p:spPr>
           <a:xfrm>
-            <a:off x="10401300" y="3905250"/>
+            <a:off x="10401300" y="3676650"/>
             <a:ext cx="361950" cy="266700"/>
           </a:xfrm>
           <a:prstGeom prst="line">
@@ -27290,9 +27938,44 @@
           </a:fontRef>
         </p:style>
       </p:cxnSp>
-      <p:sp>
-        <p:nvSpPr>
-          <p:cNvPr id="30" name="Rounded Rectangle 29"/>
+      <p:cxnSp>
+        <p:nvCxnSpPr>
+          <p:cNvPr id="30" name="Connector 29"/>
+          <p:cNvCxnSpPr/>
+          <p:nvPr/>
+        </p:nvCxnSpPr>
+        <p:spPr>
+          <a:xfrm>
+            <a:off x="10401300" y="3905250"/>
+            <a:ext cx="361950" cy="266700"/>
+          </a:xfrm>
+          <a:prstGeom prst="line">
+            <a:avLst/>
+          </a:prstGeom>
+          <a:ln w="38100">
+            <a:solidFill>
+              <a:srgbClr val="0A0A0A"/>
+            </a:solidFill>
+          </a:ln>
+        </p:spPr>
+        <p:style>
+          <a:lnRef idx="2">
+            <a:schemeClr val="accent1"/>
+          </a:lnRef>
+          <a:fillRef idx="0">
+            <a:schemeClr val="accent1"/>
+          </a:fillRef>
+          <a:effectRef idx="1">
+            <a:schemeClr val="accent1"/>
+          </a:effectRef>
+          <a:fontRef idx="minor">
+            <a:schemeClr val="tx1"/>
+          </a:fontRef>
+        </p:style>
+      </p:cxnSp>
+      <p:sp>
+        <p:nvSpPr>
+          <p:cNvPr id="31" name="Rounded Rectangle 30"/>
           <p:cNvSpPr/>
           <p:nvPr/>
         </p:nvSpPr>
@@ -27336,48 +28019,13 @@
       </p:sp>
       <p:cxnSp>
         <p:nvCxnSpPr>
-          <p:cNvPr id="31" name="Connector 30"/>
+          <p:cNvPr id="32" name="Connector 31"/>
           <p:cNvCxnSpPr/>
           <p:nvPr/>
         </p:nvCxnSpPr>
         <p:spPr>
           <a:xfrm flipV="1">
             <a:off x="10401300" y="5162550"/>
-            <a:ext cx="361950" cy="266700"/>
-          </a:xfrm>
-          <a:prstGeom prst="line">
-            <a:avLst/>
-          </a:prstGeom>
-          <a:ln w="38100">
-            <a:solidFill>
-              <a:srgbClr val="0A0A0A"/>
-            </a:solidFill>
-          </a:ln>
-        </p:spPr>
-        <p:style>
-          <a:lnRef idx="2">
-            <a:schemeClr val="accent1"/>
-          </a:lnRef>
-          <a:fillRef idx="0">
-            <a:schemeClr val="accent1"/>
-          </a:fillRef>
-          <a:effectRef idx="1">
-            <a:schemeClr val="accent1"/>
-          </a:effectRef>
-          <a:fontRef idx="minor">
-            <a:schemeClr val="tx1"/>
-          </a:fontRef>
-        </p:style>
-      </p:cxnSp>
-      <p:cxnSp>
-        <p:nvCxnSpPr>
-          <p:cNvPr id="32" name="Connector 31"/>
-          <p:cNvCxnSpPr/>
-          <p:nvPr/>
-        </p:nvCxnSpPr>
-        <p:spPr>
-          <a:xfrm flipV="1">
-            <a:off x="10401300" y="5391150"/>
             <a:ext cx="361950" cy="266700"/>
           </a:xfrm>
           <a:prstGeom prst="line">
@@ -27412,7 +28060,7 @@
         </p:nvCxnSpPr>
         <p:spPr>
           <a:xfrm flipV="1">
-            <a:off x="10401300" y="5619750"/>
+            <a:off x="10401300" y="5391150"/>
             <a:ext cx="361950" cy="266700"/>
           </a:xfrm>
           <a:prstGeom prst="line">
@@ -27447,17 +28095,16 @@
         </p:nvCxnSpPr>
         <p:spPr>
           <a:xfrm flipV="1">
-            <a:off x="9144000" y="4095750"/>
-            <a:ext cx="0" cy="952500"/>
+            <a:off x="10401300" y="5619750"/>
+            <a:ext cx="361950" cy="266700"/>
           </a:xfrm>
           <a:prstGeom prst="line">
             <a:avLst/>
           </a:prstGeom>
           <a:ln w="38100">
             <a:solidFill>
-              <a:srgbClr val="9A7878"/>
+              <a:srgbClr val="0A0A0A"/>
             </a:solidFill>
-            <a:tailEnd type="triangle" w="med" len="med"/>
           </a:ln>
         </p:spPr>
         <p:style>
@@ -27477,7 +28124,93 @@
       </p:cxnSp>
       <p:sp>
         <p:nvSpPr>
-          <p:cNvPr id="35" name="TextBox 34"/>
+          <p:cNvPr id="35" name="Rectangle 34"/>
+          <p:cNvSpPr/>
+          <p:nvPr/>
+        </p:nvSpPr>
+        <p:spPr>
+          <a:xfrm>
+            <a:off x="9124950" y="4213860"/>
+            <a:ext cx="38100" cy="853440"/>
+          </a:xfrm>
+          <a:prstGeom prst="rect">
+            <a:avLst/>
+          </a:prstGeom>
+          <a:solidFill>
+            <a:srgbClr val="9A7878"/>
+          </a:solidFill>
+          <a:ln>
+            <a:noFill/>
+          </a:ln>
+          <a:effectLst/>
+        </p:spPr>
+        <p:style>
+          <a:lnRef idx="1">
+            <a:schemeClr val="accent1"/>
+          </a:lnRef>
+          <a:fillRef idx="3">
+            <a:schemeClr val="accent1"/>
+          </a:fillRef>
+          <a:effectRef idx="2">
+            <a:schemeClr val="accent1"/>
+          </a:effectRef>
+          <a:fontRef idx="minor">
+            <a:schemeClr val="lt1"/>
+          </a:fontRef>
+        </p:style>
+        <p:txBody>
+          <a:bodyPr rtlCol="0" anchor="ctr"/>
+          <a:lstStyle/>
+          <a:p/>
+        </p:txBody>
+      </p:sp>
+      <p:sp>
+        <p:nvSpPr>
+          <p:cNvPr id="36" name="Isosceles Triangle 35"/>
+          <p:cNvSpPr/>
+          <p:nvPr/>
+        </p:nvSpPr>
+        <p:spPr>
+          <a:xfrm>
+            <a:off x="9067800" y="4095750"/>
+            <a:ext cx="152400" cy="152400"/>
+          </a:xfrm>
+          <a:prstGeom prst="triangle">
+            <a:avLst/>
+          </a:prstGeom>
+          <a:solidFill>
+            <a:srgbClr val="E05540"/>
+          </a:solidFill>
+          <a:ln>
+            <a:noFill/>
+          </a:ln>
+          <a:effectLst/>
+        </p:spPr>
+        <p:style>
+          <a:lnRef idx="1">
+            <a:schemeClr val="accent1"/>
+          </a:lnRef>
+          <a:fillRef idx="3">
+            <a:schemeClr val="accent1"/>
+          </a:fillRef>
+          <a:effectRef idx="2">
+            <a:schemeClr val="accent1"/>
+          </a:effectRef>
+          <a:fontRef idx="minor">
+            <a:schemeClr val="lt1"/>
+          </a:fontRef>
+        </p:style>
+        <p:txBody>
+          <a:bodyPr rtlCol="0" anchor="ctr"/>
+          <a:lstStyle/>
+          <a:p>
+            <a:pPr algn="ctr"/>
+          </a:p>
+        </p:txBody>
+      </p:sp>
+      <p:sp>
+        <p:nvSpPr>
+          <p:cNvPr id="37" name="TextBox 36"/>
           <p:cNvSpPr txBox="1"/>
           <p:nvPr/>
         </p:nvSpPr>
@@ -27514,7 +28247,7 @@
       </p:sp>
       <p:sp>
         <p:nvSpPr>
-          <p:cNvPr id="36" name="TextBox 35"/>
+          <p:cNvPr id="38" name="TextBox 37"/>
           <p:cNvSpPr txBox="1"/>
           <p:nvPr/>
         </p:nvSpPr>
@@ -27555,7 +28288,7 @@
       </p:sp>
       <p:sp>
         <p:nvSpPr>
-          <p:cNvPr id="37" name="Rounded Rectangle 36"/>
+          <p:cNvPr id="39" name="Rounded Rectangle 38"/>
           <p:cNvSpPr/>
           <p:nvPr/>
         </p:nvSpPr>
@@ -27601,7 +28334,7 @@
       </p:sp>
       <p:sp>
         <p:nvSpPr>
-          <p:cNvPr id="38" name="Rounded Rectangle 37"/>
+          <p:cNvPr id="40" name="Rounded Rectangle 39"/>
           <p:cNvSpPr/>
           <p:nvPr/>
         </p:nvSpPr>
@@ -27647,7 +28380,7 @@
       </p:sp>
       <p:sp>
         <p:nvSpPr>
-          <p:cNvPr id="39" name="Rounded Rectangle 38"/>
+          <p:cNvPr id="41" name="Rounded Rectangle 40"/>
           <p:cNvSpPr/>
           <p:nvPr/>
         </p:nvSpPr>
@@ -27693,7 +28426,7 @@
       </p:sp>
       <p:sp>
         <p:nvSpPr>
-          <p:cNvPr id="40" name="Rounded Rectangle 39"/>
+          <p:cNvPr id="42" name="Rounded Rectangle 41"/>
           <p:cNvSpPr/>
           <p:nvPr/>
         </p:nvSpPr>
@@ -27737,7 +28470,7 @@
       </p:sp>
       <p:sp>
         <p:nvSpPr>
-          <p:cNvPr id="41" name="Rounded Rectangle 40"/>
+          <p:cNvPr id="43" name="Rounded Rectangle 42"/>
           <p:cNvSpPr/>
           <p:nvPr/>
         </p:nvSpPr>
@@ -27783,7 +28516,7 @@
       </p:sp>
       <p:sp>
         <p:nvSpPr>
-          <p:cNvPr id="42" name="Rounded Rectangle 41"/>
+          <p:cNvPr id="44" name="Rounded Rectangle 43"/>
           <p:cNvSpPr/>
           <p:nvPr/>
         </p:nvSpPr>
@@ -27827,7 +28560,7 @@
       </p:sp>
       <p:sp>
         <p:nvSpPr>
-          <p:cNvPr id="43" name="Rounded Rectangle 42"/>
+          <p:cNvPr id="45" name="Rounded Rectangle 44"/>
           <p:cNvSpPr/>
           <p:nvPr/>
         </p:nvSpPr>
@@ -27873,7 +28606,7 @@
       </p:sp>
       <p:sp>
         <p:nvSpPr>
-          <p:cNvPr id="44" name="Rounded Rectangle 43"/>
+          <p:cNvPr id="46" name="Rounded Rectangle 45"/>
           <p:cNvSpPr/>
           <p:nvPr/>
         </p:nvSpPr>
@@ -27917,7 +28650,7 @@
       </p:sp>
       <p:sp>
         <p:nvSpPr>
-          <p:cNvPr id="45" name="Rounded Rectangle 44"/>
+          <p:cNvPr id="47" name="Rounded Rectangle 46"/>
           <p:cNvSpPr/>
           <p:nvPr/>
         </p:nvSpPr>
@@ -27963,7 +28696,7 @@
       </p:sp>
       <p:sp>
         <p:nvSpPr>
-          <p:cNvPr id="46" name="Rounded Rectangle 45"/>
+          <p:cNvPr id="48" name="Rounded Rectangle 47"/>
           <p:cNvSpPr/>
           <p:nvPr/>
         </p:nvSpPr>
@@ -28005,45 +28738,95 @@
           <a:p/>
         </p:txBody>
       </p:sp>
-      <p:cxnSp>
-        <p:nvCxnSpPr>
-          <p:cNvPr id="47" name="Connector 46"/>
-          <p:cNvCxnSpPr/>
-          <p:nvPr/>
-        </p:nvCxnSpPr>
-        <p:spPr>
-          <a:xfrm flipV="1">
-            <a:off x="14782800" y="4095750"/>
-            <a:ext cx="0" cy="952500"/>
-          </a:xfrm>
-          <a:prstGeom prst="line">
-            <a:avLst/>
-          </a:prstGeom>
-          <a:ln w="38100">
-            <a:solidFill>
-              <a:srgbClr val="9A7878"/>
-            </a:solidFill>
-            <a:tailEnd type="triangle" w="med" len="med"/>
-          </a:ln>
-        </p:spPr>
-        <p:style>
-          <a:lnRef idx="2">
-            <a:schemeClr val="accent1"/>
-          </a:lnRef>
-          <a:fillRef idx="0">
-            <a:schemeClr val="accent1"/>
-          </a:fillRef>
-          <a:effectRef idx="1">
-            <a:schemeClr val="accent1"/>
-          </a:effectRef>
-          <a:fontRef idx="minor">
-            <a:schemeClr val="tx1"/>
-          </a:fontRef>
-        </p:style>
-      </p:cxnSp>
-      <p:sp>
-        <p:nvSpPr>
-          <p:cNvPr id="48" name="TextBox 47"/>
+      <p:sp>
+        <p:nvSpPr>
+          <p:cNvPr id="49" name="Rectangle 48"/>
+          <p:cNvSpPr/>
+          <p:nvPr/>
+        </p:nvSpPr>
+        <p:spPr>
+          <a:xfrm>
+            <a:off x="14763750" y="4213860"/>
+            <a:ext cx="38100" cy="853440"/>
+          </a:xfrm>
+          <a:prstGeom prst="rect">
+            <a:avLst/>
+          </a:prstGeom>
+          <a:solidFill>
+            <a:srgbClr val="9A7878"/>
+          </a:solidFill>
+          <a:ln>
+            <a:noFill/>
+          </a:ln>
+          <a:effectLst/>
+        </p:spPr>
+        <p:style>
+          <a:lnRef idx="1">
+            <a:schemeClr val="accent1"/>
+          </a:lnRef>
+          <a:fillRef idx="3">
+            <a:schemeClr val="accent1"/>
+          </a:fillRef>
+          <a:effectRef idx="2">
+            <a:schemeClr val="accent1"/>
+          </a:effectRef>
+          <a:fontRef idx="minor">
+            <a:schemeClr val="lt1"/>
+          </a:fontRef>
+        </p:style>
+        <p:txBody>
+          <a:bodyPr rtlCol="0" anchor="ctr"/>
+          <a:lstStyle/>
+          <a:p/>
+        </p:txBody>
+      </p:sp>
+      <p:sp>
+        <p:nvSpPr>
+          <p:cNvPr id="50" name="Isosceles Triangle 49"/>
+          <p:cNvSpPr/>
+          <p:nvPr/>
+        </p:nvSpPr>
+        <p:spPr>
+          <a:xfrm>
+            <a:off x="14706600" y="4095750"/>
+            <a:ext cx="152400" cy="152400"/>
+          </a:xfrm>
+          <a:prstGeom prst="triangle">
+            <a:avLst/>
+          </a:prstGeom>
+          <a:solidFill>
+            <a:srgbClr val="E05540"/>
+          </a:solidFill>
+          <a:ln>
+            <a:noFill/>
+          </a:ln>
+          <a:effectLst/>
+        </p:spPr>
+        <p:style>
+          <a:lnRef idx="1">
+            <a:schemeClr val="accent1"/>
+          </a:lnRef>
+          <a:fillRef idx="3">
+            <a:schemeClr val="accent1"/>
+          </a:fillRef>
+          <a:effectRef idx="2">
+            <a:schemeClr val="accent1"/>
+          </a:effectRef>
+          <a:fontRef idx="minor">
+            <a:schemeClr val="lt1"/>
+          </a:fontRef>
+        </p:style>
+        <p:txBody>
+          <a:bodyPr rtlCol="0" anchor="ctr"/>
+          <a:lstStyle/>
+          <a:p>
+            <a:pPr algn="ctr"/>
+          </a:p>
+        </p:txBody>
+      </p:sp>
+      <p:sp>
+        <p:nvSpPr>
+          <p:cNvPr id="51" name="TextBox 50"/>
           <p:cNvSpPr txBox="1"/>
           <p:nvPr/>
         </p:nvSpPr>
@@ -28080,7 +28863,7 @@
       </p:sp>
       <p:sp>
         <p:nvSpPr>
-          <p:cNvPr id="49" name="TextBox 48"/>
+          <p:cNvPr id="52" name="TextBox 51"/>
           <p:cNvSpPr txBox="1"/>
           <p:nvPr/>
         </p:nvSpPr>
@@ -28121,7 +28904,7 @@
       </p:sp>
       <p:sp>
         <p:nvSpPr>
-          <p:cNvPr id="50" name="Rounded Rectangle 49"/>
+          <p:cNvPr id="53" name="Rounded Rectangle 52"/>
           <p:cNvSpPr/>
           <p:nvPr/>
         </p:nvSpPr>
@@ -28165,7 +28948,7 @@
       </p:sp>
       <p:sp>
         <p:nvSpPr>
-          <p:cNvPr id="51" name="TextBox 50"/>
+          <p:cNvPr id="54" name="TextBox 53"/>
           <p:cNvSpPr txBox="1"/>
           <p:nvPr/>
         </p:nvSpPr>
@@ -28202,7 +28985,7 @@
       </p:sp>
       <p:sp>
         <p:nvSpPr>
-          <p:cNvPr id="52" name="TextBox 51"/>
+          <p:cNvPr id="55" name="TextBox 54"/>
           <p:cNvSpPr txBox="1"/>
           <p:nvPr/>
         </p:nvSpPr>
@@ -28250,7 +29033,7 @@
       </p:sp>
       <p:sp>
         <p:nvSpPr>
-          <p:cNvPr id="53" name="TextBox 52"/>
+          <p:cNvPr id="56" name="TextBox 55"/>
           <p:cNvSpPr txBox="1"/>
           <p:nvPr/>
         </p:nvSpPr>
@@ -28473,45 +29256,95 @@
           <a:p/>
         </p:txBody>
       </p:sp>
-      <p:cxnSp>
-        <p:nvCxnSpPr>
-          <p:cNvPr id="6" name="Connector 5"/>
-          <p:cNvCxnSpPr/>
-          <p:nvPr/>
-        </p:nvCxnSpPr>
-        <p:spPr>
-          <a:xfrm flipV="1">
-            <a:off x="3556000" y="3619500"/>
-            <a:ext cx="0" cy="857250"/>
-          </a:xfrm>
-          <a:prstGeom prst="line">
-            <a:avLst/>
-          </a:prstGeom>
-          <a:ln w="57150">
-            <a:solidFill>
-              <a:srgbClr val="CC2200"/>
-            </a:solidFill>
-            <a:tailEnd type="triangle" w="med" len="med"/>
-          </a:ln>
-        </p:spPr>
-        <p:style>
-          <a:lnRef idx="2">
-            <a:schemeClr val="accent1"/>
-          </a:lnRef>
-          <a:fillRef idx="0">
-            <a:schemeClr val="accent1"/>
-          </a:fillRef>
-          <a:effectRef idx="1">
-            <a:schemeClr val="accent1"/>
-          </a:effectRef>
-          <a:fontRef idx="minor">
-            <a:schemeClr val="tx1"/>
-          </a:fontRef>
-        </p:style>
-      </p:cxnSp>
+      <p:sp>
+        <p:nvSpPr>
+          <p:cNvPr id="6" name="Rectangle 5"/>
+          <p:cNvSpPr/>
+          <p:nvPr/>
+        </p:nvSpPr>
+        <p:spPr>
+          <a:xfrm>
+            <a:off x="3527425" y="3734943"/>
+            <a:ext cx="57150" cy="770382"/>
+          </a:xfrm>
+          <a:prstGeom prst="rect">
+            <a:avLst/>
+          </a:prstGeom>
+          <a:solidFill>
+            <a:srgbClr val="CC2200"/>
+          </a:solidFill>
+          <a:ln>
+            <a:noFill/>
+          </a:ln>
+          <a:effectLst/>
+        </p:spPr>
+        <p:style>
+          <a:lnRef idx="1">
+            <a:schemeClr val="accent1"/>
+          </a:lnRef>
+          <a:fillRef idx="3">
+            <a:schemeClr val="accent1"/>
+          </a:fillRef>
+          <a:effectRef idx="2">
+            <a:schemeClr val="accent1"/>
+          </a:effectRef>
+          <a:fontRef idx="minor">
+            <a:schemeClr val="lt1"/>
+          </a:fontRef>
+        </p:style>
+        <p:txBody>
+          <a:bodyPr rtlCol="0" anchor="ctr"/>
+          <a:lstStyle/>
+          <a:p/>
+        </p:txBody>
+      </p:sp>
+      <p:sp>
+        <p:nvSpPr>
+          <p:cNvPr id="7" name="Isosceles Triangle 6"/>
+          <p:cNvSpPr/>
+          <p:nvPr/>
+        </p:nvSpPr>
+        <p:spPr>
+          <a:xfrm>
+            <a:off x="3475990" y="3619500"/>
+            <a:ext cx="160020" cy="160020"/>
+          </a:xfrm>
+          <a:prstGeom prst="triangle">
+            <a:avLst/>
+          </a:prstGeom>
+          <a:solidFill>
+            <a:srgbClr val="CC2200"/>
+          </a:solidFill>
+          <a:ln>
+            <a:noFill/>
+          </a:ln>
+          <a:effectLst/>
+        </p:spPr>
+        <p:style>
+          <a:lnRef idx="1">
+            <a:schemeClr val="accent1"/>
+          </a:lnRef>
+          <a:fillRef idx="3">
+            <a:schemeClr val="accent1"/>
+          </a:fillRef>
+          <a:effectRef idx="2">
+            <a:schemeClr val="accent1"/>
+          </a:effectRef>
+          <a:fontRef idx="minor">
+            <a:schemeClr val="lt1"/>
+          </a:fontRef>
+        </p:style>
+        <p:txBody>
+          <a:bodyPr rtlCol="0" anchor="ctr"/>
+          <a:lstStyle/>
+          <a:p>
+            <a:pPr algn="ctr"/>
+          </a:p>
+        </p:txBody>
+      </p:sp>
       <p:pic>
         <p:nvPicPr>
-          <p:cNvPr id="7" name="Picture 6" descr="dozer_top.png"/>
+          <p:cNvPr id="8" name="Picture 7" descr="dozer_top.png"/>
           <p:cNvPicPr>
             <a:picLocks noChangeAspect="1"/>
           </p:cNvPicPr>
@@ -28533,81 +29366,181 @@
           </a:prstGeom>
         </p:spPr>
       </p:pic>
-      <p:cxnSp>
-        <p:nvCxnSpPr>
-          <p:cNvPr id="8" name="Connector 7"/>
-          <p:cNvCxnSpPr/>
-          <p:nvPr/>
-        </p:nvCxnSpPr>
-        <p:spPr>
-          <a:xfrm flipV="1">
-            <a:off x="2222500" y="5143500"/>
-            <a:ext cx="0" cy="1143000"/>
-          </a:xfrm>
-          <a:prstGeom prst="line">
-            <a:avLst/>
-          </a:prstGeom>
-          <a:ln w="76200">
-            <a:solidFill>
-              <a:srgbClr val="CC2200"/>
-            </a:solidFill>
-            <a:tailEnd type="triangle" w="med" len="med"/>
-          </a:ln>
-        </p:spPr>
-        <p:style>
-          <a:lnRef idx="2">
-            <a:schemeClr val="accent1"/>
-          </a:lnRef>
-          <a:fillRef idx="0">
-            <a:schemeClr val="accent1"/>
-          </a:fillRef>
-          <a:effectRef idx="1">
-            <a:schemeClr val="accent1"/>
-          </a:effectRef>
-          <a:fontRef idx="minor">
-            <a:schemeClr val="tx1"/>
-          </a:fontRef>
-        </p:style>
-      </p:cxnSp>
-      <p:cxnSp>
-        <p:nvCxnSpPr>
-          <p:cNvPr id="9" name="Connector 8"/>
-          <p:cNvCxnSpPr/>
-          <p:nvPr/>
-        </p:nvCxnSpPr>
-        <p:spPr>
-          <a:xfrm flipV="1">
-            <a:off x="4889500" y="5143500"/>
-            <a:ext cx="0" cy="1143000"/>
-          </a:xfrm>
-          <a:prstGeom prst="line">
-            <a:avLst/>
-          </a:prstGeom>
-          <a:ln w="76200">
-            <a:solidFill>
-              <a:srgbClr val="CC2200"/>
-            </a:solidFill>
-            <a:tailEnd type="triangle" w="med" len="med"/>
-          </a:ln>
-        </p:spPr>
-        <p:style>
-          <a:lnRef idx="2">
-            <a:schemeClr val="accent1"/>
-          </a:lnRef>
-          <a:fillRef idx="0">
-            <a:schemeClr val="accent1"/>
-          </a:fillRef>
-          <a:effectRef idx="1">
-            <a:schemeClr val="accent1"/>
-          </a:effectRef>
-          <a:fontRef idx="minor">
-            <a:schemeClr val="tx1"/>
-          </a:fontRef>
-        </p:style>
-      </p:cxnSp>
-      <p:sp>
-        <p:nvSpPr>
-          <p:cNvPr id="10" name="TextBox 9"/>
+      <p:sp>
+        <p:nvSpPr>
+          <p:cNvPr id="9" name="Rectangle 8"/>
+          <p:cNvSpPr/>
+          <p:nvPr/>
+        </p:nvSpPr>
+        <p:spPr>
+          <a:xfrm>
+            <a:off x="2184400" y="5297424"/>
+            <a:ext cx="76200" cy="1027176"/>
+          </a:xfrm>
+          <a:prstGeom prst="rect">
+            <a:avLst/>
+          </a:prstGeom>
+          <a:solidFill>
+            <a:srgbClr val="CC2200"/>
+          </a:solidFill>
+          <a:ln>
+            <a:noFill/>
+          </a:ln>
+          <a:effectLst/>
+        </p:spPr>
+        <p:style>
+          <a:lnRef idx="1">
+            <a:schemeClr val="accent1"/>
+          </a:lnRef>
+          <a:fillRef idx="3">
+            <a:schemeClr val="accent1"/>
+          </a:fillRef>
+          <a:effectRef idx="2">
+            <a:schemeClr val="accent1"/>
+          </a:effectRef>
+          <a:fontRef idx="minor">
+            <a:schemeClr val="lt1"/>
+          </a:fontRef>
+        </p:style>
+        <p:txBody>
+          <a:bodyPr rtlCol="0" anchor="ctr"/>
+          <a:lstStyle/>
+          <a:p/>
+        </p:txBody>
+      </p:sp>
+      <p:sp>
+        <p:nvSpPr>
+          <p:cNvPr id="10" name="Isosceles Triangle 9"/>
+          <p:cNvSpPr/>
+          <p:nvPr/>
+        </p:nvSpPr>
+        <p:spPr>
+          <a:xfrm>
+            <a:off x="2115820" y="5143500"/>
+            <a:ext cx="213360" cy="213360"/>
+          </a:xfrm>
+          <a:prstGeom prst="triangle">
+            <a:avLst/>
+          </a:prstGeom>
+          <a:solidFill>
+            <a:srgbClr val="CC2200"/>
+          </a:solidFill>
+          <a:ln>
+            <a:noFill/>
+          </a:ln>
+          <a:effectLst/>
+        </p:spPr>
+        <p:style>
+          <a:lnRef idx="1">
+            <a:schemeClr val="accent1"/>
+          </a:lnRef>
+          <a:fillRef idx="3">
+            <a:schemeClr val="accent1"/>
+          </a:fillRef>
+          <a:effectRef idx="2">
+            <a:schemeClr val="accent1"/>
+          </a:effectRef>
+          <a:fontRef idx="minor">
+            <a:schemeClr val="lt1"/>
+          </a:fontRef>
+        </p:style>
+        <p:txBody>
+          <a:bodyPr rtlCol="0" anchor="ctr"/>
+          <a:lstStyle/>
+          <a:p>
+            <a:pPr algn="ctr"/>
+          </a:p>
+        </p:txBody>
+      </p:sp>
+      <p:sp>
+        <p:nvSpPr>
+          <p:cNvPr id="11" name="Rectangle 10"/>
+          <p:cNvSpPr/>
+          <p:nvPr/>
+        </p:nvSpPr>
+        <p:spPr>
+          <a:xfrm>
+            <a:off x="4851400" y="5297424"/>
+            <a:ext cx="76200" cy="1027176"/>
+          </a:xfrm>
+          <a:prstGeom prst="rect">
+            <a:avLst/>
+          </a:prstGeom>
+          <a:solidFill>
+            <a:srgbClr val="CC2200"/>
+          </a:solidFill>
+          <a:ln>
+            <a:noFill/>
+          </a:ln>
+          <a:effectLst/>
+        </p:spPr>
+        <p:style>
+          <a:lnRef idx="1">
+            <a:schemeClr val="accent1"/>
+          </a:lnRef>
+          <a:fillRef idx="3">
+            <a:schemeClr val="accent1"/>
+          </a:fillRef>
+          <a:effectRef idx="2">
+            <a:schemeClr val="accent1"/>
+          </a:effectRef>
+          <a:fontRef idx="minor">
+            <a:schemeClr val="lt1"/>
+          </a:fontRef>
+        </p:style>
+        <p:txBody>
+          <a:bodyPr rtlCol="0" anchor="ctr"/>
+          <a:lstStyle/>
+          <a:p/>
+        </p:txBody>
+      </p:sp>
+      <p:sp>
+        <p:nvSpPr>
+          <p:cNvPr id="12" name="Isosceles Triangle 11"/>
+          <p:cNvSpPr/>
+          <p:nvPr/>
+        </p:nvSpPr>
+        <p:spPr>
+          <a:xfrm>
+            <a:off x="4782820" y="5143500"/>
+            <a:ext cx="213360" cy="213360"/>
+          </a:xfrm>
+          <a:prstGeom prst="triangle">
+            <a:avLst/>
+          </a:prstGeom>
+          <a:solidFill>
+            <a:srgbClr val="CC2200"/>
+          </a:solidFill>
+          <a:ln>
+            <a:noFill/>
+          </a:ln>
+          <a:effectLst/>
+        </p:spPr>
+        <p:style>
+          <a:lnRef idx="1">
+            <a:schemeClr val="accent1"/>
+          </a:lnRef>
+          <a:fillRef idx="3">
+            <a:schemeClr val="accent1"/>
+          </a:fillRef>
+          <a:effectRef idx="2">
+            <a:schemeClr val="accent1"/>
+          </a:effectRef>
+          <a:fontRef idx="minor">
+            <a:schemeClr val="lt1"/>
+          </a:fontRef>
+        </p:style>
+        <p:txBody>
+          <a:bodyPr rtlCol="0" anchor="ctr"/>
+          <a:lstStyle/>
+          <a:p>
+            <a:pPr algn="ctr"/>
+          </a:p>
+        </p:txBody>
+      </p:sp>
+      <p:sp>
+        <p:nvSpPr>
+          <p:cNvPr id="13" name="TextBox 12"/>
           <p:cNvSpPr txBox="1"/>
           <p:nvPr/>
         </p:nvSpPr>
@@ -28644,7 +29577,7 @@
       </p:sp>
       <p:sp>
         <p:nvSpPr>
-          <p:cNvPr id="11" name="TextBox 10"/>
+          <p:cNvPr id="14" name="TextBox 13"/>
           <p:cNvSpPr txBox="1"/>
           <p:nvPr/>
         </p:nvSpPr>
@@ -28681,7 +29614,7 @@
       </p:sp>
       <p:sp>
         <p:nvSpPr>
-          <p:cNvPr id="12" name="TextBox 11"/>
+          <p:cNvPr id="15" name="TextBox 14"/>
           <p:cNvSpPr txBox="1"/>
           <p:nvPr/>
         </p:nvSpPr>
@@ -28718,7 +29651,7 @@
       </p:sp>
       <p:sp>
         <p:nvSpPr>
-          <p:cNvPr id="13" name="TextBox 12"/>
+          <p:cNvPr id="16" name="TextBox 15"/>
           <p:cNvSpPr txBox="1"/>
           <p:nvPr/>
         </p:nvSpPr>
@@ -28755,7 +29688,7 @@
       </p:sp>
       <p:sp>
         <p:nvSpPr>
-          <p:cNvPr id="14" name="Rounded Rectangle 13"/>
+          <p:cNvPr id="17" name="Rounded Rectangle 16"/>
           <p:cNvSpPr/>
           <p:nvPr/>
         </p:nvSpPr>
@@ -28801,7 +29734,7 @@
       </p:sp>
       <p:pic>
         <p:nvPicPr>
-          <p:cNvPr id="15" name="Picture 14" descr="arrow-repeat.png"/>
+          <p:cNvPr id="18" name="Picture 17" descr="arrow-repeat.png"/>
           <p:cNvPicPr>
             <a:picLocks noChangeAspect="1"/>
           </p:cNvPicPr>
@@ -28825,7 +29758,7 @@
       </p:pic>
       <p:pic>
         <p:nvPicPr>
-          <p:cNvPr id="16" name="Picture 15" descr="dozer_top.png"/>
+          <p:cNvPr id="19" name="Picture 18" descr="dozer_top.png"/>
           <p:cNvPicPr>
             <a:picLocks noChangeAspect="1"/>
           </p:cNvPicPr>
@@ -28847,81 +29780,181 @@
           </a:prstGeom>
         </p:spPr>
       </p:pic>
-      <p:cxnSp>
-        <p:nvCxnSpPr>
-          <p:cNvPr id="17" name="Connector 16"/>
-          <p:cNvCxnSpPr/>
-          <p:nvPr/>
-        </p:nvCxnSpPr>
-        <p:spPr>
-          <a:xfrm flipV="1">
-            <a:off x="7810500" y="5143500"/>
-            <a:ext cx="0" cy="1143000"/>
-          </a:xfrm>
-          <a:prstGeom prst="line">
-            <a:avLst/>
-          </a:prstGeom>
-          <a:ln w="76200">
-            <a:solidFill>
-              <a:srgbClr val="CC2200"/>
-            </a:solidFill>
-            <a:tailEnd type="triangle" w="med" len="med"/>
-          </a:ln>
-        </p:spPr>
-        <p:style>
-          <a:lnRef idx="2">
-            <a:schemeClr val="accent1"/>
-          </a:lnRef>
-          <a:fillRef idx="0">
-            <a:schemeClr val="accent1"/>
-          </a:fillRef>
-          <a:effectRef idx="1">
-            <a:schemeClr val="accent1"/>
-          </a:effectRef>
-          <a:fontRef idx="minor">
-            <a:schemeClr val="tx1"/>
-          </a:fontRef>
-        </p:style>
-      </p:cxnSp>
-      <p:cxnSp>
-        <p:nvCxnSpPr>
-          <p:cNvPr id="18" name="Connector 17"/>
-          <p:cNvCxnSpPr/>
-          <p:nvPr/>
-        </p:nvCxnSpPr>
-        <p:spPr>
-          <a:xfrm>
-            <a:off x="10477500" y="5143500"/>
-            <a:ext cx="0" cy="1143000"/>
-          </a:xfrm>
-          <a:prstGeom prst="line">
-            <a:avLst/>
-          </a:prstGeom>
-          <a:ln w="76200">
-            <a:solidFill>
-              <a:srgbClr val="E05540"/>
-            </a:solidFill>
-            <a:tailEnd type="triangle" w="med" len="med"/>
-          </a:ln>
-        </p:spPr>
-        <p:style>
-          <a:lnRef idx="2">
-            <a:schemeClr val="accent1"/>
-          </a:lnRef>
-          <a:fillRef idx="0">
-            <a:schemeClr val="accent1"/>
-          </a:fillRef>
-          <a:effectRef idx="1">
-            <a:schemeClr val="accent1"/>
-          </a:effectRef>
-          <a:fontRef idx="minor">
-            <a:schemeClr val="tx1"/>
-          </a:fontRef>
-        </p:style>
-      </p:cxnSp>
-      <p:sp>
-        <p:nvSpPr>
-          <p:cNvPr id="19" name="TextBox 18"/>
+      <p:sp>
+        <p:nvSpPr>
+          <p:cNvPr id="20" name="Rectangle 19"/>
+          <p:cNvSpPr/>
+          <p:nvPr/>
+        </p:nvSpPr>
+        <p:spPr>
+          <a:xfrm>
+            <a:off x="7772400" y="5297424"/>
+            <a:ext cx="76200" cy="1027176"/>
+          </a:xfrm>
+          <a:prstGeom prst="rect">
+            <a:avLst/>
+          </a:prstGeom>
+          <a:solidFill>
+            <a:srgbClr val="CC2200"/>
+          </a:solidFill>
+          <a:ln>
+            <a:noFill/>
+          </a:ln>
+          <a:effectLst/>
+        </p:spPr>
+        <p:style>
+          <a:lnRef idx="1">
+            <a:schemeClr val="accent1"/>
+          </a:lnRef>
+          <a:fillRef idx="3">
+            <a:schemeClr val="accent1"/>
+          </a:fillRef>
+          <a:effectRef idx="2">
+            <a:schemeClr val="accent1"/>
+          </a:effectRef>
+          <a:fontRef idx="minor">
+            <a:schemeClr val="lt1"/>
+          </a:fontRef>
+        </p:style>
+        <p:txBody>
+          <a:bodyPr rtlCol="0" anchor="ctr"/>
+          <a:lstStyle/>
+          <a:p/>
+        </p:txBody>
+      </p:sp>
+      <p:sp>
+        <p:nvSpPr>
+          <p:cNvPr id="21" name="Isosceles Triangle 20"/>
+          <p:cNvSpPr/>
+          <p:nvPr/>
+        </p:nvSpPr>
+        <p:spPr>
+          <a:xfrm>
+            <a:off x="7703820" y="5143500"/>
+            <a:ext cx="213360" cy="213360"/>
+          </a:xfrm>
+          <a:prstGeom prst="triangle">
+            <a:avLst/>
+          </a:prstGeom>
+          <a:solidFill>
+            <a:srgbClr val="CC2200"/>
+          </a:solidFill>
+          <a:ln>
+            <a:noFill/>
+          </a:ln>
+          <a:effectLst/>
+        </p:spPr>
+        <p:style>
+          <a:lnRef idx="1">
+            <a:schemeClr val="accent1"/>
+          </a:lnRef>
+          <a:fillRef idx="3">
+            <a:schemeClr val="accent1"/>
+          </a:fillRef>
+          <a:effectRef idx="2">
+            <a:schemeClr val="accent1"/>
+          </a:effectRef>
+          <a:fontRef idx="minor">
+            <a:schemeClr val="lt1"/>
+          </a:fontRef>
+        </p:style>
+        <p:txBody>
+          <a:bodyPr rtlCol="0" anchor="ctr"/>
+          <a:lstStyle/>
+          <a:p>
+            <a:pPr algn="ctr"/>
+          </a:p>
+        </p:txBody>
+      </p:sp>
+      <p:sp>
+        <p:nvSpPr>
+          <p:cNvPr id="22" name="Rectangle 21"/>
+          <p:cNvSpPr/>
+          <p:nvPr/>
+        </p:nvSpPr>
+        <p:spPr>
+          <a:xfrm>
+            <a:off x="10439400" y="5105400"/>
+            <a:ext cx="76200" cy="1027176"/>
+          </a:xfrm>
+          <a:prstGeom prst="rect">
+            <a:avLst/>
+          </a:prstGeom>
+          <a:solidFill>
+            <a:srgbClr val="E05540"/>
+          </a:solidFill>
+          <a:ln>
+            <a:noFill/>
+          </a:ln>
+          <a:effectLst/>
+        </p:spPr>
+        <p:style>
+          <a:lnRef idx="1">
+            <a:schemeClr val="accent1"/>
+          </a:lnRef>
+          <a:fillRef idx="3">
+            <a:schemeClr val="accent1"/>
+          </a:fillRef>
+          <a:effectRef idx="2">
+            <a:schemeClr val="accent1"/>
+          </a:effectRef>
+          <a:fontRef idx="minor">
+            <a:schemeClr val="lt1"/>
+          </a:fontRef>
+        </p:style>
+        <p:txBody>
+          <a:bodyPr rtlCol="0" anchor="ctr"/>
+          <a:lstStyle/>
+          <a:p/>
+        </p:txBody>
+      </p:sp>
+      <p:sp>
+        <p:nvSpPr>
+          <p:cNvPr id="23" name="Isosceles Triangle 22"/>
+          <p:cNvSpPr/>
+          <p:nvPr/>
+        </p:nvSpPr>
+        <p:spPr>
+          <a:xfrm rot="10800000">
+            <a:off x="10370820" y="6073140"/>
+            <a:ext cx="213360" cy="213360"/>
+          </a:xfrm>
+          <a:prstGeom prst="triangle">
+            <a:avLst/>
+          </a:prstGeom>
+          <a:solidFill>
+            <a:srgbClr val="E05540"/>
+          </a:solidFill>
+          <a:ln>
+            <a:noFill/>
+          </a:ln>
+          <a:effectLst/>
+        </p:spPr>
+        <p:style>
+          <a:lnRef idx="1">
+            <a:schemeClr val="accent1"/>
+          </a:lnRef>
+          <a:fillRef idx="3">
+            <a:schemeClr val="accent1"/>
+          </a:fillRef>
+          <a:effectRef idx="2">
+            <a:schemeClr val="accent1"/>
+          </a:effectRef>
+          <a:fontRef idx="minor">
+            <a:schemeClr val="lt1"/>
+          </a:fontRef>
+        </p:style>
+        <p:txBody>
+          <a:bodyPr rtlCol="0" anchor="ctr"/>
+          <a:lstStyle/>
+          <a:p>
+            <a:pPr algn="ctr"/>
+          </a:p>
+        </p:txBody>
+      </p:sp>
+      <p:sp>
+        <p:nvSpPr>
+          <p:cNvPr id="24" name="TextBox 23"/>
           <p:cNvSpPr txBox="1"/>
           <p:nvPr/>
         </p:nvSpPr>
@@ -28958,7 +29991,7 @@
       </p:sp>
       <p:sp>
         <p:nvSpPr>
-          <p:cNvPr id="20" name="TextBox 19"/>
+          <p:cNvPr id="25" name="TextBox 24"/>
           <p:cNvSpPr txBox="1"/>
           <p:nvPr/>
         </p:nvSpPr>
@@ -28995,7 +30028,7 @@
       </p:sp>
       <p:sp>
         <p:nvSpPr>
-          <p:cNvPr id="21" name="TextBox 20"/>
+          <p:cNvPr id="26" name="TextBox 25"/>
           <p:cNvSpPr txBox="1"/>
           <p:nvPr/>
         </p:nvSpPr>
@@ -29032,7 +30065,7 @@
       </p:sp>
       <p:sp>
         <p:nvSpPr>
-          <p:cNvPr id="22" name="TextBox 21"/>
+          <p:cNvPr id="27" name="TextBox 26"/>
           <p:cNvSpPr txBox="1"/>
           <p:nvPr/>
         </p:nvSpPr>
@@ -29069,7 +30102,7 @@
       </p:sp>
       <p:sp>
         <p:nvSpPr>
-          <p:cNvPr id="23" name="Rounded Rectangle 22"/>
+          <p:cNvPr id="28" name="Rounded Rectangle 27"/>
           <p:cNvSpPr/>
           <p:nvPr/>
         </p:nvSpPr>
@@ -29115,7 +30148,7 @@
       </p:sp>
       <p:sp>
         <p:nvSpPr>
-          <p:cNvPr id="24" name="Oval 23"/>
+          <p:cNvPr id="29" name="Oval 28"/>
           <p:cNvSpPr/>
           <p:nvPr/>
         </p:nvSpPr>
@@ -29159,7 +30192,7 @@
       </p:sp>
       <p:sp>
         <p:nvSpPr>
-          <p:cNvPr id="25" name="Oval 24"/>
+          <p:cNvPr id="30" name="Oval 29"/>
           <p:cNvSpPr/>
           <p:nvPr/>
         </p:nvSpPr>
@@ -29203,7 +30236,7 @@
       </p:sp>
       <p:sp>
         <p:nvSpPr>
-          <p:cNvPr id="26" name="Oval 25"/>
+          <p:cNvPr id="31" name="Oval 30"/>
           <p:cNvSpPr/>
           <p:nvPr/>
         </p:nvSpPr>
@@ -29247,7 +30280,7 @@
       </p:sp>
       <p:sp>
         <p:nvSpPr>
-          <p:cNvPr id="27" name="Oval 26"/>
+          <p:cNvPr id="32" name="Oval 31"/>
           <p:cNvSpPr/>
           <p:nvPr/>
         </p:nvSpPr>
@@ -29291,7 +30324,7 @@
       </p:sp>
       <p:sp>
         <p:nvSpPr>
-          <p:cNvPr id="28" name="Oval 27"/>
+          <p:cNvPr id="33" name="Oval 32"/>
           <p:cNvSpPr/>
           <p:nvPr/>
         </p:nvSpPr>
@@ -29335,7 +30368,7 @@
       </p:sp>
       <p:sp>
         <p:nvSpPr>
-          <p:cNvPr id="29" name="Oval 28"/>
+          <p:cNvPr id="34" name="Oval 33"/>
           <p:cNvSpPr/>
           <p:nvPr/>
         </p:nvSpPr>
@@ -29379,7 +30412,7 @@
       </p:sp>
       <p:sp>
         <p:nvSpPr>
-          <p:cNvPr id="30" name="Oval 29"/>
+          <p:cNvPr id="35" name="Oval 34"/>
           <p:cNvSpPr/>
           <p:nvPr/>
         </p:nvSpPr>
@@ -29423,7 +30456,7 @@
       </p:sp>
       <p:sp>
         <p:nvSpPr>
-          <p:cNvPr id="31" name="Oval 30"/>
+          <p:cNvPr id="36" name="Oval 35"/>
           <p:cNvSpPr/>
           <p:nvPr/>
         </p:nvSpPr>
@@ -29467,7 +30500,7 @@
       </p:sp>
       <p:sp>
         <p:nvSpPr>
-          <p:cNvPr id="32" name="Oval 31"/>
+          <p:cNvPr id="37" name="Oval 36"/>
           <p:cNvSpPr/>
           <p:nvPr/>
         </p:nvSpPr>
@@ -29511,7 +30544,7 @@
       </p:sp>
       <p:sp>
         <p:nvSpPr>
-          <p:cNvPr id="33" name="Oval 32"/>
+          <p:cNvPr id="38" name="Oval 37"/>
           <p:cNvSpPr/>
           <p:nvPr/>
         </p:nvSpPr>
@@ -29555,7 +30588,7 @@
       </p:sp>
       <p:cxnSp>
         <p:nvCxnSpPr>
-          <p:cNvPr id="34" name="Connector 33"/>
+          <p:cNvPr id="39" name="Connector 38"/>
           <p:cNvCxnSpPr/>
           <p:nvPr/>
         </p:nvCxnSpPr>
@@ -29591,7 +30624,7 @@
       </p:cxnSp>
       <p:pic>
         <p:nvPicPr>
-          <p:cNvPr id="35" name="Picture 34" descr="dozer_top.png"/>
+          <p:cNvPr id="40" name="Picture 39" descr="dozer_top.png"/>
           <p:cNvPicPr>
             <a:picLocks noChangeAspect="1"/>
           </p:cNvPicPr>
@@ -29613,81 +30646,181 @@
           </a:prstGeom>
         </p:spPr>
       </p:pic>
-      <p:cxnSp>
-        <p:nvCxnSpPr>
-          <p:cNvPr id="36" name="Connector 35"/>
-          <p:cNvCxnSpPr/>
-          <p:nvPr/>
-        </p:nvCxnSpPr>
-        <p:spPr>
-          <a:xfrm flipV="1">
-            <a:off x="13398500" y="5029200"/>
-            <a:ext cx="0" cy="1371600"/>
-          </a:xfrm>
-          <a:prstGeom prst="line">
-            <a:avLst/>
-          </a:prstGeom>
-          <a:ln w="76200">
-            <a:solidFill>
-              <a:srgbClr val="CC2200"/>
-            </a:solidFill>
-            <a:tailEnd type="triangle" w="med" len="med"/>
-          </a:ln>
-        </p:spPr>
-        <p:style>
-          <a:lnRef idx="2">
-            <a:schemeClr val="accent1"/>
-          </a:lnRef>
-          <a:fillRef idx="0">
-            <a:schemeClr val="accent1"/>
-          </a:fillRef>
-          <a:effectRef idx="1">
-            <a:schemeClr val="accent1"/>
-          </a:effectRef>
-          <a:fontRef idx="minor">
-            <a:schemeClr val="tx1"/>
-          </a:fontRef>
-        </p:style>
-      </p:cxnSp>
-      <p:cxnSp>
-        <p:nvCxnSpPr>
-          <p:cNvPr id="37" name="Connector 36"/>
-          <p:cNvCxnSpPr/>
-          <p:nvPr/>
-        </p:nvCxnSpPr>
-        <p:spPr>
-          <a:xfrm flipV="1">
-            <a:off x="16065500" y="5372100"/>
-            <a:ext cx="0" cy="685800"/>
-          </a:xfrm>
-          <a:prstGeom prst="line">
-            <a:avLst/>
-          </a:prstGeom>
-          <a:ln w="76200">
-            <a:solidFill>
-              <a:srgbClr val="CC2200"/>
-            </a:solidFill>
-            <a:tailEnd type="triangle" w="med" len="med"/>
-          </a:ln>
-        </p:spPr>
-        <p:style>
-          <a:lnRef idx="2">
-            <a:schemeClr val="accent1"/>
-          </a:lnRef>
-          <a:fillRef idx="0">
-            <a:schemeClr val="accent1"/>
-          </a:fillRef>
-          <a:effectRef idx="1">
-            <a:schemeClr val="accent1"/>
-          </a:effectRef>
-          <a:fontRef idx="minor">
-            <a:schemeClr val="tx1"/>
-          </a:fontRef>
-        </p:style>
-      </p:cxnSp>
-      <p:sp>
-        <p:nvSpPr>
-          <p:cNvPr id="38" name="TextBox 37"/>
+      <p:sp>
+        <p:nvSpPr>
+          <p:cNvPr id="41" name="Rectangle 40"/>
+          <p:cNvSpPr/>
+          <p:nvPr/>
+        </p:nvSpPr>
+        <p:spPr>
+          <a:xfrm>
+            <a:off x="13360400" y="5183124"/>
+            <a:ext cx="76200" cy="1255776"/>
+          </a:xfrm>
+          <a:prstGeom prst="rect">
+            <a:avLst/>
+          </a:prstGeom>
+          <a:solidFill>
+            <a:srgbClr val="CC2200"/>
+          </a:solidFill>
+          <a:ln>
+            <a:noFill/>
+          </a:ln>
+          <a:effectLst/>
+        </p:spPr>
+        <p:style>
+          <a:lnRef idx="1">
+            <a:schemeClr val="accent1"/>
+          </a:lnRef>
+          <a:fillRef idx="3">
+            <a:schemeClr val="accent1"/>
+          </a:fillRef>
+          <a:effectRef idx="2">
+            <a:schemeClr val="accent1"/>
+          </a:effectRef>
+          <a:fontRef idx="minor">
+            <a:schemeClr val="lt1"/>
+          </a:fontRef>
+        </p:style>
+        <p:txBody>
+          <a:bodyPr rtlCol="0" anchor="ctr"/>
+          <a:lstStyle/>
+          <a:p/>
+        </p:txBody>
+      </p:sp>
+      <p:sp>
+        <p:nvSpPr>
+          <p:cNvPr id="42" name="Isosceles Triangle 41"/>
+          <p:cNvSpPr/>
+          <p:nvPr/>
+        </p:nvSpPr>
+        <p:spPr>
+          <a:xfrm>
+            <a:off x="13291820" y="5029200"/>
+            <a:ext cx="213360" cy="213360"/>
+          </a:xfrm>
+          <a:prstGeom prst="triangle">
+            <a:avLst/>
+          </a:prstGeom>
+          <a:solidFill>
+            <a:srgbClr val="CC2200"/>
+          </a:solidFill>
+          <a:ln>
+            <a:noFill/>
+          </a:ln>
+          <a:effectLst/>
+        </p:spPr>
+        <p:style>
+          <a:lnRef idx="1">
+            <a:schemeClr val="accent1"/>
+          </a:lnRef>
+          <a:fillRef idx="3">
+            <a:schemeClr val="accent1"/>
+          </a:fillRef>
+          <a:effectRef idx="2">
+            <a:schemeClr val="accent1"/>
+          </a:effectRef>
+          <a:fontRef idx="minor">
+            <a:schemeClr val="lt1"/>
+          </a:fontRef>
+        </p:style>
+        <p:txBody>
+          <a:bodyPr rtlCol="0" anchor="ctr"/>
+          <a:lstStyle/>
+          <a:p>
+            <a:pPr algn="ctr"/>
+          </a:p>
+        </p:txBody>
+      </p:sp>
+      <p:sp>
+        <p:nvSpPr>
+          <p:cNvPr id="43" name="Rectangle 42"/>
+          <p:cNvSpPr/>
+          <p:nvPr/>
+        </p:nvSpPr>
+        <p:spPr>
+          <a:xfrm>
+            <a:off x="16027400" y="5526024"/>
+            <a:ext cx="76200" cy="569976"/>
+          </a:xfrm>
+          <a:prstGeom prst="rect">
+            <a:avLst/>
+          </a:prstGeom>
+          <a:solidFill>
+            <a:srgbClr val="CC2200"/>
+          </a:solidFill>
+          <a:ln>
+            <a:noFill/>
+          </a:ln>
+          <a:effectLst/>
+        </p:spPr>
+        <p:style>
+          <a:lnRef idx="1">
+            <a:schemeClr val="accent1"/>
+          </a:lnRef>
+          <a:fillRef idx="3">
+            <a:schemeClr val="accent1"/>
+          </a:fillRef>
+          <a:effectRef idx="2">
+            <a:schemeClr val="accent1"/>
+          </a:effectRef>
+          <a:fontRef idx="minor">
+            <a:schemeClr val="lt1"/>
+          </a:fontRef>
+        </p:style>
+        <p:txBody>
+          <a:bodyPr rtlCol="0" anchor="ctr"/>
+          <a:lstStyle/>
+          <a:p/>
+        </p:txBody>
+      </p:sp>
+      <p:sp>
+        <p:nvSpPr>
+          <p:cNvPr id="44" name="Isosceles Triangle 43"/>
+          <p:cNvSpPr/>
+          <p:nvPr/>
+        </p:nvSpPr>
+        <p:spPr>
+          <a:xfrm>
+            <a:off x="15958820" y="5372100"/>
+            <a:ext cx="213360" cy="213360"/>
+          </a:xfrm>
+          <a:prstGeom prst="triangle">
+            <a:avLst/>
+          </a:prstGeom>
+          <a:solidFill>
+            <a:srgbClr val="CC2200"/>
+          </a:solidFill>
+          <a:ln>
+            <a:noFill/>
+          </a:ln>
+          <a:effectLst/>
+        </p:spPr>
+        <p:style>
+          <a:lnRef idx="1">
+            <a:schemeClr val="accent1"/>
+          </a:lnRef>
+          <a:fillRef idx="3">
+            <a:schemeClr val="accent1"/>
+          </a:fillRef>
+          <a:effectRef idx="2">
+            <a:schemeClr val="accent1"/>
+          </a:effectRef>
+          <a:fontRef idx="minor">
+            <a:schemeClr val="lt1"/>
+          </a:fontRef>
+        </p:style>
+        <p:txBody>
+          <a:bodyPr rtlCol="0" anchor="ctr"/>
+          <a:lstStyle/>
+          <a:p>
+            <a:pPr algn="ctr"/>
+          </a:p>
+        </p:txBody>
+      </p:sp>
+      <p:sp>
+        <p:nvSpPr>
+          <p:cNvPr id="45" name="TextBox 44"/>
           <p:cNvSpPr txBox="1"/>
           <p:nvPr/>
         </p:nvSpPr>
@@ -29724,7 +30857,7 @@
       </p:sp>
       <p:sp>
         <p:nvSpPr>
-          <p:cNvPr id="39" name="TextBox 38"/>
+          <p:cNvPr id="46" name="TextBox 45"/>
           <p:cNvSpPr txBox="1"/>
           <p:nvPr/>
         </p:nvSpPr>
@@ -29761,7 +30894,7 @@
       </p:sp>
       <p:sp>
         <p:nvSpPr>
-          <p:cNvPr id="40" name="TextBox 39"/>
+          <p:cNvPr id="47" name="TextBox 46"/>
           <p:cNvSpPr txBox="1"/>
           <p:nvPr/>
         </p:nvSpPr>
@@ -29798,7 +30931,7 @@
       </p:sp>
       <p:sp>
         <p:nvSpPr>
-          <p:cNvPr id="41" name="TextBox 40"/>
+          <p:cNvPr id="48" name="TextBox 47"/>
           <p:cNvSpPr txBox="1"/>
           <p:nvPr/>
         </p:nvSpPr>
@@ -29835,7 +30968,7 @@
       </p:sp>
       <p:sp>
         <p:nvSpPr>
-          <p:cNvPr id="42" name="TextBox 41"/>
+          <p:cNvPr id="49" name="TextBox 48"/>
           <p:cNvSpPr txBox="1"/>
           <p:nvPr/>
         </p:nvSpPr>
@@ -29883,7 +31016,7 @@
       </p:sp>
       <p:sp>
         <p:nvSpPr>
-          <p:cNvPr id="43" name="TextBox 42"/>
+          <p:cNvPr id="50" name="TextBox 49"/>
           <p:cNvSpPr txBox="1"/>
           <p:nvPr/>
         </p:nvSpPr>
@@ -34564,41 +35697,48 @@
           </a:p>
         </p:txBody>
       </p:sp>
-      <p:cxnSp>
-        <p:nvCxnSpPr>
-          <p:cNvPr id="11" name="Connector 10"/>
-          <p:cNvCxnSpPr/>
-          <p:nvPr/>
-        </p:nvCxnSpPr>
-        <p:spPr>
-          <a:xfrm>
-            <a:off x="914400" y="4610100"/>
-            <a:ext cx="16459200" cy="0"/>
-          </a:xfrm>
-          <a:prstGeom prst="line">
-            <a:avLst/>
-          </a:prstGeom>
-          <a:ln w="19050">
-            <a:solidFill>
-              <a:srgbClr val="2A1A1A"/>
-            </a:solidFill>
-          </a:ln>
-        </p:spPr>
-        <p:style>
-          <a:lnRef idx="2">
-            <a:schemeClr val="accent1"/>
-          </a:lnRef>
-          <a:fillRef idx="0">
-            <a:schemeClr val="accent1"/>
-          </a:fillRef>
-          <a:effectRef idx="1">
-            <a:schemeClr val="accent1"/>
-          </a:effectRef>
-          <a:fontRef idx="minor">
-            <a:schemeClr val="tx1"/>
-          </a:fontRef>
-        </p:style>
-      </p:cxnSp>
+      <p:sp>
+        <p:nvSpPr>
+          <p:cNvPr id="11" name="Rectangle 10"/>
+          <p:cNvSpPr/>
+          <p:nvPr/>
+        </p:nvSpPr>
+        <p:spPr>
+          <a:xfrm>
+            <a:off x="904875" y="4600575"/>
+            <a:ext cx="16478250" cy="19050"/>
+          </a:xfrm>
+          <a:prstGeom prst="rect">
+            <a:avLst/>
+          </a:prstGeom>
+          <a:solidFill>
+            <a:srgbClr val="2A1A1A"/>
+          </a:solidFill>
+          <a:ln>
+            <a:noFill/>
+          </a:ln>
+          <a:effectLst/>
+        </p:spPr>
+        <p:style>
+          <a:lnRef idx="1">
+            <a:schemeClr val="accent1"/>
+          </a:lnRef>
+          <a:fillRef idx="3">
+            <a:schemeClr val="accent1"/>
+          </a:fillRef>
+          <a:effectRef idx="2">
+            <a:schemeClr val="accent1"/>
+          </a:effectRef>
+          <a:fontRef idx="minor">
+            <a:schemeClr val="lt1"/>
+          </a:fontRef>
+        </p:style>
+        <p:txBody>
+          <a:bodyPr rtlCol="0" anchor="ctr"/>
+          <a:lstStyle/>
+          <a:p/>
+        </p:txBody>
+      </p:sp>
       <p:sp>
         <p:nvSpPr>
           <p:cNvPr id="12" name="TextBox 11"/>
@@ -34784,41 +35924,48 @@
           </a:p>
         </p:txBody>
       </p:sp>
-      <p:cxnSp>
-        <p:nvCxnSpPr>
-          <p:cNvPr id="17" name="Connector 16"/>
-          <p:cNvCxnSpPr/>
-          <p:nvPr/>
-        </p:nvCxnSpPr>
-        <p:spPr>
-          <a:xfrm>
-            <a:off x="914400" y="5657850"/>
-            <a:ext cx="16459200" cy="0"/>
-          </a:xfrm>
-          <a:prstGeom prst="line">
-            <a:avLst/>
-          </a:prstGeom>
-          <a:ln w="19050">
-            <a:solidFill>
-              <a:srgbClr val="2A1A1A"/>
-            </a:solidFill>
-          </a:ln>
-        </p:spPr>
-        <p:style>
-          <a:lnRef idx="2">
-            <a:schemeClr val="accent1"/>
-          </a:lnRef>
-          <a:fillRef idx="0">
-            <a:schemeClr val="accent1"/>
-          </a:fillRef>
-          <a:effectRef idx="1">
-            <a:schemeClr val="accent1"/>
-          </a:effectRef>
-          <a:fontRef idx="minor">
-            <a:schemeClr val="tx1"/>
-          </a:fontRef>
-        </p:style>
-      </p:cxnSp>
+      <p:sp>
+        <p:nvSpPr>
+          <p:cNvPr id="17" name="Rectangle 16"/>
+          <p:cNvSpPr/>
+          <p:nvPr/>
+        </p:nvSpPr>
+        <p:spPr>
+          <a:xfrm>
+            <a:off x="904875" y="5648325"/>
+            <a:ext cx="16478250" cy="19050"/>
+          </a:xfrm>
+          <a:prstGeom prst="rect">
+            <a:avLst/>
+          </a:prstGeom>
+          <a:solidFill>
+            <a:srgbClr val="2A1A1A"/>
+          </a:solidFill>
+          <a:ln>
+            <a:noFill/>
+          </a:ln>
+          <a:effectLst/>
+        </p:spPr>
+        <p:style>
+          <a:lnRef idx="1">
+            <a:schemeClr val="accent1"/>
+          </a:lnRef>
+          <a:fillRef idx="3">
+            <a:schemeClr val="accent1"/>
+          </a:fillRef>
+          <a:effectRef idx="2">
+            <a:schemeClr val="accent1"/>
+          </a:effectRef>
+          <a:fontRef idx="minor">
+            <a:schemeClr val="lt1"/>
+          </a:fontRef>
+        </p:style>
+        <p:txBody>
+          <a:bodyPr rtlCol="0" anchor="ctr"/>
+          <a:lstStyle/>
+          <a:p/>
+        </p:txBody>
+      </p:sp>
       <p:sp>
         <p:nvSpPr>
           <p:cNvPr id="18" name="TextBox 17"/>
@@ -35004,41 +36151,48 @@
           </a:p>
         </p:txBody>
       </p:sp>
-      <p:cxnSp>
-        <p:nvCxnSpPr>
-          <p:cNvPr id="23" name="Connector 22"/>
-          <p:cNvCxnSpPr/>
-          <p:nvPr/>
-        </p:nvCxnSpPr>
-        <p:spPr>
-          <a:xfrm>
-            <a:off x="914400" y="6705600"/>
-            <a:ext cx="16459200" cy="0"/>
-          </a:xfrm>
-          <a:prstGeom prst="line">
-            <a:avLst/>
-          </a:prstGeom>
-          <a:ln w="19050">
-            <a:solidFill>
-              <a:srgbClr val="2A1A1A"/>
-            </a:solidFill>
-          </a:ln>
-        </p:spPr>
-        <p:style>
-          <a:lnRef idx="2">
-            <a:schemeClr val="accent1"/>
-          </a:lnRef>
-          <a:fillRef idx="0">
-            <a:schemeClr val="accent1"/>
-          </a:fillRef>
-          <a:effectRef idx="1">
-            <a:schemeClr val="accent1"/>
-          </a:effectRef>
-          <a:fontRef idx="minor">
-            <a:schemeClr val="tx1"/>
-          </a:fontRef>
-        </p:style>
-      </p:cxnSp>
+      <p:sp>
+        <p:nvSpPr>
+          <p:cNvPr id="23" name="Rectangle 22"/>
+          <p:cNvSpPr/>
+          <p:nvPr/>
+        </p:nvSpPr>
+        <p:spPr>
+          <a:xfrm>
+            <a:off x="904875" y="6696075"/>
+            <a:ext cx="16478250" cy="19050"/>
+          </a:xfrm>
+          <a:prstGeom prst="rect">
+            <a:avLst/>
+          </a:prstGeom>
+          <a:solidFill>
+            <a:srgbClr val="2A1A1A"/>
+          </a:solidFill>
+          <a:ln>
+            <a:noFill/>
+          </a:ln>
+          <a:effectLst/>
+        </p:spPr>
+        <p:style>
+          <a:lnRef idx="1">
+            <a:schemeClr val="accent1"/>
+          </a:lnRef>
+          <a:fillRef idx="3">
+            <a:schemeClr val="accent1"/>
+          </a:fillRef>
+          <a:effectRef idx="2">
+            <a:schemeClr val="accent1"/>
+          </a:effectRef>
+          <a:fontRef idx="minor">
+            <a:schemeClr val="lt1"/>
+          </a:fontRef>
+        </p:style>
+        <p:txBody>
+          <a:bodyPr rtlCol="0" anchor="ctr"/>
+          <a:lstStyle/>
+          <a:p/>
+        </p:txBody>
+      </p:sp>
       <p:sp>
         <p:nvSpPr>
           <p:cNvPr id="24" name="TextBox 23"/>
@@ -35270,41 +36424,48 @@
           <a:p/>
         </p:txBody>
       </p:sp>
-      <p:cxnSp>
-        <p:nvCxnSpPr>
-          <p:cNvPr id="30" name="Connector 29"/>
-          <p:cNvCxnSpPr/>
-          <p:nvPr/>
-        </p:nvCxnSpPr>
-        <p:spPr>
-          <a:xfrm>
-            <a:off x="914400" y="7753350"/>
-            <a:ext cx="16459200" cy="0"/>
-          </a:xfrm>
-          <a:prstGeom prst="line">
-            <a:avLst/>
-          </a:prstGeom>
-          <a:ln w="19050">
-            <a:solidFill>
-              <a:srgbClr val="2A1A1A"/>
-            </a:solidFill>
-          </a:ln>
-        </p:spPr>
-        <p:style>
-          <a:lnRef idx="2">
-            <a:schemeClr val="accent1"/>
-          </a:lnRef>
-          <a:fillRef idx="0">
-            <a:schemeClr val="accent1"/>
-          </a:fillRef>
-          <a:effectRef idx="1">
-            <a:schemeClr val="accent1"/>
-          </a:effectRef>
-          <a:fontRef idx="minor">
-            <a:schemeClr val="tx1"/>
-          </a:fontRef>
-        </p:style>
-      </p:cxnSp>
+      <p:sp>
+        <p:nvSpPr>
+          <p:cNvPr id="30" name="Rectangle 29"/>
+          <p:cNvSpPr/>
+          <p:nvPr/>
+        </p:nvSpPr>
+        <p:spPr>
+          <a:xfrm>
+            <a:off x="904875" y="7743825"/>
+            <a:ext cx="16478250" cy="19050"/>
+          </a:xfrm>
+          <a:prstGeom prst="rect">
+            <a:avLst/>
+          </a:prstGeom>
+          <a:solidFill>
+            <a:srgbClr val="2A1A1A"/>
+          </a:solidFill>
+          <a:ln>
+            <a:noFill/>
+          </a:ln>
+          <a:effectLst/>
+        </p:spPr>
+        <p:style>
+          <a:lnRef idx="1">
+            <a:schemeClr val="accent1"/>
+          </a:lnRef>
+          <a:fillRef idx="3">
+            <a:schemeClr val="accent1"/>
+          </a:fillRef>
+          <a:effectRef idx="2">
+            <a:schemeClr val="accent1"/>
+          </a:effectRef>
+          <a:fontRef idx="minor">
+            <a:schemeClr val="lt1"/>
+          </a:fontRef>
+        </p:style>
+        <p:txBody>
+          <a:bodyPr rtlCol="0" anchor="ctr"/>
+          <a:lstStyle/>
+          <a:p/>
+        </p:txBody>
+      </p:sp>
       <p:sp>
         <p:nvSpPr>
           <p:cNvPr id="31" name="TextBox 30"/>
@@ -35859,76 +37020,90 @@
           <a:p/>
         </p:txBody>
       </p:sp>
-      <p:cxnSp>
-        <p:nvCxnSpPr>
-          <p:cNvPr id="6" name="Connector 5"/>
-          <p:cNvCxnSpPr/>
-          <p:nvPr/>
-        </p:nvCxnSpPr>
-        <p:spPr>
-          <a:xfrm>
-            <a:off x="1428750" y="5619750"/>
-            <a:ext cx="5143500" cy="0"/>
-          </a:xfrm>
-          <a:prstGeom prst="line">
-            <a:avLst/>
-          </a:prstGeom>
-          <a:ln w="19050">
-            <a:solidFill>
-              <a:srgbClr val="2A1A1A"/>
-            </a:solidFill>
-          </a:ln>
-        </p:spPr>
-        <p:style>
-          <a:lnRef idx="2">
-            <a:schemeClr val="accent1"/>
-          </a:lnRef>
-          <a:fillRef idx="0">
-            <a:schemeClr val="accent1"/>
-          </a:fillRef>
-          <a:effectRef idx="1">
-            <a:schemeClr val="accent1"/>
-          </a:effectRef>
-          <a:fontRef idx="minor">
-            <a:schemeClr val="tx1"/>
-          </a:fontRef>
-        </p:style>
-      </p:cxnSp>
-      <p:cxnSp>
-        <p:nvCxnSpPr>
-          <p:cNvPr id="7" name="Connector 6"/>
-          <p:cNvCxnSpPr/>
-          <p:nvPr/>
-        </p:nvCxnSpPr>
-        <p:spPr>
-          <a:xfrm>
-            <a:off x="4000500" y="3048000"/>
-            <a:ext cx="0" cy="5143500"/>
-          </a:xfrm>
-          <a:prstGeom prst="line">
-            <a:avLst/>
-          </a:prstGeom>
-          <a:ln w="19050">
-            <a:solidFill>
-              <a:srgbClr val="2A1A1A"/>
-            </a:solidFill>
-          </a:ln>
-        </p:spPr>
-        <p:style>
-          <a:lnRef idx="2">
-            <a:schemeClr val="accent1"/>
-          </a:lnRef>
-          <a:fillRef idx="0">
-            <a:schemeClr val="accent1"/>
-          </a:fillRef>
-          <a:effectRef idx="1">
-            <a:schemeClr val="accent1"/>
-          </a:effectRef>
-          <a:fontRef idx="minor">
-            <a:schemeClr val="tx1"/>
-          </a:fontRef>
-        </p:style>
-      </p:cxnSp>
+      <p:sp>
+        <p:nvSpPr>
+          <p:cNvPr id="6" name="Rectangle 5"/>
+          <p:cNvSpPr/>
+          <p:nvPr/>
+        </p:nvSpPr>
+        <p:spPr>
+          <a:xfrm>
+            <a:off x="1419225" y="5610225"/>
+            <a:ext cx="5162550" cy="19050"/>
+          </a:xfrm>
+          <a:prstGeom prst="rect">
+            <a:avLst/>
+          </a:prstGeom>
+          <a:solidFill>
+            <a:srgbClr val="2A1A1A"/>
+          </a:solidFill>
+          <a:ln>
+            <a:noFill/>
+          </a:ln>
+          <a:effectLst/>
+        </p:spPr>
+        <p:style>
+          <a:lnRef idx="1">
+            <a:schemeClr val="accent1"/>
+          </a:lnRef>
+          <a:fillRef idx="3">
+            <a:schemeClr val="accent1"/>
+          </a:fillRef>
+          <a:effectRef idx="2">
+            <a:schemeClr val="accent1"/>
+          </a:effectRef>
+          <a:fontRef idx="minor">
+            <a:schemeClr val="lt1"/>
+          </a:fontRef>
+        </p:style>
+        <p:txBody>
+          <a:bodyPr rtlCol="0" anchor="ctr"/>
+          <a:lstStyle/>
+          <a:p/>
+        </p:txBody>
+      </p:sp>
+      <p:sp>
+        <p:nvSpPr>
+          <p:cNvPr id="7" name="Rectangle 6"/>
+          <p:cNvSpPr/>
+          <p:nvPr/>
+        </p:nvSpPr>
+        <p:spPr>
+          <a:xfrm>
+            <a:off x="3990975" y="3038475"/>
+            <a:ext cx="19050" cy="5162550"/>
+          </a:xfrm>
+          <a:prstGeom prst="rect">
+            <a:avLst/>
+          </a:prstGeom>
+          <a:solidFill>
+            <a:srgbClr val="2A1A1A"/>
+          </a:solidFill>
+          <a:ln>
+            <a:noFill/>
+          </a:ln>
+          <a:effectLst/>
+        </p:spPr>
+        <p:style>
+          <a:lnRef idx="1">
+            <a:schemeClr val="accent1"/>
+          </a:lnRef>
+          <a:fillRef idx="3">
+            <a:schemeClr val="accent1"/>
+          </a:fillRef>
+          <a:effectRef idx="2">
+            <a:schemeClr val="accent1"/>
+          </a:effectRef>
+          <a:fontRef idx="minor">
+            <a:schemeClr val="lt1"/>
+          </a:fontRef>
+        </p:style>
+        <p:txBody>
+          <a:bodyPr rtlCol="0" anchor="ctr"/>
+          <a:lstStyle/>
+          <a:p/>
+        </p:txBody>
+      </p:sp>
       <p:cxnSp>
         <p:nvCxnSpPr>
           <p:cNvPr id="8" name="Connector 7"/>
@@ -38433,41 +39608,48 @@
           <a:p/>
         </p:txBody>
       </p:sp>
-      <p:cxnSp>
-        <p:nvCxnSpPr>
-          <p:cNvPr id="6" name="Connector 5"/>
-          <p:cNvCxnSpPr/>
-          <p:nvPr/>
-        </p:nvCxnSpPr>
-        <p:spPr>
-          <a:xfrm>
-            <a:off x="1866900" y="7905750"/>
-            <a:ext cx="9525000" cy="0"/>
-          </a:xfrm>
-          <a:prstGeom prst="line">
-            <a:avLst/>
-          </a:prstGeom>
-          <a:ln w="19050">
-            <a:solidFill>
-              <a:srgbClr val="2A1A1A"/>
-            </a:solidFill>
-          </a:ln>
-        </p:spPr>
-        <p:style>
-          <a:lnRef idx="2">
-            <a:schemeClr val="accent1"/>
-          </a:lnRef>
-          <a:fillRef idx="0">
-            <a:schemeClr val="accent1"/>
-          </a:fillRef>
-          <a:effectRef idx="1">
-            <a:schemeClr val="accent1"/>
-          </a:effectRef>
-          <a:fontRef idx="minor">
-            <a:schemeClr val="tx1"/>
-          </a:fontRef>
-        </p:style>
-      </p:cxnSp>
+      <p:sp>
+        <p:nvSpPr>
+          <p:cNvPr id="6" name="Rectangle 5"/>
+          <p:cNvSpPr/>
+          <p:nvPr/>
+        </p:nvSpPr>
+        <p:spPr>
+          <a:xfrm>
+            <a:off x="1857375" y="7896225"/>
+            <a:ext cx="9544050" cy="19050"/>
+          </a:xfrm>
+          <a:prstGeom prst="rect">
+            <a:avLst/>
+          </a:prstGeom>
+          <a:solidFill>
+            <a:srgbClr val="2A1A1A"/>
+          </a:solidFill>
+          <a:ln>
+            <a:noFill/>
+          </a:ln>
+          <a:effectLst/>
+        </p:spPr>
+        <p:style>
+          <a:lnRef idx="1">
+            <a:schemeClr val="accent1"/>
+          </a:lnRef>
+          <a:fillRef idx="3">
+            <a:schemeClr val="accent1"/>
+          </a:fillRef>
+          <a:effectRef idx="2">
+            <a:schemeClr val="accent1"/>
+          </a:effectRef>
+          <a:fontRef idx="minor">
+            <a:schemeClr val="lt1"/>
+          </a:fontRef>
+        </p:style>
+        <p:txBody>
+          <a:bodyPr rtlCol="0" anchor="ctr"/>
+          <a:lstStyle/>
+          <a:p/>
+        </p:txBody>
+      </p:sp>
       <p:sp>
         <p:nvSpPr>
           <p:cNvPr id="7" name="TextBox 6"/>
@@ -38505,41 +39687,48 @@
           </a:p>
         </p:txBody>
       </p:sp>
-      <p:cxnSp>
-        <p:nvCxnSpPr>
-          <p:cNvPr id="8" name="Connector 7"/>
-          <p:cNvCxnSpPr/>
-          <p:nvPr/>
-        </p:nvCxnSpPr>
-        <p:spPr>
-          <a:xfrm>
-            <a:off x="1866900" y="6715125"/>
-            <a:ext cx="9525000" cy="0"/>
-          </a:xfrm>
-          <a:prstGeom prst="line">
-            <a:avLst/>
-          </a:prstGeom>
-          <a:ln w="19050">
-            <a:solidFill>
-              <a:srgbClr val="2A1A1A"/>
-            </a:solidFill>
-          </a:ln>
-        </p:spPr>
-        <p:style>
-          <a:lnRef idx="2">
-            <a:schemeClr val="accent1"/>
-          </a:lnRef>
-          <a:fillRef idx="0">
-            <a:schemeClr val="accent1"/>
-          </a:fillRef>
-          <a:effectRef idx="1">
-            <a:schemeClr val="accent1"/>
-          </a:effectRef>
-          <a:fontRef idx="minor">
-            <a:schemeClr val="tx1"/>
-          </a:fontRef>
-        </p:style>
-      </p:cxnSp>
+      <p:sp>
+        <p:nvSpPr>
+          <p:cNvPr id="8" name="Rectangle 7"/>
+          <p:cNvSpPr/>
+          <p:nvPr/>
+        </p:nvSpPr>
+        <p:spPr>
+          <a:xfrm>
+            <a:off x="1857375" y="6705600"/>
+            <a:ext cx="9544050" cy="19050"/>
+          </a:xfrm>
+          <a:prstGeom prst="rect">
+            <a:avLst/>
+          </a:prstGeom>
+          <a:solidFill>
+            <a:srgbClr val="2A1A1A"/>
+          </a:solidFill>
+          <a:ln>
+            <a:noFill/>
+          </a:ln>
+          <a:effectLst/>
+        </p:spPr>
+        <p:style>
+          <a:lnRef idx="1">
+            <a:schemeClr val="accent1"/>
+          </a:lnRef>
+          <a:fillRef idx="3">
+            <a:schemeClr val="accent1"/>
+          </a:fillRef>
+          <a:effectRef idx="2">
+            <a:schemeClr val="accent1"/>
+          </a:effectRef>
+          <a:fontRef idx="minor">
+            <a:schemeClr val="lt1"/>
+          </a:fontRef>
+        </p:style>
+        <p:txBody>
+          <a:bodyPr rtlCol="0" anchor="ctr"/>
+          <a:lstStyle/>
+          <a:p/>
+        </p:txBody>
+      </p:sp>
       <p:sp>
         <p:nvSpPr>
           <p:cNvPr id="9" name="TextBox 8"/>
@@ -38577,41 +39766,48 @@
           </a:p>
         </p:txBody>
       </p:sp>
-      <p:cxnSp>
-        <p:nvCxnSpPr>
-          <p:cNvPr id="10" name="Connector 9"/>
-          <p:cNvCxnSpPr/>
-          <p:nvPr/>
-        </p:nvCxnSpPr>
-        <p:spPr>
-          <a:xfrm>
-            <a:off x="1866900" y="5524500"/>
-            <a:ext cx="9525000" cy="0"/>
-          </a:xfrm>
-          <a:prstGeom prst="line">
-            <a:avLst/>
-          </a:prstGeom>
-          <a:ln w="19050">
-            <a:solidFill>
-              <a:srgbClr val="9A7878"/>
-            </a:solidFill>
-          </a:ln>
-        </p:spPr>
-        <p:style>
-          <a:lnRef idx="2">
-            <a:schemeClr val="accent1"/>
-          </a:lnRef>
-          <a:fillRef idx="0">
-            <a:schemeClr val="accent1"/>
-          </a:fillRef>
-          <a:effectRef idx="1">
-            <a:schemeClr val="accent1"/>
-          </a:effectRef>
-          <a:fontRef idx="minor">
-            <a:schemeClr val="tx1"/>
-          </a:fontRef>
-        </p:style>
-      </p:cxnSp>
+      <p:sp>
+        <p:nvSpPr>
+          <p:cNvPr id="10" name="Rectangle 9"/>
+          <p:cNvSpPr/>
+          <p:nvPr/>
+        </p:nvSpPr>
+        <p:spPr>
+          <a:xfrm>
+            <a:off x="1857375" y="5514975"/>
+            <a:ext cx="9544050" cy="19050"/>
+          </a:xfrm>
+          <a:prstGeom prst="rect">
+            <a:avLst/>
+          </a:prstGeom>
+          <a:solidFill>
+            <a:srgbClr val="9A7878"/>
+          </a:solidFill>
+          <a:ln>
+            <a:noFill/>
+          </a:ln>
+          <a:effectLst/>
+        </p:spPr>
+        <p:style>
+          <a:lnRef idx="1">
+            <a:schemeClr val="accent1"/>
+          </a:lnRef>
+          <a:fillRef idx="3">
+            <a:schemeClr val="accent1"/>
+          </a:fillRef>
+          <a:effectRef idx="2">
+            <a:schemeClr val="accent1"/>
+          </a:effectRef>
+          <a:fontRef idx="minor">
+            <a:schemeClr val="lt1"/>
+          </a:fontRef>
+        </p:style>
+        <p:txBody>
+          <a:bodyPr rtlCol="0" anchor="ctr"/>
+          <a:lstStyle/>
+          <a:p/>
+        </p:txBody>
+      </p:sp>
       <p:sp>
         <p:nvSpPr>
           <p:cNvPr id="11" name="TextBox 10"/>
@@ -38649,41 +39845,48 @@
           </a:p>
         </p:txBody>
       </p:sp>
-      <p:cxnSp>
-        <p:nvCxnSpPr>
-          <p:cNvPr id="12" name="Connector 11"/>
-          <p:cNvCxnSpPr/>
-          <p:nvPr/>
-        </p:nvCxnSpPr>
-        <p:spPr>
-          <a:xfrm>
-            <a:off x="1866900" y="4333875"/>
-            <a:ext cx="9525000" cy="0"/>
-          </a:xfrm>
-          <a:prstGeom prst="line">
-            <a:avLst/>
-          </a:prstGeom>
-          <a:ln w="19050">
-            <a:solidFill>
-              <a:srgbClr val="2A1A1A"/>
-            </a:solidFill>
-          </a:ln>
-        </p:spPr>
-        <p:style>
-          <a:lnRef idx="2">
-            <a:schemeClr val="accent1"/>
-          </a:lnRef>
-          <a:fillRef idx="0">
-            <a:schemeClr val="accent1"/>
-          </a:fillRef>
-          <a:effectRef idx="1">
-            <a:schemeClr val="accent1"/>
-          </a:effectRef>
-          <a:fontRef idx="minor">
-            <a:schemeClr val="tx1"/>
-          </a:fontRef>
-        </p:style>
-      </p:cxnSp>
+      <p:sp>
+        <p:nvSpPr>
+          <p:cNvPr id="12" name="Rectangle 11"/>
+          <p:cNvSpPr/>
+          <p:nvPr/>
+        </p:nvSpPr>
+        <p:spPr>
+          <a:xfrm>
+            <a:off x="1857375" y="4324350"/>
+            <a:ext cx="9544050" cy="19050"/>
+          </a:xfrm>
+          <a:prstGeom prst="rect">
+            <a:avLst/>
+          </a:prstGeom>
+          <a:solidFill>
+            <a:srgbClr val="2A1A1A"/>
+          </a:solidFill>
+          <a:ln>
+            <a:noFill/>
+          </a:ln>
+          <a:effectLst/>
+        </p:spPr>
+        <p:style>
+          <a:lnRef idx="1">
+            <a:schemeClr val="accent1"/>
+          </a:lnRef>
+          <a:fillRef idx="3">
+            <a:schemeClr val="accent1"/>
+          </a:fillRef>
+          <a:effectRef idx="2">
+            <a:schemeClr val="accent1"/>
+          </a:effectRef>
+          <a:fontRef idx="minor">
+            <a:schemeClr val="lt1"/>
+          </a:fontRef>
+        </p:style>
+        <p:txBody>
+          <a:bodyPr rtlCol="0" anchor="ctr"/>
+          <a:lstStyle/>
+          <a:p/>
+        </p:txBody>
+      </p:sp>
       <p:sp>
         <p:nvSpPr>
           <p:cNvPr id="13" name="TextBox 12"/>
@@ -38721,41 +39924,48 @@
           </a:p>
         </p:txBody>
       </p:sp>
-      <p:cxnSp>
-        <p:nvCxnSpPr>
-          <p:cNvPr id="14" name="Connector 13"/>
-          <p:cNvCxnSpPr/>
-          <p:nvPr/>
-        </p:nvCxnSpPr>
-        <p:spPr>
-          <a:xfrm>
-            <a:off x="1866900" y="3143250"/>
-            <a:ext cx="9525000" cy="0"/>
-          </a:xfrm>
-          <a:prstGeom prst="line">
-            <a:avLst/>
-          </a:prstGeom>
-          <a:ln w="19050">
-            <a:solidFill>
-              <a:srgbClr val="2A1A1A"/>
-            </a:solidFill>
-          </a:ln>
-        </p:spPr>
-        <p:style>
-          <a:lnRef idx="2">
-            <a:schemeClr val="accent1"/>
-          </a:lnRef>
-          <a:fillRef idx="0">
-            <a:schemeClr val="accent1"/>
-          </a:fillRef>
-          <a:effectRef idx="1">
-            <a:schemeClr val="accent1"/>
-          </a:effectRef>
-          <a:fontRef idx="minor">
-            <a:schemeClr val="tx1"/>
-          </a:fontRef>
-        </p:style>
-      </p:cxnSp>
+      <p:sp>
+        <p:nvSpPr>
+          <p:cNvPr id="14" name="Rectangle 13"/>
+          <p:cNvSpPr/>
+          <p:nvPr/>
+        </p:nvSpPr>
+        <p:spPr>
+          <a:xfrm>
+            <a:off x="1857375" y="3133725"/>
+            <a:ext cx="9544050" cy="19050"/>
+          </a:xfrm>
+          <a:prstGeom prst="rect">
+            <a:avLst/>
+          </a:prstGeom>
+          <a:solidFill>
+            <a:srgbClr val="2A1A1A"/>
+          </a:solidFill>
+          <a:ln>
+            <a:noFill/>
+          </a:ln>
+          <a:effectLst/>
+        </p:spPr>
+        <p:style>
+          <a:lnRef idx="1">
+            <a:schemeClr val="accent1"/>
+          </a:lnRef>
+          <a:fillRef idx="3">
+            <a:schemeClr val="accent1"/>
+          </a:fillRef>
+          <a:effectRef idx="2">
+            <a:schemeClr val="accent1"/>
+          </a:effectRef>
+          <a:fontRef idx="minor">
+            <a:schemeClr val="lt1"/>
+          </a:fontRef>
+        </p:style>
+        <p:txBody>
+          <a:bodyPr rtlCol="0" anchor="ctr"/>
+          <a:lstStyle/>
+          <a:p/>
+        </p:txBody>
+      </p:sp>
       <p:sp>
         <p:nvSpPr>
           <p:cNvPr id="15" name="TextBox 14"/>
@@ -38793,636 +40003,762 @@
           </a:p>
         </p:txBody>
       </p:sp>
-      <p:cxnSp>
-        <p:nvCxnSpPr>
-          <p:cNvPr id="16" name="Connector 15"/>
-          <p:cNvCxnSpPr/>
-          <p:nvPr/>
-        </p:nvCxnSpPr>
-        <p:spPr>
-          <a:xfrm>
-            <a:off x="1866900" y="5524500"/>
-            <a:ext cx="1587500" cy="0"/>
-          </a:xfrm>
-          <a:prstGeom prst="line">
-            <a:avLst/>
-          </a:prstGeom>
-          <a:ln w="38100" cap="rnd">
-            <a:solidFill>
-              <a:srgbClr val="F0E8E8"/>
-            </a:solidFill>
-          </a:ln>
-        </p:spPr>
-        <p:style>
-          <a:lnRef idx="2">
-            <a:schemeClr val="accent1"/>
-          </a:lnRef>
-          <a:fillRef idx="0">
-            <a:schemeClr val="accent1"/>
-          </a:fillRef>
-          <a:effectRef idx="1">
-            <a:schemeClr val="accent1"/>
-          </a:effectRef>
-          <a:fontRef idx="minor">
-            <a:schemeClr val="tx1"/>
-          </a:fontRef>
-        </p:style>
-      </p:cxnSp>
-      <p:cxnSp>
-        <p:nvCxnSpPr>
-          <p:cNvPr id="17" name="Connector 16"/>
-          <p:cNvCxnSpPr/>
-          <p:nvPr/>
-        </p:nvCxnSpPr>
-        <p:spPr>
-          <a:xfrm flipV="1">
-            <a:off x="3454400" y="4333875"/>
-            <a:ext cx="0" cy="1190625"/>
-          </a:xfrm>
-          <a:prstGeom prst="line">
-            <a:avLst/>
-          </a:prstGeom>
-          <a:ln w="38100" cap="rnd">
-            <a:solidFill>
-              <a:srgbClr val="F0E8E8"/>
-            </a:solidFill>
-          </a:ln>
-        </p:spPr>
-        <p:style>
-          <a:lnRef idx="2">
-            <a:schemeClr val="accent1"/>
-          </a:lnRef>
-          <a:fillRef idx="0">
-            <a:schemeClr val="accent1"/>
-          </a:fillRef>
-          <a:effectRef idx="1">
-            <a:schemeClr val="accent1"/>
-          </a:effectRef>
-          <a:fontRef idx="minor">
-            <a:schemeClr val="tx1"/>
-          </a:fontRef>
-        </p:style>
-      </p:cxnSp>
-      <p:cxnSp>
-        <p:nvCxnSpPr>
-          <p:cNvPr id="18" name="Connector 17"/>
-          <p:cNvCxnSpPr/>
-          <p:nvPr/>
-        </p:nvCxnSpPr>
-        <p:spPr>
-          <a:xfrm>
-            <a:off x="3454400" y="4333875"/>
-            <a:ext cx="2381250" cy="0"/>
-          </a:xfrm>
-          <a:prstGeom prst="line">
-            <a:avLst/>
-          </a:prstGeom>
-          <a:ln w="38100" cap="rnd">
-            <a:solidFill>
-              <a:srgbClr val="F0E8E8"/>
-            </a:solidFill>
-          </a:ln>
-        </p:spPr>
-        <p:style>
-          <a:lnRef idx="2">
-            <a:schemeClr val="accent1"/>
-          </a:lnRef>
-          <a:fillRef idx="0">
-            <a:schemeClr val="accent1"/>
-          </a:fillRef>
-          <a:effectRef idx="1">
-            <a:schemeClr val="accent1"/>
-          </a:effectRef>
-          <a:fontRef idx="minor">
-            <a:schemeClr val="tx1"/>
-          </a:fontRef>
-        </p:style>
-      </p:cxnSp>
-      <p:cxnSp>
-        <p:nvCxnSpPr>
-          <p:cNvPr id="19" name="Connector 18"/>
-          <p:cNvCxnSpPr/>
-          <p:nvPr/>
-        </p:nvCxnSpPr>
-        <p:spPr>
-          <a:xfrm>
-            <a:off x="5835650" y="4333875"/>
-            <a:ext cx="0" cy="2381250"/>
-          </a:xfrm>
-          <a:prstGeom prst="line">
-            <a:avLst/>
-          </a:prstGeom>
-          <a:ln w="38100" cap="rnd">
-            <a:solidFill>
-              <a:srgbClr val="F0E8E8"/>
-            </a:solidFill>
-          </a:ln>
-        </p:spPr>
-        <p:style>
-          <a:lnRef idx="2">
-            <a:schemeClr val="accent1"/>
-          </a:lnRef>
-          <a:fillRef idx="0">
-            <a:schemeClr val="accent1"/>
-          </a:fillRef>
-          <a:effectRef idx="1">
-            <a:schemeClr val="accent1"/>
-          </a:effectRef>
-          <a:fontRef idx="minor">
-            <a:schemeClr val="tx1"/>
-          </a:fontRef>
-        </p:style>
-      </p:cxnSp>
-      <p:cxnSp>
-        <p:nvCxnSpPr>
-          <p:cNvPr id="20" name="Connector 19"/>
-          <p:cNvCxnSpPr/>
-          <p:nvPr/>
-        </p:nvCxnSpPr>
-        <p:spPr>
-          <a:xfrm>
-            <a:off x="5835650" y="6715125"/>
-            <a:ext cx="2381250" cy="0"/>
-          </a:xfrm>
-          <a:prstGeom prst="line">
-            <a:avLst/>
-          </a:prstGeom>
-          <a:ln w="38100" cap="rnd">
-            <a:solidFill>
-              <a:srgbClr val="F0E8E8"/>
-            </a:solidFill>
-          </a:ln>
-        </p:spPr>
-        <p:style>
-          <a:lnRef idx="2">
-            <a:schemeClr val="accent1"/>
-          </a:lnRef>
-          <a:fillRef idx="0">
-            <a:schemeClr val="accent1"/>
-          </a:fillRef>
-          <a:effectRef idx="1">
-            <a:schemeClr val="accent1"/>
-          </a:effectRef>
-          <a:fontRef idx="minor">
-            <a:schemeClr val="tx1"/>
-          </a:fontRef>
-        </p:style>
-      </p:cxnSp>
-      <p:cxnSp>
-        <p:nvCxnSpPr>
-          <p:cNvPr id="21" name="Connector 20"/>
-          <p:cNvCxnSpPr/>
-          <p:nvPr/>
-        </p:nvCxnSpPr>
-        <p:spPr>
-          <a:xfrm flipV="1">
-            <a:off x="8216900" y="4810125"/>
-            <a:ext cx="0" cy="1905000"/>
-          </a:xfrm>
-          <a:prstGeom prst="line">
-            <a:avLst/>
-          </a:prstGeom>
-          <a:ln w="38100" cap="rnd">
-            <a:solidFill>
-              <a:srgbClr val="F0E8E8"/>
-            </a:solidFill>
-          </a:ln>
-        </p:spPr>
-        <p:style>
-          <a:lnRef idx="2">
-            <a:schemeClr val="accent1"/>
-          </a:lnRef>
-          <a:fillRef idx="0">
-            <a:schemeClr val="accent1"/>
-          </a:fillRef>
-          <a:effectRef idx="1">
-            <a:schemeClr val="accent1"/>
-          </a:effectRef>
-          <a:fontRef idx="minor">
-            <a:schemeClr val="tx1"/>
-          </a:fontRef>
-        </p:style>
-      </p:cxnSp>
-      <p:cxnSp>
-        <p:nvCxnSpPr>
-          <p:cNvPr id="22" name="Connector 21"/>
-          <p:cNvCxnSpPr/>
-          <p:nvPr/>
-        </p:nvCxnSpPr>
-        <p:spPr>
-          <a:xfrm>
-            <a:off x="8216900" y="4810125"/>
-            <a:ext cx="2381250" cy="0"/>
-          </a:xfrm>
-          <a:prstGeom prst="line">
-            <a:avLst/>
-          </a:prstGeom>
-          <a:ln w="38100" cap="rnd">
-            <a:solidFill>
-              <a:srgbClr val="F0E8E8"/>
-            </a:solidFill>
-          </a:ln>
-        </p:spPr>
-        <p:style>
-          <a:lnRef idx="2">
-            <a:schemeClr val="accent1"/>
-          </a:lnRef>
-          <a:fillRef idx="0">
-            <a:schemeClr val="accent1"/>
-          </a:fillRef>
-          <a:effectRef idx="1">
-            <a:schemeClr val="accent1"/>
-          </a:effectRef>
-          <a:fontRef idx="minor">
-            <a:schemeClr val="tx1"/>
-          </a:fontRef>
-        </p:style>
-      </p:cxnSp>
-      <p:cxnSp>
-        <p:nvCxnSpPr>
-          <p:cNvPr id="23" name="Connector 22"/>
-          <p:cNvCxnSpPr/>
-          <p:nvPr/>
-        </p:nvCxnSpPr>
-        <p:spPr>
-          <a:xfrm>
-            <a:off x="10598150" y="4810125"/>
-            <a:ext cx="0" cy="714375"/>
-          </a:xfrm>
-          <a:prstGeom prst="line">
-            <a:avLst/>
-          </a:prstGeom>
-          <a:ln w="38100" cap="rnd">
-            <a:solidFill>
-              <a:srgbClr val="F0E8E8"/>
-            </a:solidFill>
-          </a:ln>
-        </p:spPr>
-        <p:style>
-          <a:lnRef idx="2">
-            <a:schemeClr val="accent1"/>
-          </a:lnRef>
-          <a:fillRef idx="0">
-            <a:schemeClr val="accent1"/>
-          </a:fillRef>
-          <a:effectRef idx="1">
-            <a:schemeClr val="accent1"/>
-          </a:effectRef>
-          <a:fontRef idx="minor">
-            <a:schemeClr val="tx1"/>
-          </a:fontRef>
-        </p:style>
-      </p:cxnSp>
-      <p:cxnSp>
-        <p:nvCxnSpPr>
-          <p:cNvPr id="24" name="Connector 23"/>
-          <p:cNvCxnSpPr/>
-          <p:nvPr/>
-        </p:nvCxnSpPr>
-        <p:spPr>
-          <a:xfrm>
-            <a:off x="10598150" y="5524500"/>
-            <a:ext cx="793750" cy="0"/>
-          </a:xfrm>
-          <a:prstGeom prst="line">
-            <a:avLst/>
-          </a:prstGeom>
-          <a:ln w="38100" cap="rnd">
-            <a:solidFill>
-              <a:srgbClr val="F0E8E8"/>
-            </a:solidFill>
-          </a:ln>
-        </p:spPr>
-        <p:style>
-          <a:lnRef idx="2">
-            <a:schemeClr val="accent1"/>
-          </a:lnRef>
-          <a:fillRef idx="0">
-            <a:schemeClr val="accent1"/>
-          </a:fillRef>
-          <a:effectRef idx="1">
-            <a:schemeClr val="accent1"/>
-          </a:effectRef>
-          <a:fontRef idx="minor">
-            <a:schemeClr val="tx1"/>
-          </a:fontRef>
-        </p:style>
-      </p:cxnSp>
-      <p:cxnSp>
-        <p:nvCxnSpPr>
-          <p:cNvPr id="25" name="Connector 24"/>
-          <p:cNvCxnSpPr/>
-          <p:nvPr/>
-        </p:nvCxnSpPr>
-        <p:spPr>
-          <a:xfrm>
-            <a:off x="1866900" y="5524500"/>
-            <a:ext cx="1587500" cy="0"/>
-          </a:xfrm>
-          <a:prstGeom prst="line">
-            <a:avLst/>
-          </a:prstGeom>
-          <a:ln w="76200" cap="rnd">
-            <a:solidFill>
-              <a:srgbClr val="CC2200"/>
-            </a:solidFill>
-          </a:ln>
-        </p:spPr>
-        <p:style>
-          <a:lnRef idx="2">
-            <a:schemeClr val="accent1"/>
-          </a:lnRef>
-          <a:fillRef idx="0">
-            <a:schemeClr val="accent1"/>
-          </a:fillRef>
-          <a:effectRef idx="1">
-            <a:schemeClr val="accent1"/>
-          </a:effectRef>
-          <a:fontRef idx="minor">
-            <a:schemeClr val="tx1"/>
-          </a:fontRef>
-        </p:style>
-      </p:cxnSp>
-      <p:cxnSp>
-        <p:nvCxnSpPr>
-          <p:cNvPr id="26" name="Connector 25"/>
-          <p:cNvCxnSpPr/>
-          <p:nvPr/>
-        </p:nvCxnSpPr>
-        <p:spPr>
-          <a:xfrm flipV="1">
-            <a:off x="3454400" y="4333875"/>
-            <a:ext cx="0" cy="1190625"/>
-          </a:xfrm>
-          <a:prstGeom prst="line">
-            <a:avLst/>
-          </a:prstGeom>
-          <a:ln w="76200" cap="rnd">
-            <a:solidFill>
-              <a:srgbClr val="CC2200"/>
-            </a:solidFill>
-          </a:ln>
-        </p:spPr>
-        <p:style>
-          <a:lnRef idx="2">
-            <a:schemeClr val="accent1"/>
-          </a:lnRef>
-          <a:fillRef idx="0">
-            <a:schemeClr val="accent1"/>
-          </a:fillRef>
-          <a:effectRef idx="1">
-            <a:schemeClr val="accent1"/>
-          </a:effectRef>
-          <a:fontRef idx="minor">
-            <a:schemeClr val="tx1"/>
-          </a:fontRef>
-        </p:style>
-      </p:cxnSp>
-      <p:cxnSp>
-        <p:nvCxnSpPr>
-          <p:cNvPr id="27" name="Connector 26"/>
-          <p:cNvCxnSpPr/>
-          <p:nvPr/>
-        </p:nvCxnSpPr>
-        <p:spPr>
-          <a:xfrm>
-            <a:off x="3454400" y="4333875"/>
-            <a:ext cx="2381250" cy="0"/>
-          </a:xfrm>
-          <a:prstGeom prst="line">
-            <a:avLst/>
-          </a:prstGeom>
-          <a:ln w="76200" cap="rnd">
-            <a:solidFill>
-              <a:srgbClr val="CC2200"/>
-            </a:solidFill>
-          </a:ln>
-        </p:spPr>
-        <p:style>
-          <a:lnRef idx="2">
-            <a:schemeClr val="accent1"/>
-          </a:lnRef>
-          <a:fillRef idx="0">
-            <a:schemeClr val="accent1"/>
-          </a:fillRef>
-          <a:effectRef idx="1">
-            <a:schemeClr val="accent1"/>
-          </a:effectRef>
-          <a:fontRef idx="minor">
-            <a:schemeClr val="tx1"/>
-          </a:fontRef>
-        </p:style>
-      </p:cxnSp>
-      <p:cxnSp>
-        <p:nvCxnSpPr>
-          <p:cNvPr id="28" name="Connector 27"/>
-          <p:cNvCxnSpPr/>
-          <p:nvPr/>
-        </p:nvCxnSpPr>
-        <p:spPr>
-          <a:xfrm>
-            <a:off x="5835650" y="4333875"/>
-            <a:ext cx="0" cy="0"/>
-          </a:xfrm>
-          <a:prstGeom prst="line">
-            <a:avLst/>
-          </a:prstGeom>
-          <a:ln w="76200" cap="rnd">
-            <a:solidFill>
-              <a:srgbClr val="CC2200"/>
-            </a:solidFill>
-          </a:ln>
-        </p:spPr>
-        <p:style>
-          <a:lnRef idx="2">
-            <a:schemeClr val="accent1"/>
-          </a:lnRef>
-          <a:fillRef idx="0">
-            <a:schemeClr val="accent1"/>
-          </a:fillRef>
-          <a:effectRef idx="1">
-            <a:schemeClr val="accent1"/>
-          </a:effectRef>
-          <a:fontRef idx="minor">
-            <a:schemeClr val="tx1"/>
-          </a:fontRef>
-        </p:style>
-      </p:cxnSp>
-      <p:cxnSp>
-        <p:nvCxnSpPr>
-          <p:cNvPr id="29" name="Connector 28"/>
-          <p:cNvCxnSpPr/>
-          <p:nvPr/>
-        </p:nvCxnSpPr>
-        <p:spPr>
-          <a:xfrm>
-            <a:off x="5835650" y="4333875"/>
-            <a:ext cx="2381250" cy="0"/>
-          </a:xfrm>
-          <a:prstGeom prst="line">
-            <a:avLst/>
-          </a:prstGeom>
-          <a:ln w="76200" cap="rnd">
-            <a:solidFill>
-              <a:srgbClr val="CC2200"/>
-            </a:solidFill>
-          </a:ln>
-        </p:spPr>
-        <p:style>
-          <a:lnRef idx="2">
-            <a:schemeClr val="accent1"/>
-          </a:lnRef>
-          <a:fillRef idx="0">
-            <a:schemeClr val="accent1"/>
-          </a:fillRef>
-          <a:effectRef idx="1">
-            <a:schemeClr val="accent1"/>
-          </a:effectRef>
-          <a:fontRef idx="minor">
-            <a:schemeClr val="tx1"/>
-          </a:fontRef>
-        </p:style>
-      </p:cxnSp>
-      <p:cxnSp>
-        <p:nvCxnSpPr>
-          <p:cNvPr id="30" name="Connector 29"/>
-          <p:cNvCxnSpPr/>
-          <p:nvPr/>
-        </p:nvCxnSpPr>
-        <p:spPr>
-          <a:xfrm flipV="1">
-            <a:off x="8216900" y="4095750"/>
-            <a:ext cx="0" cy="238125"/>
-          </a:xfrm>
-          <a:prstGeom prst="line">
-            <a:avLst/>
-          </a:prstGeom>
-          <a:ln w="76200" cap="rnd">
-            <a:solidFill>
-              <a:srgbClr val="CC2200"/>
-            </a:solidFill>
-          </a:ln>
-        </p:spPr>
-        <p:style>
-          <a:lnRef idx="2">
-            <a:schemeClr val="accent1"/>
-          </a:lnRef>
-          <a:fillRef idx="0">
-            <a:schemeClr val="accent1"/>
-          </a:fillRef>
-          <a:effectRef idx="1">
-            <a:schemeClr val="accent1"/>
-          </a:effectRef>
-          <a:fontRef idx="minor">
-            <a:schemeClr val="tx1"/>
-          </a:fontRef>
-        </p:style>
-      </p:cxnSp>
-      <p:cxnSp>
-        <p:nvCxnSpPr>
-          <p:cNvPr id="31" name="Connector 30"/>
-          <p:cNvCxnSpPr/>
-          <p:nvPr/>
-        </p:nvCxnSpPr>
-        <p:spPr>
-          <a:xfrm>
-            <a:off x="8216900" y="4095750"/>
-            <a:ext cx="2381250" cy="0"/>
-          </a:xfrm>
-          <a:prstGeom prst="line">
-            <a:avLst/>
-          </a:prstGeom>
-          <a:ln w="76200" cap="rnd">
-            <a:solidFill>
-              <a:srgbClr val="CC2200"/>
-            </a:solidFill>
-          </a:ln>
-        </p:spPr>
-        <p:style>
-          <a:lnRef idx="2">
-            <a:schemeClr val="accent1"/>
-          </a:lnRef>
-          <a:fillRef idx="0">
-            <a:schemeClr val="accent1"/>
-          </a:fillRef>
-          <a:effectRef idx="1">
-            <a:schemeClr val="accent1"/>
-          </a:effectRef>
-          <a:fontRef idx="minor">
-            <a:schemeClr val="tx1"/>
-          </a:fontRef>
-        </p:style>
-      </p:cxnSp>
-      <p:cxnSp>
-        <p:nvCxnSpPr>
-          <p:cNvPr id="32" name="Connector 31"/>
-          <p:cNvCxnSpPr/>
-          <p:nvPr/>
-        </p:nvCxnSpPr>
-        <p:spPr>
-          <a:xfrm>
-            <a:off x="10598150" y="4095750"/>
-            <a:ext cx="0" cy="1428750"/>
-          </a:xfrm>
-          <a:prstGeom prst="line">
-            <a:avLst/>
-          </a:prstGeom>
-          <a:ln w="76200" cap="rnd">
-            <a:solidFill>
-              <a:srgbClr val="CC2200"/>
-            </a:solidFill>
-          </a:ln>
-        </p:spPr>
-        <p:style>
-          <a:lnRef idx="2">
-            <a:schemeClr val="accent1"/>
-          </a:lnRef>
-          <a:fillRef idx="0">
-            <a:schemeClr val="accent1"/>
-          </a:fillRef>
-          <a:effectRef idx="1">
-            <a:schemeClr val="accent1"/>
-          </a:effectRef>
-          <a:fontRef idx="minor">
-            <a:schemeClr val="tx1"/>
-          </a:fontRef>
-        </p:style>
-      </p:cxnSp>
-      <p:cxnSp>
-        <p:nvCxnSpPr>
-          <p:cNvPr id="33" name="Connector 32"/>
-          <p:cNvCxnSpPr/>
-          <p:nvPr/>
-        </p:nvCxnSpPr>
-        <p:spPr>
-          <a:xfrm>
-            <a:off x="10598150" y="5524500"/>
-            <a:ext cx="793750" cy="0"/>
-          </a:xfrm>
-          <a:prstGeom prst="line">
-            <a:avLst/>
-          </a:prstGeom>
-          <a:ln w="76200" cap="rnd">
-            <a:solidFill>
-              <a:srgbClr val="CC2200"/>
-            </a:solidFill>
-          </a:ln>
-        </p:spPr>
-        <p:style>
-          <a:lnRef idx="2">
-            <a:schemeClr val="accent1"/>
-          </a:lnRef>
-          <a:fillRef idx="0">
-            <a:schemeClr val="accent1"/>
-          </a:fillRef>
-          <a:effectRef idx="1">
-            <a:schemeClr val="accent1"/>
-          </a:effectRef>
-          <a:fontRef idx="minor">
-            <a:schemeClr val="tx1"/>
-          </a:fontRef>
-        </p:style>
-      </p:cxnSp>
+      <p:sp>
+        <p:nvSpPr>
+          <p:cNvPr id="16" name="Rectangle 15"/>
+          <p:cNvSpPr/>
+          <p:nvPr/>
+        </p:nvSpPr>
+        <p:spPr>
+          <a:xfrm>
+            <a:off x="1847850" y="5505450"/>
+            <a:ext cx="1625600" cy="38100"/>
+          </a:xfrm>
+          <a:prstGeom prst="rect">
+            <a:avLst/>
+          </a:prstGeom>
+          <a:solidFill>
+            <a:srgbClr val="F0E8E8"/>
+          </a:solidFill>
+          <a:ln cap="rnd">
+            <a:noFill/>
+          </a:ln>
+          <a:effectLst/>
+        </p:spPr>
+        <p:style>
+          <a:lnRef idx="1">
+            <a:schemeClr val="accent1"/>
+          </a:lnRef>
+          <a:fillRef idx="3">
+            <a:schemeClr val="accent1"/>
+          </a:fillRef>
+          <a:effectRef idx="2">
+            <a:schemeClr val="accent1"/>
+          </a:effectRef>
+          <a:fontRef idx="minor">
+            <a:schemeClr val="lt1"/>
+          </a:fontRef>
+        </p:style>
+        <p:txBody>
+          <a:bodyPr rtlCol="0" anchor="ctr"/>
+          <a:lstStyle/>
+          <a:p/>
+        </p:txBody>
+      </p:sp>
+      <p:sp>
+        <p:nvSpPr>
+          <p:cNvPr id="17" name="Rectangle 16"/>
+          <p:cNvSpPr/>
+          <p:nvPr/>
+        </p:nvSpPr>
+        <p:spPr>
+          <a:xfrm>
+            <a:off x="3435350" y="4314825"/>
+            <a:ext cx="38100" cy="1228725"/>
+          </a:xfrm>
+          <a:prstGeom prst="rect">
+            <a:avLst/>
+          </a:prstGeom>
+          <a:solidFill>
+            <a:srgbClr val="F0E8E8"/>
+          </a:solidFill>
+          <a:ln cap="rnd">
+            <a:noFill/>
+          </a:ln>
+          <a:effectLst/>
+        </p:spPr>
+        <p:style>
+          <a:lnRef idx="1">
+            <a:schemeClr val="accent1"/>
+          </a:lnRef>
+          <a:fillRef idx="3">
+            <a:schemeClr val="accent1"/>
+          </a:fillRef>
+          <a:effectRef idx="2">
+            <a:schemeClr val="accent1"/>
+          </a:effectRef>
+          <a:fontRef idx="minor">
+            <a:schemeClr val="lt1"/>
+          </a:fontRef>
+        </p:style>
+        <p:txBody>
+          <a:bodyPr rtlCol="0" anchor="ctr"/>
+          <a:lstStyle/>
+          <a:p/>
+        </p:txBody>
+      </p:sp>
+      <p:sp>
+        <p:nvSpPr>
+          <p:cNvPr id="18" name="Rectangle 17"/>
+          <p:cNvSpPr/>
+          <p:nvPr/>
+        </p:nvSpPr>
+        <p:spPr>
+          <a:xfrm>
+            <a:off x="3435350" y="4314825"/>
+            <a:ext cx="2419350" cy="38100"/>
+          </a:xfrm>
+          <a:prstGeom prst="rect">
+            <a:avLst/>
+          </a:prstGeom>
+          <a:solidFill>
+            <a:srgbClr val="F0E8E8"/>
+          </a:solidFill>
+          <a:ln cap="rnd">
+            <a:noFill/>
+          </a:ln>
+          <a:effectLst/>
+        </p:spPr>
+        <p:style>
+          <a:lnRef idx="1">
+            <a:schemeClr val="accent1"/>
+          </a:lnRef>
+          <a:fillRef idx="3">
+            <a:schemeClr val="accent1"/>
+          </a:fillRef>
+          <a:effectRef idx="2">
+            <a:schemeClr val="accent1"/>
+          </a:effectRef>
+          <a:fontRef idx="minor">
+            <a:schemeClr val="lt1"/>
+          </a:fontRef>
+        </p:style>
+        <p:txBody>
+          <a:bodyPr rtlCol="0" anchor="ctr"/>
+          <a:lstStyle/>
+          <a:p/>
+        </p:txBody>
+      </p:sp>
+      <p:sp>
+        <p:nvSpPr>
+          <p:cNvPr id="19" name="Rectangle 18"/>
+          <p:cNvSpPr/>
+          <p:nvPr/>
+        </p:nvSpPr>
+        <p:spPr>
+          <a:xfrm>
+            <a:off x="5816600" y="4314825"/>
+            <a:ext cx="38100" cy="2419350"/>
+          </a:xfrm>
+          <a:prstGeom prst="rect">
+            <a:avLst/>
+          </a:prstGeom>
+          <a:solidFill>
+            <a:srgbClr val="F0E8E8"/>
+          </a:solidFill>
+          <a:ln cap="rnd">
+            <a:noFill/>
+          </a:ln>
+          <a:effectLst/>
+        </p:spPr>
+        <p:style>
+          <a:lnRef idx="1">
+            <a:schemeClr val="accent1"/>
+          </a:lnRef>
+          <a:fillRef idx="3">
+            <a:schemeClr val="accent1"/>
+          </a:fillRef>
+          <a:effectRef idx="2">
+            <a:schemeClr val="accent1"/>
+          </a:effectRef>
+          <a:fontRef idx="minor">
+            <a:schemeClr val="lt1"/>
+          </a:fontRef>
+        </p:style>
+        <p:txBody>
+          <a:bodyPr rtlCol="0" anchor="ctr"/>
+          <a:lstStyle/>
+          <a:p/>
+        </p:txBody>
+      </p:sp>
+      <p:sp>
+        <p:nvSpPr>
+          <p:cNvPr id="20" name="Rectangle 19"/>
+          <p:cNvSpPr/>
+          <p:nvPr/>
+        </p:nvSpPr>
+        <p:spPr>
+          <a:xfrm>
+            <a:off x="5816600" y="6696075"/>
+            <a:ext cx="2419350" cy="38100"/>
+          </a:xfrm>
+          <a:prstGeom prst="rect">
+            <a:avLst/>
+          </a:prstGeom>
+          <a:solidFill>
+            <a:srgbClr val="F0E8E8"/>
+          </a:solidFill>
+          <a:ln cap="rnd">
+            <a:noFill/>
+          </a:ln>
+          <a:effectLst/>
+        </p:spPr>
+        <p:style>
+          <a:lnRef idx="1">
+            <a:schemeClr val="accent1"/>
+          </a:lnRef>
+          <a:fillRef idx="3">
+            <a:schemeClr val="accent1"/>
+          </a:fillRef>
+          <a:effectRef idx="2">
+            <a:schemeClr val="accent1"/>
+          </a:effectRef>
+          <a:fontRef idx="minor">
+            <a:schemeClr val="lt1"/>
+          </a:fontRef>
+        </p:style>
+        <p:txBody>
+          <a:bodyPr rtlCol="0" anchor="ctr"/>
+          <a:lstStyle/>
+          <a:p/>
+        </p:txBody>
+      </p:sp>
+      <p:sp>
+        <p:nvSpPr>
+          <p:cNvPr id="21" name="Rectangle 20"/>
+          <p:cNvSpPr/>
+          <p:nvPr/>
+        </p:nvSpPr>
+        <p:spPr>
+          <a:xfrm>
+            <a:off x="8197850" y="4791075"/>
+            <a:ext cx="38100" cy="1943100"/>
+          </a:xfrm>
+          <a:prstGeom prst="rect">
+            <a:avLst/>
+          </a:prstGeom>
+          <a:solidFill>
+            <a:srgbClr val="F0E8E8"/>
+          </a:solidFill>
+          <a:ln cap="rnd">
+            <a:noFill/>
+          </a:ln>
+          <a:effectLst/>
+        </p:spPr>
+        <p:style>
+          <a:lnRef idx="1">
+            <a:schemeClr val="accent1"/>
+          </a:lnRef>
+          <a:fillRef idx="3">
+            <a:schemeClr val="accent1"/>
+          </a:fillRef>
+          <a:effectRef idx="2">
+            <a:schemeClr val="accent1"/>
+          </a:effectRef>
+          <a:fontRef idx="minor">
+            <a:schemeClr val="lt1"/>
+          </a:fontRef>
+        </p:style>
+        <p:txBody>
+          <a:bodyPr rtlCol="0" anchor="ctr"/>
+          <a:lstStyle/>
+          <a:p/>
+        </p:txBody>
+      </p:sp>
+      <p:sp>
+        <p:nvSpPr>
+          <p:cNvPr id="22" name="Rectangle 21"/>
+          <p:cNvSpPr/>
+          <p:nvPr/>
+        </p:nvSpPr>
+        <p:spPr>
+          <a:xfrm>
+            <a:off x="8197850" y="4791075"/>
+            <a:ext cx="2419350" cy="38100"/>
+          </a:xfrm>
+          <a:prstGeom prst="rect">
+            <a:avLst/>
+          </a:prstGeom>
+          <a:solidFill>
+            <a:srgbClr val="F0E8E8"/>
+          </a:solidFill>
+          <a:ln cap="rnd">
+            <a:noFill/>
+          </a:ln>
+          <a:effectLst/>
+        </p:spPr>
+        <p:style>
+          <a:lnRef idx="1">
+            <a:schemeClr val="accent1"/>
+          </a:lnRef>
+          <a:fillRef idx="3">
+            <a:schemeClr val="accent1"/>
+          </a:fillRef>
+          <a:effectRef idx="2">
+            <a:schemeClr val="accent1"/>
+          </a:effectRef>
+          <a:fontRef idx="minor">
+            <a:schemeClr val="lt1"/>
+          </a:fontRef>
+        </p:style>
+        <p:txBody>
+          <a:bodyPr rtlCol="0" anchor="ctr"/>
+          <a:lstStyle/>
+          <a:p/>
+        </p:txBody>
+      </p:sp>
+      <p:sp>
+        <p:nvSpPr>
+          <p:cNvPr id="23" name="Rectangle 22"/>
+          <p:cNvSpPr/>
+          <p:nvPr/>
+        </p:nvSpPr>
+        <p:spPr>
+          <a:xfrm>
+            <a:off x="10579100" y="4791075"/>
+            <a:ext cx="38100" cy="752475"/>
+          </a:xfrm>
+          <a:prstGeom prst="rect">
+            <a:avLst/>
+          </a:prstGeom>
+          <a:solidFill>
+            <a:srgbClr val="F0E8E8"/>
+          </a:solidFill>
+          <a:ln cap="rnd">
+            <a:noFill/>
+          </a:ln>
+          <a:effectLst/>
+        </p:spPr>
+        <p:style>
+          <a:lnRef idx="1">
+            <a:schemeClr val="accent1"/>
+          </a:lnRef>
+          <a:fillRef idx="3">
+            <a:schemeClr val="accent1"/>
+          </a:fillRef>
+          <a:effectRef idx="2">
+            <a:schemeClr val="accent1"/>
+          </a:effectRef>
+          <a:fontRef idx="minor">
+            <a:schemeClr val="lt1"/>
+          </a:fontRef>
+        </p:style>
+        <p:txBody>
+          <a:bodyPr rtlCol="0" anchor="ctr"/>
+          <a:lstStyle/>
+          <a:p/>
+        </p:txBody>
+      </p:sp>
+      <p:sp>
+        <p:nvSpPr>
+          <p:cNvPr id="24" name="Rectangle 23"/>
+          <p:cNvSpPr/>
+          <p:nvPr/>
+        </p:nvSpPr>
+        <p:spPr>
+          <a:xfrm>
+            <a:off x="10579100" y="5505450"/>
+            <a:ext cx="831850" cy="38100"/>
+          </a:xfrm>
+          <a:prstGeom prst="rect">
+            <a:avLst/>
+          </a:prstGeom>
+          <a:solidFill>
+            <a:srgbClr val="F0E8E8"/>
+          </a:solidFill>
+          <a:ln cap="rnd">
+            <a:noFill/>
+          </a:ln>
+          <a:effectLst/>
+        </p:spPr>
+        <p:style>
+          <a:lnRef idx="1">
+            <a:schemeClr val="accent1"/>
+          </a:lnRef>
+          <a:fillRef idx="3">
+            <a:schemeClr val="accent1"/>
+          </a:fillRef>
+          <a:effectRef idx="2">
+            <a:schemeClr val="accent1"/>
+          </a:effectRef>
+          <a:fontRef idx="minor">
+            <a:schemeClr val="lt1"/>
+          </a:fontRef>
+        </p:style>
+        <p:txBody>
+          <a:bodyPr rtlCol="0" anchor="ctr"/>
+          <a:lstStyle/>
+          <a:p/>
+        </p:txBody>
+      </p:sp>
+      <p:sp>
+        <p:nvSpPr>
+          <p:cNvPr id="25" name="Rectangle 24"/>
+          <p:cNvSpPr/>
+          <p:nvPr/>
+        </p:nvSpPr>
+        <p:spPr>
+          <a:xfrm>
+            <a:off x="1828800" y="5486400"/>
+            <a:ext cx="1663700" cy="76200"/>
+          </a:xfrm>
+          <a:prstGeom prst="rect">
+            <a:avLst/>
+          </a:prstGeom>
+          <a:solidFill>
+            <a:srgbClr val="CC2200"/>
+          </a:solidFill>
+          <a:ln cap="rnd">
+            <a:noFill/>
+          </a:ln>
+          <a:effectLst/>
+        </p:spPr>
+        <p:style>
+          <a:lnRef idx="1">
+            <a:schemeClr val="accent1"/>
+          </a:lnRef>
+          <a:fillRef idx="3">
+            <a:schemeClr val="accent1"/>
+          </a:fillRef>
+          <a:effectRef idx="2">
+            <a:schemeClr val="accent1"/>
+          </a:effectRef>
+          <a:fontRef idx="minor">
+            <a:schemeClr val="lt1"/>
+          </a:fontRef>
+        </p:style>
+        <p:txBody>
+          <a:bodyPr rtlCol="0" anchor="ctr"/>
+          <a:lstStyle/>
+          <a:p/>
+        </p:txBody>
+      </p:sp>
+      <p:sp>
+        <p:nvSpPr>
+          <p:cNvPr id="26" name="Rectangle 25"/>
+          <p:cNvSpPr/>
+          <p:nvPr/>
+        </p:nvSpPr>
+        <p:spPr>
+          <a:xfrm>
+            <a:off x="3416300" y="4295775"/>
+            <a:ext cx="76200" cy="1266825"/>
+          </a:xfrm>
+          <a:prstGeom prst="rect">
+            <a:avLst/>
+          </a:prstGeom>
+          <a:solidFill>
+            <a:srgbClr val="CC2200"/>
+          </a:solidFill>
+          <a:ln cap="rnd">
+            <a:noFill/>
+          </a:ln>
+          <a:effectLst/>
+        </p:spPr>
+        <p:style>
+          <a:lnRef idx="1">
+            <a:schemeClr val="accent1"/>
+          </a:lnRef>
+          <a:fillRef idx="3">
+            <a:schemeClr val="accent1"/>
+          </a:fillRef>
+          <a:effectRef idx="2">
+            <a:schemeClr val="accent1"/>
+          </a:effectRef>
+          <a:fontRef idx="minor">
+            <a:schemeClr val="lt1"/>
+          </a:fontRef>
+        </p:style>
+        <p:txBody>
+          <a:bodyPr rtlCol="0" anchor="ctr"/>
+          <a:lstStyle/>
+          <a:p/>
+        </p:txBody>
+      </p:sp>
+      <p:sp>
+        <p:nvSpPr>
+          <p:cNvPr id="27" name="Rectangle 26"/>
+          <p:cNvSpPr/>
+          <p:nvPr/>
+        </p:nvSpPr>
+        <p:spPr>
+          <a:xfrm>
+            <a:off x="3416300" y="4295775"/>
+            <a:ext cx="2457450" cy="76200"/>
+          </a:xfrm>
+          <a:prstGeom prst="rect">
+            <a:avLst/>
+          </a:prstGeom>
+          <a:solidFill>
+            <a:srgbClr val="CC2200"/>
+          </a:solidFill>
+          <a:ln cap="rnd">
+            <a:noFill/>
+          </a:ln>
+          <a:effectLst/>
+        </p:spPr>
+        <p:style>
+          <a:lnRef idx="1">
+            <a:schemeClr val="accent1"/>
+          </a:lnRef>
+          <a:fillRef idx="3">
+            <a:schemeClr val="accent1"/>
+          </a:fillRef>
+          <a:effectRef idx="2">
+            <a:schemeClr val="accent1"/>
+          </a:effectRef>
+          <a:fontRef idx="minor">
+            <a:schemeClr val="lt1"/>
+          </a:fontRef>
+        </p:style>
+        <p:txBody>
+          <a:bodyPr rtlCol="0" anchor="ctr"/>
+          <a:lstStyle/>
+          <a:p/>
+        </p:txBody>
+      </p:sp>
+      <p:sp>
+        <p:nvSpPr>
+          <p:cNvPr id="28" name="Rectangle 27"/>
+          <p:cNvSpPr/>
+          <p:nvPr/>
+        </p:nvSpPr>
+        <p:spPr>
+          <a:xfrm>
+            <a:off x="5797550" y="4295775"/>
+            <a:ext cx="76200" cy="76200"/>
+          </a:xfrm>
+          <a:prstGeom prst="rect">
+            <a:avLst/>
+          </a:prstGeom>
+          <a:solidFill>
+            <a:srgbClr val="CC2200"/>
+          </a:solidFill>
+          <a:ln cap="rnd">
+            <a:noFill/>
+          </a:ln>
+          <a:effectLst/>
+        </p:spPr>
+        <p:style>
+          <a:lnRef idx="1">
+            <a:schemeClr val="accent1"/>
+          </a:lnRef>
+          <a:fillRef idx="3">
+            <a:schemeClr val="accent1"/>
+          </a:fillRef>
+          <a:effectRef idx="2">
+            <a:schemeClr val="accent1"/>
+          </a:effectRef>
+          <a:fontRef idx="minor">
+            <a:schemeClr val="lt1"/>
+          </a:fontRef>
+        </p:style>
+        <p:txBody>
+          <a:bodyPr rtlCol="0" anchor="ctr"/>
+          <a:lstStyle/>
+          <a:p/>
+        </p:txBody>
+      </p:sp>
+      <p:sp>
+        <p:nvSpPr>
+          <p:cNvPr id="29" name="Rectangle 28"/>
+          <p:cNvSpPr/>
+          <p:nvPr/>
+        </p:nvSpPr>
+        <p:spPr>
+          <a:xfrm>
+            <a:off x="5797550" y="4295775"/>
+            <a:ext cx="2457450" cy="76200"/>
+          </a:xfrm>
+          <a:prstGeom prst="rect">
+            <a:avLst/>
+          </a:prstGeom>
+          <a:solidFill>
+            <a:srgbClr val="CC2200"/>
+          </a:solidFill>
+          <a:ln cap="rnd">
+            <a:noFill/>
+          </a:ln>
+          <a:effectLst/>
+        </p:spPr>
+        <p:style>
+          <a:lnRef idx="1">
+            <a:schemeClr val="accent1"/>
+          </a:lnRef>
+          <a:fillRef idx="3">
+            <a:schemeClr val="accent1"/>
+          </a:fillRef>
+          <a:effectRef idx="2">
+            <a:schemeClr val="accent1"/>
+          </a:effectRef>
+          <a:fontRef idx="minor">
+            <a:schemeClr val="lt1"/>
+          </a:fontRef>
+        </p:style>
+        <p:txBody>
+          <a:bodyPr rtlCol="0" anchor="ctr"/>
+          <a:lstStyle/>
+          <a:p/>
+        </p:txBody>
+      </p:sp>
+      <p:sp>
+        <p:nvSpPr>
+          <p:cNvPr id="30" name="Rectangle 29"/>
+          <p:cNvSpPr/>
+          <p:nvPr/>
+        </p:nvSpPr>
+        <p:spPr>
+          <a:xfrm>
+            <a:off x="8178800" y="4057650"/>
+            <a:ext cx="76200" cy="314325"/>
+          </a:xfrm>
+          <a:prstGeom prst="rect">
+            <a:avLst/>
+          </a:prstGeom>
+          <a:solidFill>
+            <a:srgbClr val="CC2200"/>
+          </a:solidFill>
+          <a:ln cap="rnd">
+            <a:noFill/>
+          </a:ln>
+          <a:effectLst/>
+        </p:spPr>
+        <p:style>
+          <a:lnRef idx="1">
+            <a:schemeClr val="accent1"/>
+          </a:lnRef>
+          <a:fillRef idx="3">
+            <a:schemeClr val="accent1"/>
+          </a:fillRef>
+          <a:effectRef idx="2">
+            <a:schemeClr val="accent1"/>
+          </a:effectRef>
+          <a:fontRef idx="minor">
+            <a:schemeClr val="lt1"/>
+          </a:fontRef>
+        </p:style>
+        <p:txBody>
+          <a:bodyPr rtlCol="0" anchor="ctr"/>
+          <a:lstStyle/>
+          <a:p/>
+        </p:txBody>
+      </p:sp>
+      <p:sp>
+        <p:nvSpPr>
+          <p:cNvPr id="31" name="Rectangle 30"/>
+          <p:cNvSpPr/>
+          <p:nvPr/>
+        </p:nvSpPr>
+        <p:spPr>
+          <a:xfrm>
+            <a:off x="8178800" y="4057650"/>
+            <a:ext cx="2457450" cy="76200"/>
+          </a:xfrm>
+          <a:prstGeom prst="rect">
+            <a:avLst/>
+          </a:prstGeom>
+          <a:solidFill>
+            <a:srgbClr val="CC2200"/>
+          </a:solidFill>
+          <a:ln cap="rnd">
+            <a:noFill/>
+          </a:ln>
+          <a:effectLst/>
+        </p:spPr>
+        <p:style>
+          <a:lnRef idx="1">
+            <a:schemeClr val="accent1"/>
+          </a:lnRef>
+          <a:fillRef idx="3">
+            <a:schemeClr val="accent1"/>
+          </a:fillRef>
+          <a:effectRef idx="2">
+            <a:schemeClr val="accent1"/>
+          </a:effectRef>
+          <a:fontRef idx="minor">
+            <a:schemeClr val="lt1"/>
+          </a:fontRef>
+        </p:style>
+        <p:txBody>
+          <a:bodyPr rtlCol="0" anchor="ctr"/>
+          <a:lstStyle/>
+          <a:p/>
+        </p:txBody>
+      </p:sp>
+      <p:sp>
+        <p:nvSpPr>
+          <p:cNvPr id="32" name="Rectangle 31"/>
+          <p:cNvSpPr/>
+          <p:nvPr/>
+        </p:nvSpPr>
+        <p:spPr>
+          <a:xfrm>
+            <a:off x="10560050" y="4057650"/>
+            <a:ext cx="76200" cy="1504950"/>
+          </a:xfrm>
+          <a:prstGeom prst="rect">
+            <a:avLst/>
+          </a:prstGeom>
+          <a:solidFill>
+            <a:srgbClr val="CC2200"/>
+          </a:solidFill>
+          <a:ln cap="rnd">
+            <a:noFill/>
+          </a:ln>
+          <a:effectLst/>
+        </p:spPr>
+        <p:style>
+          <a:lnRef idx="1">
+            <a:schemeClr val="accent1"/>
+          </a:lnRef>
+          <a:fillRef idx="3">
+            <a:schemeClr val="accent1"/>
+          </a:fillRef>
+          <a:effectRef idx="2">
+            <a:schemeClr val="accent1"/>
+          </a:effectRef>
+          <a:fontRef idx="minor">
+            <a:schemeClr val="lt1"/>
+          </a:fontRef>
+        </p:style>
+        <p:txBody>
+          <a:bodyPr rtlCol="0" anchor="ctr"/>
+          <a:lstStyle/>
+          <a:p/>
+        </p:txBody>
+      </p:sp>
+      <p:sp>
+        <p:nvSpPr>
+          <p:cNvPr id="33" name="Rectangle 32"/>
+          <p:cNvSpPr/>
+          <p:nvPr/>
+        </p:nvSpPr>
+        <p:spPr>
+          <a:xfrm>
+            <a:off x="10560050" y="5486400"/>
+            <a:ext cx="869950" cy="76200"/>
+          </a:xfrm>
+          <a:prstGeom prst="rect">
+            <a:avLst/>
+          </a:prstGeom>
+          <a:solidFill>
+            <a:srgbClr val="CC2200"/>
+          </a:solidFill>
+          <a:ln cap="rnd">
+            <a:noFill/>
+          </a:ln>
+          <a:effectLst/>
+        </p:spPr>
+        <p:style>
+          <a:lnRef idx="1">
+            <a:schemeClr val="accent1"/>
+          </a:lnRef>
+          <a:fillRef idx="3">
+            <a:schemeClr val="accent1"/>
+          </a:fillRef>
+          <a:effectRef idx="2">
+            <a:schemeClr val="accent1"/>
+          </a:effectRef>
+          <a:fontRef idx="minor">
+            <a:schemeClr val="lt1"/>
+          </a:fontRef>
+        </p:style>
+        <p:txBody>
+          <a:bodyPr rtlCol="0" anchor="ctr"/>
+          <a:lstStyle/>
+          <a:p/>
+        </p:txBody>
+      </p:sp>
       <p:sp>
         <p:nvSpPr>
           <p:cNvPr id="34" name="TextBox 33"/>
@@ -39497,42 +40833,49 @@
           </a:p>
         </p:txBody>
       </p:sp>
-      <p:cxnSp>
-        <p:nvCxnSpPr>
-          <p:cNvPr id="36" name="Connector 35"/>
-          <p:cNvCxnSpPr/>
-          <p:nvPr/>
-        </p:nvCxnSpPr>
-        <p:spPr>
-          <a:xfrm>
-            <a:off x="5835650" y="3143250"/>
-            <a:ext cx="0" cy="4762500"/>
-          </a:xfrm>
-          <a:prstGeom prst="line">
-            <a:avLst/>
-          </a:prstGeom>
-          <a:ln w="19050">
-            <a:solidFill>
-              <a:srgbClr val="2A1A1A"/>
-            </a:solidFill>
+      <p:sp>
+        <p:nvSpPr>
+          <p:cNvPr id="36" name="Rectangle 35"/>
+          <p:cNvSpPr/>
+          <p:nvPr/>
+        </p:nvSpPr>
+        <p:spPr>
+          <a:xfrm>
+            <a:off x="5826125" y="3133725"/>
+            <a:ext cx="19050" cy="4781550"/>
+          </a:xfrm>
+          <a:prstGeom prst="rect">
+            <a:avLst/>
+          </a:prstGeom>
+          <a:solidFill>
+            <a:srgbClr val="2A1A1A"/>
+          </a:solidFill>
+          <a:ln>
+            <a:noFill/>
             <a:prstDash val="dash"/>
           </a:ln>
-        </p:spPr>
-        <p:style>
-          <a:lnRef idx="2">
-            <a:schemeClr val="accent1"/>
-          </a:lnRef>
-          <a:fillRef idx="0">
-            <a:schemeClr val="accent1"/>
-          </a:fillRef>
-          <a:effectRef idx="1">
-            <a:schemeClr val="accent1"/>
-          </a:effectRef>
-          <a:fontRef idx="minor">
-            <a:schemeClr val="tx1"/>
-          </a:fontRef>
-        </p:style>
-      </p:cxnSp>
+          <a:effectLst/>
+        </p:spPr>
+        <p:style>
+          <a:lnRef idx="1">
+            <a:schemeClr val="accent1"/>
+          </a:lnRef>
+          <a:fillRef idx="3">
+            <a:schemeClr val="accent1"/>
+          </a:fillRef>
+          <a:effectRef idx="2">
+            <a:schemeClr val="accent1"/>
+          </a:effectRef>
+          <a:fontRef idx="minor">
+            <a:schemeClr val="lt1"/>
+          </a:fontRef>
+        </p:style>
+        <p:txBody>
+          <a:bodyPr rtlCol="0" anchor="ctr"/>
+          <a:lstStyle/>
+          <a:p/>
+        </p:txBody>
+      </p:sp>
       <p:sp>
         <p:nvSpPr>
           <p:cNvPr id="37" name="TextBox 36"/>
@@ -39570,42 +40913,49 @@
           </a:p>
         </p:txBody>
       </p:sp>
-      <p:cxnSp>
-        <p:nvCxnSpPr>
-          <p:cNvPr id="38" name="Connector 37"/>
-          <p:cNvCxnSpPr/>
-          <p:nvPr/>
-        </p:nvCxnSpPr>
-        <p:spPr>
-          <a:xfrm>
-            <a:off x="8216900" y="3143250"/>
-            <a:ext cx="0" cy="4762500"/>
-          </a:xfrm>
-          <a:prstGeom prst="line">
-            <a:avLst/>
-          </a:prstGeom>
-          <a:ln w="19050">
-            <a:solidFill>
-              <a:srgbClr val="2A1A1A"/>
-            </a:solidFill>
+      <p:sp>
+        <p:nvSpPr>
+          <p:cNvPr id="38" name="Rectangle 37"/>
+          <p:cNvSpPr/>
+          <p:nvPr/>
+        </p:nvSpPr>
+        <p:spPr>
+          <a:xfrm>
+            <a:off x="8207375" y="3133725"/>
+            <a:ext cx="19050" cy="4781550"/>
+          </a:xfrm>
+          <a:prstGeom prst="rect">
+            <a:avLst/>
+          </a:prstGeom>
+          <a:solidFill>
+            <a:srgbClr val="2A1A1A"/>
+          </a:solidFill>
+          <a:ln>
+            <a:noFill/>
             <a:prstDash val="dash"/>
           </a:ln>
-        </p:spPr>
-        <p:style>
-          <a:lnRef idx="2">
-            <a:schemeClr val="accent1"/>
-          </a:lnRef>
-          <a:fillRef idx="0">
-            <a:schemeClr val="accent1"/>
-          </a:fillRef>
-          <a:effectRef idx="1">
-            <a:schemeClr val="accent1"/>
-          </a:effectRef>
-          <a:fontRef idx="minor">
-            <a:schemeClr val="tx1"/>
-          </a:fontRef>
-        </p:style>
-      </p:cxnSp>
+          <a:effectLst/>
+        </p:spPr>
+        <p:style>
+          <a:lnRef idx="1">
+            <a:schemeClr val="accent1"/>
+          </a:lnRef>
+          <a:fillRef idx="3">
+            <a:schemeClr val="accent1"/>
+          </a:fillRef>
+          <a:effectRef idx="2">
+            <a:schemeClr val="accent1"/>
+          </a:effectRef>
+          <a:fontRef idx="minor">
+            <a:schemeClr val="lt1"/>
+          </a:fontRef>
+        </p:style>
+        <p:txBody>
+          <a:bodyPr rtlCol="0" anchor="ctr"/>
+          <a:lstStyle/>
+          <a:p/>
+        </p:txBody>
+      </p:sp>
       <p:sp>
         <p:nvSpPr>
           <p:cNvPr id="39" name="Rectangle 38"/>
@@ -42751,45 +44101,95 @@
           </a:p>
         </p:txBody>
       </p:sp>
-      <p:cxnSp>
-        <p:nvCxnSpPr>
-          <p:cNvPr id="9" name="Connector 8"/>
-          <p:cNvCxnSpPr/>
-          <p:nvPr/>
-        </p:nvCxnSpPr>
-        <p:spPr>
-          <a:xfrm>
-            <a:off x="3238500" y="4572000"/>
-            <a:ext cx="438150" cy="0"/>
-          </a:xfrm>
-          <a:prstGeom prst="line">
-            <a:avLst/>
-          </a:prstGeom>
-          <a:ln w="28575">
-            <a:solidFill>
-              <a:srgbClr val="9A7878"/>
-            </a:solidFill>
-            <a:tailEnd type="triangle" w="med" len="med"/>
-          </a:ln>
-        </p:spPr>
-        <p:style>
-          <a:lnRef idx="2">
-            <a:schemeClr val="accent1"/>
-          </a:lnRef>
-          <a:fillRef idx="0">
-            <a:schemeClr val="accent1"/>
-          </a:fillRef>
-          <a:effectRef idx="1">
-            <a:schemeClr val="accent1"/>
-          </a:effectRef>
-          <a:fontRef idx="minor">
-            <a:schemeClr val="tx1"/>
-          </a:fontRef>
-        </p:style>
-      </p:cxnSp>
-      <p:sp>
-        <p:nvSpPr>
-          <p:cNvPr id="10" name="Rounded Rectangle 9"/>
+      <p:sp>
+        <p:nvSpPr>
+          <p:cNvPr id="9" name="Rectangle 8"/>
+          <p:cNvSpPr/>
+          <p:nvPr/>
+        </p:nvSpPr>
+        <p:spPr>
+          <a:xfrm>
+            <a:off x="3224212" y="4557712"/>
+            <a:ext cx="329565" cy="28575"/>
+          </a:xfrm>
+          <a:prstGeom prst="rect">
+            <a:avLst/>
+          </a:prstGeom>
+          <a:solidFill>
+            <a:srgbClr val="9A7878"/>
+          </a:solidFill>
+          <a:ln>
+            <a:noFill/>
+          </a:ln>
+          <a:effectLst/>
+        </p:spPr>
+        <p:style>
+          <a:lnRef idx="1">
+            <a:schemeClr val="accent1"/>
+          </a:lnRef>
+          <a:fillRef idx="3">
+            <a:schemeClr val="accent1"/>
+          </a:fillRef>
+          <a:effectRef idx="2">
+            <a:schemeClr val="accent1"/>
+          </a:effectRef>
+          <a:fontRef idx="minor">
+            <a:schemeClr val="lt1"/>
+          </a:fontRef>
+        </p:style>
+        <p:txBody>
+          <a:bodyPr rtlCol="0" anchor="ctr"/>
+          <a:lstStyle/>
+          <a:p/>
+        </p:txBody>
+      </p:sp>
+      <p:sp>
+        <p:nvSpPr>
+          <p:cNvPr id="10" name="Isosceles Triangle 9"/>
+          <p:cNvSpPr/>
+          <p:nvPr/>
+        </p:nvSpPr>
+        <p:spPr>
+          <a:xfrm rot="5400000">
+            <a:off x="3524250" y="4495800"/>
+            <a:ext cx="152400" cy="152400"/>
+          </a:xfrm>
+          <a:prstGeom prst="triangle">
+            <a:avLst/>
+          </a:prstGeom>
+          <a:solidFill>
+            <a:srgbClr val="E05540"/>
+          </a:solidFill>
+          <a:ln>
+            <a:noFill/>
+          </a:ln>
+          <a:effectLst/>
+        </p:spPr>
+        <p:style>
+          <a:lnRef idx="1">
+            <a:schemeClr val="accent1"/>
+          </a:lnRef>
+          <a:fillRef idx="3">
+            <a:schemeClr val="accent1"/>
+          </a:fillRef>
+          <a:effectRef idx="2">
+            <a:schemeClr val="accent1"/>
+          </a:effectRef>
+          <a:fontRef idx="minor">
+            <a:schemeClr val="lt1"/>
+          </a:fontRef>
+        </p:style>
+        <p:txBody>
+          <a:bodyPr rtlCol="0" anchor="ctr"/>
+          <a:lstStyle/>
+          <a:p>
+            <a:pPr algn="ctr"/>
+          </a:p>
+        </p:txBody>
+      </p:sp>
+      <p:sp>
+        <p:nvSpPr>
+          <p:cNvPr id="11" name="Rounded Rectangle 10"/>
           <p:cNvSpPr/>
           <p:nvPr/>
         </p:nvSpPr>
@@ -42835,7 +44235,7 @@
       </p:sp>
       <p:pic>
         <p:nvPicPr>
-          <p:cNvPr id="11" name="Picture 10" descr="display.png"/>
+          <p:cNvPr id="12" name="Picture 11" descr="display.png"/>
           <p:cNvPicPr>
             <a:picLocks noChangeAspect="1"/>
           </p:cNvPicPr>
@@ -42859,7 +44259,7 @@
       </p:pic>
       <p:sp>
         <p:nvSpPr>
-          <p:cNvPr id="12" name="TextBox 11"/>
+          <p:cNvPr id="13" name="TextBox 12"/>
           <p:cNvSpPr txBox="1"/>
           <p:nvPr/>
         </p:nvSpPr>
@@ -42900,7 +44300,7 @@
       </p:sp>
       <p:sp>
         <p:nvSpPr>
-          <p:cNvPr id="13" name="TextBox 12"/>
+          <p:cNvPr id="14" name="TextBox 13"/>
           <p:cNvSpPr txBox="1"/>
           <p:nvPr/>
         </p:nvSpPr>
@@ -42939,45 +44339,95 @@
           </a:p>
         </p:txBody>
       </p:sp>
-      <p:cxnSp>
-        <p:nvCxnSpPr>
-          <p:cNvPr id="14" name="Connector 13"/>
-          <p:cNvCxnSpPr/>
-          <p:nvPr/>
-        </p:nvCxnSpPr>
-        <p:spPr>
-          <a:xfrm>
-            <a:off x="6076950" y="4572000"/>
-            <a:ext cx="438150" cy="0"/>
-          </a:xfrm>
-          <a:prstGeom prst="line">
-            <a:avLst/>
-          </a:prstGeom>
-          <a:ln w="28575">
-            <a:solidFill>
-              <a:srgbClr val="9A7878"/>
-            </a:solidFill>
-            <a:tailEnd type="triangle" w="med" len="med"/>
-          </a:ln>
-        </p:spPr>
-        <p:style>
-          <a:lnRef idx="2">
-            <a:schemeClr val="accent1"/>
-          </a:lnRef>
-          <a:fillRef idx="0">
-            <a:schemeClr val="accent1"/>
-          </a:fillRef>
-          <a:effectRef idx="1">
-            <a:schemeClr val="accent1"/>
-          </a:effectRef>
-          <a:fontRef idx="minor">
-            <a:schemeClr val="tx1"/>
-          </a:fontRef>
-        </p:style>
-      </p:cxnSp>
-      <p:sp>
-        <p:nvSpPr>
-          <p:cNvPr id="15" name="Rounded Rectangle 14"/>
+      <p:sp>
+        <p:nvSpPr>
+          <p:cNvPr id="15" name="Rectangle 14"/>
+          <p:cNvSpPr/>
+          <p:nvPr/>
+        </p:nvSpPr>
+        <p:spPr>
+          <a:xfrm>
+            <a:off x="6062662" y="4557712"/>
+            <a:ext cx="329565" cy="28575"/>
+          </a:xfrm>
+          <a:prstGeom prst="rect">
+            <a:avLst/>
+          </a:prstGeom>
+          <a:solidFill>
+            <a:srgbClr val="9A7878"/>
+          </a:solidFill>
+          <a:ln>
+            <a:noFill/>
+          </a:ln>
+          <a:effectLst/>
+        </p:spPr>
+        <p:style>
+          <a:lnRef idx="1">
+            <a:schemeClr val="accent1"/>
+          </a:lnRef>
+          <a:fillRef idx="3">
+            <a:schemeClr val="accent1"/>
+          </a:fillRef>
+          <a:effectRef idx="2">
+            <a:schemeClr val="accent1"/>
+          </a:effectRef>
+          <a:fontRef idx="minor">
+            <a:schemeClr val="lt1"/>
+          </a:fontRef>
+        </p:style>
+        <p:txBody>
+          <a:bodyPr rtlCol="0" anchor="ctr"/>
+          <a:lstStyle/>
+          <a:p/>
+        </p:txBody>
+      </p:sp>
+      <p:sp>
+        <p:nvSpPr>
+          <p:cNvPr id="16" name="Isosceles Triangle 15"/>
+          <p:cNvSpPr/>
+          <p:nvPr/>
+        </p:nvSpPr>
+        <p:spPr>
+          <a:xfrm rot="5400000">
+            <a:off x="6362700" y="4495800"/>
+            <a:ext cx="152400" cy="152400"/>
+          </a:xfrm>
+          <a:prstGeom prst="triangle">
+            <a:avLst/>
+          </a:prstGeom>
+          <a:solidFill>
+            <a:srgbClr val="E05540"/>
+          </a:solidFill>
+          <a:ln>
+            <a:noFill/>
+          </a:ln>
+          <a:effectLst/>
+        </p:spPr>
+        <p:style>
+          <a:lnRef idx="1">
+            <a:schemeClr val="accent1"/>
+          </a:lnRef>
+          <a:fillRef idx="3">
+            <a:schemeClr val="accent1"/>
+          </a:fillRef>
+          <a:effectRef idx="2">
+            <a:schemeClr val="accent1"/>
+          </a:effectRef>
+          <a:fontRef idx="minor">
+            <a:schemeClr val="lt1"/>
+          </a:fontRef>
+        </p:style>
+        <p:txBody>
+          <a:bodyPr rtlCol="0" anchor="ctr"/>
+          <a:lstStyle/>
+          <a:p>
+            <a:pPr algn="ctr"/>
+          </a:p>
+        </p:txBody>
+      </p:sp>
+      <p:sp>
+        <p:nvSpPr>
+          <p:cNvPr id="17" name="Rounded Rectangle 16"/>
           <p:cNvSpPr/>
           <p:nvPr/>
         </p:nvSpPr>
@@ -43023,7 +44473,7 @@
       </p:sp>
       <p:pic>
         <p:nvPicPr>
-          <p:cNvPr id="16" name="Picture 15" descr="wifi.png"/>
+          <p:cNvPr id="18" name="Picture 17" descr="wifi.png"/>
           <p:cNvPicPr>
             <a:picLocks noChangeAspect="1"/>
           </p:cNvPicPr>
@@ -43047,7 +44497,7 @@
       </p:pic>
       <p:sp>
         <p:nvSpPr>
-          <p:cNvPr id="17" name="TextBox 16"/>
+          <p:cNvPr id="19" name="TextBox 18"/>
           <p:cNvSpPr txBox="1"/>
           <p:nvPr/>
         </p:nvSpPr>
@@ -43088,7 +44538,7 @@
       </p:sp>
       <p:sp>
         <p:nvSpPr>
-          <p:cNvPr id="18" name="TextBox 17"/>
+          <p:cNvPr id="20" name="TextBox 19"/>
           <p:cNvSpPr txBox="1"/>
           <p:nvPr/>
         </p:nvSpPr>
@@ -43127,45 +44577,95 @@
           </a:p>
         </p:txBody>
       </p:sp>
-      <p:cxnSp>
-        <p:nvCxnSpPr>
-          <p:cNvPr id="19" name="Connector 18"/>
-          <p:cNvCxnSpPr/>
-          <p:nvPr/>
-        </p:nvCxnSpPr>
-        <p:spPr>
-          <a:xfrm>
-            <a:off x="8915400" y="4572000"/>
-            <a:ext cx="438150" cy="0"/>
-          </a:xfrm>
-          <a:prstGeom prst="line">
-            <a:avLst/>
-          </a:prstGeom>
-          <a:ln w="28575">
-            <a:solidFill>
-              <a:srgbClr val="9A7878"/>
-            </a:solidFill>
-            <a:tailEnd type="triangle" w="med" len="med"/>
-          </a:ln>
-        </p:spPr>
-        <p:style>
-          <a:lnRef idx="2">
-            <a:schemeClr val="accent1"/>
-          </a:lnRef>
-          <a:fillRef idx="0">
-            <a:schemeClr val="accent1"/>
-          </a:fillRef>
-          <a:effectRef idx="1">
-            <a:schemeClr val="accent1"/>
-          </a:effectRef>
-          <a:fontRef idx="minor">
-            <a:schemeClr val="tx1"/>
-          </a:fontRef>
-        </p:style>
-      </p:cxnSp>
-      <p:sp>
-        <p:nvSpPr>
-          <p:cNvPr id="20" name="Rounded Rectangle 19"/>
+      <p:sp>
+        <p:nvSpPr>
+          <p:cNvPr id="21" name="Rectangle 20"/>
+          <p:cNvSpPr/>
+          <p:nvPr/>
+        </p:nvSpPr>
+        <p:spPr>
+          <a:xfrm>
+            <a:off x="8901112" y="4557712"/>
+            <a:ext cx="329565" cy="28575"/>
+          </a:xfrm>
+          <a:prstGeom prst="rect">
+            <a:avLst/>
+          </a:prstGeom>
+          <a:solidFill>
+            <a:srgbClr val="9A7878"/>
+          </a:solidFill>
+          <a:ln>
+            <a:noFill/>
+          </a:ln>
+          <a:effectLst/>
+        </p:spPr>
+        <p:style>
+          <a:lnRef idx="1">
+            <a:schemeClr val="accent1"/>
+          </a:lnRef>
+          <a:fillRef idx="3">
+            <a:schemeClr val="accent1"/>
+          </a:fillRef>
+          <a:effectRef idx="2">
+            <a:schemeClr val="accent1"/>
+          </a:effectRef>
+          <a:fontRef idx="minor">
+            <a:schemeClr val="lt1"/>
+          </a:fontRef>
+        </p:style>
+        <p:txBody>
+          <a:bodyPr rtlCol="0" anchor="ctr"/>
+          <a:lstStyle/>
+          <a:p/>
+        </p:txBody>
+      </p:sp>
+      <p:sp>
+        <p:nvSpPr>
+          <p:cNvPr id="22" name="Isosceles Triangle 21"/>
+          <p:cNvSpPr/>
+          <p:nvPr/>
+        </p:nvSpPr>
+        <p:spPr>
+          <a:xfrm rot="5400000">
+            <a:off x="9201150" y="4495800"/>
+            <a:ext cx="152400" cy="152400"/>
+          </a:xfrm>
+          <a:prstGeom prst="triangle">
+            <a:avLst/>
+          </a:prstGeom>
+          <a:solidFill>
+            <a:srgbClr val="E05540"/>
+          </a:solidFill>
+          <a:ln>
+            <a:noFill/>
+          </a:ln>
+          <a:effectLst/>
+        </p:spPr>
+        <p:style>
+          <a:lnRef idx="1">
+            <a:schemeClr val="accent1"/>
+          </a:lnRef>
+          <a:fillRef idx="3">
+            <a:schemeClr val="accent1"/>
+          </a:fillRef>
+          <a:effectRef idx="2">
+            <a:schemeClr val="accent1"/>
+          </a:effectRef>
+          <a:fontRef idx="minor">
+            <a:schemeClr val="lt1"/>
+          </a:fontRef>
+        </p:style>
+        <p:txBody>
+          <a:bodyPr rtlCol="0" anchor="ctr"/>
+          <a:lstStyle/>
+          <a:p>
+            <a:pPr algn="ctr"/>
+          </a:p>
+        </p:txBody>
+      </p:sp>
+      <p:sp>
+        <p:nvSpPr>
+          <p:cNvPr id="23" name="Rounded Rectangle 22"/>
           <p:cNvSpPr/>
           <p:nvPr/>
         </p:nvSpPr>
@@ -43211,7 +44711,7 @@
       </p:sp>
       <p:pic>
         <p:nvPicPr>
-          <p:cNvPr id="21" name="Picture 20" descr="cpu.png"/>
+          <p:cNvPr id="24" name="Picture 23" descr="cpu.png"/>
           <p:cNvPicPr>
             <a:picLocks noChangeAspect="1"/>
           </p:cNvPicPr>
@@ -43235,7 +44735,7 @@
       </p:pic>
       <p:sp>
         <p:nvSpPr>
-          <p:cNvPr id="22" name="TextBox 21"/>
+          <p:cNvPr id="25" name="TextBox 24"/>
           <p:cNvSpPr txBox="1"/>
           <p:nvPr/>
         </p:nvSpPr>
@@ -43276,7 +44776,7 @@
       </p:sp>
       <p:sp>
         <p:nvSpPr>
-          <p:cNvPr id="23" name="TextBox 22"/>
+          <p:cNvPr id="26" name="TextBox 25"/>
           <p:cNvSpPr txBox="1"/>
           <p:nvPr/>
         </p:nvSpPr>
@@ -43315,45 +44815,95 @@
           </a:p>
         </p:txBody>
       </p:sp>
-      <p:cxnSp>
-        <p:nvCxnSpPr>
-          <p:cNvPr id="24" name="Connector 23"/>
-          <p:cNvCxnSpPr/>
-          <p:nvPr/>
-        </p:nvCxnSpPr>
-        <p:spPr>
-          <a:xfrm>
-            <a:off x="11753850" y="4572000"/>
-            <a:ext cx="438150" cy="0"/>
-          </a:xfrm>
-          <a:prstGeom prst="line">
-            <a:avLst/>
-          </a:prstGeom>
-          <a:ln w="28575">
-            <a:solidFill>
-              <a:srgbClr val="9A7878"/>
-            </a:solidFill>
-            <a:tailEnd type="triangle" w="med" len="med"/>
-          </a:ln>
-        </p:spPr>
-        <p:style>
-          <a:lnRef idx="2">
-            <a:schemeClr val="accent1"/>
-          </a:lnRef>
-          <a:fillRef idx="0">
-            <a:schemeClr val="accent1"/>
-          </a:fillRef>
-          <a:effectRef idx="1">
-            <a:schemeClr val="accent1"/>
-          </a:effectRef>
-          <a:fontRef idx="minor">
-            <a:schemeClr val="tx1"/>
-          </a:fontRef>
-        </p:style>
-      </p:cxnSp>
-      <p:sp>
-        <p:nvSpPr>
-          <p:cNvPr id="25" name="Rounded Rectangle 24"/>
+      <p:sp>
+        <p:nvSpPr>
+          <p:cNvPr id="27" name="Rectangle 26"/>
+          <p:cNvSpPr/>
+          <p:nvPr/>
+        </p:nvSpPr>
+        <p:spPr>
+          <a:xfrm>
+            <a:off x="11739562" y="4557712"/>
+            <a:ext cx="329565" cy="28575"/>
+          </a:xfrm>
+          <a:prstGeom prst="rect">
+            <a:avLst/>
+          </a:prstGeom>
+          <a:solidFill>
+            <a:srgbClr val="9A7878"/>
+          </a:solidFill>
+          <a:ln>
+            <a:noFill/>
+          </a:ln>
+          <a:effectLst/>
+        </p:spPr>
+        <p:style>
+          <a:lnRef idx="1">
+            <a:schemeClr val="accent1"/>
+          </a:lnRef>
+          <a:fillRef idx="3">
+            <a:schemeClr val="accent1"/>
+          </a:fillRef>
+          <a:effectRef idx="2">
+            <a:schemeClr val="accent1"/>
+          </a:effectRef>
+          <a:fontRef idx="minor">
+            <a:schemeClr val="lt1"/>
+          </a:fontRef>
+        </p:style>
+        <p:txBody>
+          <a:bodyPr rtlCol="0" anchor="ctr"/>
+          <a:lstStyle/>
+          <a:p/>
+        </p:txBody>
+      </p:sp>
+      <p:sp>
+        <p:nvSpPr>
+          <p:cNvPr id="28" name="Isosceles Triangle 27"/>
+          <p:cNvSpPr/>
+          <p:nvPr/>
+        </p:nvSpPr>
+        <p:spPr>
+          <a:xfrm rot="5400000">
+            <a:off x="12039600" y="4495800"/>
+            <a:ext cx="152400" cy="152400"/>
+          </a:xfrm>
+          <a:prstGeom prst="triangle">
+            <a:avLst/>
+          </a:prstGeom>
+          <a:solidFill>
+            <a:srgbClr val="E05540"/>
+          </a:solidFill>
+          <a:ln>
+            <a:noFill/>
+          </a:ln>
+          <a:effectLst/>
+        </p:spPr>
+        <p:style>
+          <a:lnRef idx="1">
+            <a:schemeClr val="accent1"/>
+          </a:lnRef>
+          <a:fillRef idx="3">
+            <a:schemeClr val="accent1"/>
+          </a:fillRef>
+          <a:effectRef idx="2">
+            <a:schemeClr val="accent1"/>
+          </a:effectRef>
+          <a:fontRef idx="minor">
+            <a:schemeClr val="lt1"/>
+          </a:fontRef>
+        </p:style>
+        <p:txBody>
+          <a:bodyPr rtlCol="0" anchor="ctr"/>
+          <a:lstStyle/>
+          <a:p>
+            <a:pPr algn="ctr"/>
+          </a:p>
+        </p:txBody>
+      </p:sp>
+      <p:sp>
+        <p:nvSpPr>
+          <p:cNvPr id="29" name="Rounded Rectangle 28"/>
           <p:cNvSpPr/>
           <p:nvPr/>
         </p:nvSpPr>
@@ -43399,7 +44949,7 @@
       </p:sp>
       <p:pic>
         <p:nvPicPr>
-          <p:cNvPr id="26" name="Picture 25" descr="diagram-3.png"/>
+          <p:cNvPr id="30" name="Picture 29" descr="diagram-3.png"/>
           <p:cNvPicPr>
             <a:picLocks noChangeAspect="1"/>
           </p:cNvPicPr>
@@ -43423,7 +44973,7 @@
       </p:pic>
       <p:sp>
         <p:nvSpPr>
-          <p:cNvPr id="27" name="TextBox 26"/>
+          <p:cNvPr id="31" name="TextBox 30"/>
           <p:cNvSpPr txBox="1"/>
           <p:nvPr/>
         </p:nvSpPr>
@@ -43464,7 +45014,7 @@
       </p:sp>
       <p:sp>
         <p:nvSpPr>
-          <p:cNvPr id="28" name="TextBox 27"/>
+          <p:cNvPr id="32" name="TextBox 31"/>
           <p:cNvSpPr txBox="1"/>
           <p:nvPr/>
         </p:nvSpPr>
@@ -43503,45 +45053,95 @@
           </a:p>
         </p:txBody>
       </p:sp>
-      <p:cxnSp>
-        <p:nvCxnSpPr>
-          <p:cNvPr id="29" name="Connector 28"/>
-          <p:cNvCxnSpPr/>
-          <p:nvPr/>
-        </p:nvCxnSpPr>
-        <p:spPr>
-          <a:xfrm>
-            <a:off x="14592300" y="4572000"/>
-            <a:ext cx="438150" cy="0"/>
-          </a:xfrm>
-          <a:prstGeom prst="line">
-            <a:avLst/>
-          </a:prstGeom>
-          <a:ln w="28575">
-            <a:solidFill>
-              <a:srgbClr val="9A7878"/>
-            </a:solidFill>
-            <a:tailEnd type="triangle" w="med" len="med"/>
-          </a:ln>
-        </p:spPr>
-        <p:style>
-          <a:lnRef idx="2">
-            <a:schemeClr val="accent1"/>
-          </a:lnRef>
-          <a:fillRef idx="0">
-            <a:schemeClr val="accent1"/>
-          </a:fillRef>
-          <a:effectRef idx="1">
-            <a:schemeClr val="accent1"/>
-          </a:effectRef>
-          <a:fontRef idx="minor">
-            <a:schemeClr val="tx1"/>
-          </a:fontRef>
-        </p:style>
-      </p:cxnSp>
-      <p:sp>
-        <p:nvSpPr>
-          <p:cNvPr id="30" name="Rounded Rectangle 29"/>
+      <p:sp>
+        <p:nvSpPr>
+          <p:cNvPr id="33" name="Rectangle 32"/>
+          <p:cNvSpPr/>
+          <p:nvPr/>
+        </p:nvSpPr>
+        <p:spPr>
+          <a:xfrm>
+            <a:off x="14578012" y="4557712"/>
+            <a:ext cx="329565" cy="28575"/>
+          </a:xfrm>
+          <a:prstGeom prst="rect">
+            <a:avLst/>
+          </a:prstGeom>
+          <a:solidFill>
+            <a:srgbClr val="9A7878"/>
+          </a:solidFill>
+          <a:ln>
+            <a:noFill/>
+          </a:ln>
+          <a:effectLst/>
+        </p:spPr>
+        <p:style>
+          <a:lnRef idx="1">
+            <a:schemeClr val="accent1"/>
+          </a:lnRef>
+          <a:fillRef idx="3">
+            <a:schemeClr val="accent1"/>
+          </a:fillRef>
+          <a:effectRef idx="2">
+            <a:schemeClr val="accent1"/>
+          </a:effectRef>
+          <a:fontRef idx="minor">
+            <a:schemeClr val="lt1"/>
+          </a:fontRef>
+        </p:style>
+        <p:txBody>
+          <a:bodyPr rtlCol="0" anchor="ctr"/>
+          <a:lstStyle/>
+          <a:p/>
+        </p:txBody>
+      </p:sp>
+      <p:sp>
+        <p:nvSpPr>
+          <p:cNvPr id="34" name="Isosceles Triangle 33"/>
+          <p:cNvSpPr/>
+          <p:nvPr/>
+        </p:nvSpPr>
+        <p:spPr>
+          <a:xfrm rot="5400000">
+            <a:off x="14878050" y="4495800"/>
+            <a:ext cx="152400" cy="152400"/>
+          </a:xfrm>
+          <a:prstGeom prst="triangle">
+            <a:avLst/>
+          </a:prstGeom>
+          <a:solidFill>
+            <a:srgbClr val="E05540"/>
+          </a:solidFill>
+          <a:ln>
+            <a:noFill/>
+          </a:ln>
+          <a:effectLst/>
+        </p:spPr>
+        <p:style>
+          <a:lnRef idx="1">
+            <a:schemeClr val="accent1"/>
+          </a:lnRef>
+          <a:fillRef idx="3">
+            <a:schemeClr val="accent1"/>
+          </a:fillRef>
+          <a:effectRef idx="2">
+            <a:schemeClr val="accent1"/>
+          </a:effectRef>
+          <a:fontRef idx="minor">
+            <a:schemeClr val="lt1"/>
+          </a:fontRef>
+        </p:style>
+        <p:txBody>
+          <a:bodyPr rtlCol="0" anchor="ctr"/>
+          <a:lstStyle/>
+          <a:p>
+            <a:pPr algn="ctr"/>
+          </a:p>
+        </p:txBody>
+      </p:sp>
+      <p:sp>
+        <p:nvSpPr>
+          <p:cNvPr id="35" name="Rounded Rectangle 34"/>
           <p:cNvSpPr/>
           <p:nvPr/>
         </p:nvSpPr>
@@ -43587,7 +45187,7 @@
       </p:sp>
       <p:pic>
         <p:nvPicPr>
-          <p:cNvPr id="31" name="Picture 30" descr="lightning-charge-fill.png"/>
+          <p:cNvPr id="36" name="Picture 35" descr="lightning-charge-fill.png"/>
           <p:cNvPicPr>
             <a:picLocks noChangeAspect="1"/>
           </p:cNvPicPr>
@@ -43611,7 +45211,7 @@
       </p:pic>
       <p:sp>
         <p:nvSpPr>
-          <p:cNvPr id="32" name="TextBox 31"/>
+          <p:cNvPr id="37" name="TextBox 36"/>
           <p:cNvSpPr txBox="1"/>
           <p:nvPr/>
         </p:nvSpPr>
@@ -43652,7 +45252,7 @@
       </p:sp>
       <p:sp>
         <p:nvSpPr>
-          <p:cNvPr id="33" name="TextBox 32"/>
+          <p:cNvPr id="38" name="TextBox 37"/>
           <p:cNvSpPr txBox="1"/>
           <p:nvPr/>
         </p:nvSpPr>
@@ -43693,7 +45293,7 @@
       </p:sp>
       <p:pic>
         <p:nvPicPr>
-          <p:cNvPr id="34" name="Picture 33" descr="dozer.png"/>
+          <p:cNvPr id="39" name="Picture 38" descr="dozer.png"/>
           <p:cNvPicPr>
             <a:picLocks noChangeAspect="1"/>
           </p:cNvPicPr>
@@ -43717,7 +45317,7 @@
       </p:pic>
       <p:sp>
         <p:nvSpPr>
-          <p:cNvPr id="35" name="TextBox 34"/>
+          <p:cNvPr id="40" name="TextBox 39"/>
           <p:cNvSpPr txBox="1"/>
           <p:nvPr/>
         </p:nvSpPr>
@@ -43754,7 +45354,7 @@
       </p:sp>
       <p:sp>
         <p:nvSpPr>
-          <p:cNvPr id="36" name="Rounded Rectangle 35"/>
+          <p:cNvPr id="41" name="Rounded Rectangle 40"/>
           <p:cNvSpPr/>
           <p:nvPr/>
         </p:nvSpPr>
@@ -43798,7 +45398,7 @@
       </p:sp>
       <p:sp>
         <p:nvSpPr>
-          <p:cNvPr id="37" name="TextBox 36"/>
+          <p:cNvPr id="42" name="TextBox 41"/>
           <p:cNvSpPr txBox="1"/>
           <p:nvPr/>
         </p:nvSpPr>
@@ -43850,7 +45450,7 @@
       </p:sp>
       <p:sp>
         <p:nvSpPr>
-          <p:cNvPr id="38" name="TextBox 37"/>
+          <p:cNvPr id="43" name="TextBox 42"/>
           <p:cNvSpPr txBox="1"/>
           <p:nvPr/>
         </p:nvSpPr>
@@ -43898,7 +45498,7 @@
       </p:sp>
       <p:sp>
         <p:nvSpPr>
-          <p:cNvPr id="39" name="TextBox 38"/>
+          <p:cNvPr id="44" name="TextBox 43"/>
           <p:cNvSpPr txBox="1"/>
           <p:nvPr/>
         </p:nvSpPr>
@@ -45137,81 +46737,181 @@
           </a:p>
         </p:txBody>
       </p:sp>
-      <p:cxnSp>
-        <p:nvCxnSpPr>
-          <p:cNvPr id="17" name="Connector 16"/>
-          <p:cNvCxnSpPr/>
-          <p:nvPr/>
-        </p:nvCxnSpPr>
-        <p:spPr>
-          <a:xfrm>
-            <a:off x="5638800" y="6000750"/>
-            <a:ext cx="1104900" cy="0"/>
-          </a:xfrm>
-          <a:prstGeom prst="line">
-            <a:avLst/>
-          </a:prstGeom>
-          <a:ln w="38100">
-            <a:solidFill>
-              <a:srgbClr val="9A7878"/>
-            </a:solidFill>
-            <a:tailEnd type="triangle" w="med" len="med"/>
-          </a:ln>
-        </p:spPr>
-        <p:style>
-          <a:lnRef idx="2">
-            <a:schemeClr val="accent1"/>
-          </a:lnRef>
-          <a:fillRef idx="0">
-            <a:schemeClr val="accent1"/>
-          </a:fillRef>
-          <a:effectRef idx="1">
-            <a:schemeClr val="accent1"/>
-          </a:effectRef>
-          <a:fontRef idx="minor">
-            <a:schemeClr val="tx1"/>
-          </a:fontRef>
-        </p:style>
-      </p:cxnSp>
-      <p:cxnSp>
-        <p:nvCxnSpPr>
-          <p:cNvPr id="18" name="Connector 17"/>
-          <p:cNvCxnSpPr/>
-          <p:nvPr/>
-        </p:nvCxnSpPr>
-        <p:spPr>
-          <a:xfrm>
-            <a:off x="11544300" y="6000750"/>
-            <a:ext cx="1104900" cy="0"/>
-          </a:xfrm>
-          <a:prstGeom prst="line">
-            <a:avLst/>
-          </a:prstGeom>
-          <a:ln w="38100">
-            <a:solidFill>
-              <a:srgbClr val="9A7878"/>
-            </a:solidFill>
-            <a:tailEnd type="triangle" w="med" len="med"/>
-          </a:ln>
-        </p:spPr>
-        <p:style>
-          <a:lnRef idx="2">
-            <a:schemeClr val="accent1"/>
-          </a:lnRef>
-          <a:fillRef idx="0">
-            <a:schemeClr val="accent1"/>
-          </a:fillRef>
-          <a:effectRef idx="1">
-            <a:schemeClr val="accent1"/>
-          </a:effectRef>
-          <a:fontRef idx="minor">
-            <a:schemeClr val="tx1"/>
-          </a:fontRef>
-        </p:style>
-      </p:cxnSp>
-      <p:sp>
-        <p:nvSpPr>
-          <p:cNvPr id="19" name="TextBox 18"/>
+      <p:sp>
+        <p:nvSpPr>
+          <p:cNvPr id="17" name="Rectangle 16"/>
+          <p:cNvSpPr/>
+          <p:nvPr/>
+        </p:nvSpPr>
+        <p:spPr>
+          <a:xfrm>
+            <a:off x="5619750" y="5981700"/>
+            <a:ext cx="1005840" cy="38100"/>
+          </a:xfrm>
+          <a:prstGeom prst="rect">
+            <a:avLst/>
+          </a:prstGeom>
+          <a:solidFill>
+            <a:srgbClr val="9A7878"/>
+          </a:solidFill>
+          <a:ln>
+            <a:noFill/>
+          </a:ln>
+          <a:effectLst/>
+        </p:spPr>
+        <p:style>
+          <a:lnRef idx="1">
+            <a:schemeClr val="accent1"/>
+          </a:lnRef>
+          <a:fillRef idx="3">
+            <a:schemeClr val="accent1"/>
+          </a:fillRef>
+          <a:effectRef idx="2">
+            <a:schemeClr val="accent1"/>
+          </a:effectRef>
+          <a:fontRef idx="minor">
+            <a:schemeClr val="lt1"/>
+          </a:fontRef>
+        </p:style>
+        <p:txBody>
+          <a:bodyPr rtlCol="0" anchor="ctr"/>
+          <a:lstStyle/>
+          <a:p/>
+        </p:txBody>
+      </p:sp>
+      <p:sp>
+        <p:nvSpPr>
+          <p:cNvPr id="18" name="Isosceles Triangle 17"/>
+          <p:cNvSpPr/>
+          <p:nvPr/>
+        </p:nvSpPr>
+        <p:spPr>
+          <a:xfrm rot="5400000">
+            <a:off x="6591300" y="5924550"/>
+            <a:ext cx="152400" cy="152400"/>
+          </a:xfrm>
+          <a:prstGeom prst="triangle">
+            <a:avLst/>
+          </a:prstGeom>
+          <a:solidFill>
+            <a:srgbClr val="E05540"/>
+          </a:solidFill>
+          <a:ln>
+            <a:noFill/>
+          </a:ln>
+          <a:effectLst/>
+        </p:spPr>
+        <p:style>
+          <a:lnRef idx="1">
+            <a:schemeClr val="accent1"/>
+          </a:lnRef>
+          <a:fillRef idx="3">
+            <a:schemeClr val="accent1"/>
+          </a:fillRef>
+          <a:effectRef idx="2">
+            <a:schemeClr val="accent1"/>
+          </a:effectRef>
+          <a:fontRef idx="minor">
+            <a:schemeClr val="lt1"/>
+          </a:fontRef>
+        </p:style>
+        <p:txBody>
+          <a:bodyPr rtlCol="0" anchor="ctr"/>
+          <a:lstStyle/>
+          <a:p>
+            <a:pPr algn="ctr"/>
+          </a:p>
+        </p:txBody>
+      </p:sp>
+      <p:sp>
+        <p:nvSpPr>
+          <p:cNvPr id="19" name="Rectangle 18"/>
+          <p:cNvSpPr/>
+          <p:nvPr/>
+        </p:nvSpPr>
+        <p:spPr>
+          <a:xfrm>
+            <a:off x="11525250" y="5981700"/>
+            <a:ext cx="1005840" cy="38100"/>
+          </a:xfrm>
+          <a:prstGeom prst="rect">
+            <a:avLst/>
+          </a:prstGeom>
+          <a:solidFill>
+            <a:srgbClr val="9A7878"/>
+          </a:solidFill>
+          <a:ln>
+            <a:noFill/>
+          </a:ln>
+          <a:effectLst/>
+        </p:spPr>
+        <p:style>
+          <a:lnRef idx="1">
+            <a:schemeClr val="accent1"/>
+          </a:lnRef>
+          <a:fillRef idx="3">
+            <a:schemeClr val="accent1"/>
+          </a:fillRef>
+          <a:effectRef idx="2">
+            <a:schemeClr val="accent1"/>
+          </a:effectRef>
+          <a:fontRef idx="minor">
+            <a:schemeClr val="lt1"/>
+          </a:fontRef>
+        </p:style>
+        <p:txBody>
+          <a:bodyPr rtlCol="0" anchor="ctr"/>
+          <a:lstStyle/>
+          <a:p/>
+        </p:txBody>
+      </p:sp>
+      <p:sp>
+        <p:nvSpPr>
+          <p:cNvPr id="20" name="Isosceles Triangle 19"/>
+          <p:cNvSpPr/>
+          <p:nvPr/>
+        </p:nvSpPr>
+        <p:spPr>
+          <a:xfrm rot="5400000">
+            <a:off x="12496800" y="5924550"/>
+            <a:ext cx="152400" cy="152400"/>
+          </a:xfrm>
+          <a:prstGeom prst="triangle">
+            <a:avLst/>
+          </a:prstGeom>
+          <a:solidFill>
+            <a:srgbClr val="E05540"/>
+          </a:solidFill>
+          <a:ln>
+            <a:noFill/>
+          </a:ln>
+          <a:effectLst/>
+        </p:spPr>
+        <p:style>
+          <a:lnRef idx="1">
+            <a:schemeClr val="accent1"/>
+          </a:lnRef>
+          <a:fillRef idx="3">
+            <a:schemeClr val="accent1"/>
+          </a:fillRef>
+          <a:effectRef idx="2">
+            <a:schemeClr val="accent1"/>
+          </a:effectRef>
+          <a:fontRef idx="minor">
+            <a:schemeClr val="lt1"/>
+          </a:fontRef>
+        </p:style>
+        <p:txBody>
+          <a:bodyPr rtlCol="0" anchor="ctr"/>
+          <a:lstStyle/>
+          <a:p>
+            <a:pPr algn="ctr"/>
+          </a:p>
+        </p:txBody>
+      </p:sp>
+      <p:sp>
+        <p:nvSpPr>
+          <p:cNvPr id="21" name="TextBox 20"/>
           <p:cNvSpPr txBox="1"/>
           <p:nvPr/>
         </p:nvSpPr>
@@ -45248,7 +46948,7 @@
       </p:sp>
       <p:sp>
         <p:nvSpPr>
-          <p:cNvPr id="20" name="TextBox 19"/>
+          <p:cNvPr id="22" name="TextBox 21"/>
           <p:cNvSpPr txBox="1"/>
           <p:nvPr/>
         </p:nvSpPr>
@@ -45285,7 +46985,7 @@
       </p:sp>
       <p:sp>
         <p:nvSpPr>
-          <p:cNvPr id="21" name="Rounded Rectangle 20"/>
+          <p:cNvPr id="23" name="Rounded Rectangle 22"/>
           <p:cNvSpPr/>
           <p:nvPr/>
         </p:nvSpPr>
@@ -45331,7 +47031,7 @@
       </p:sp>
       <p:sp>
         <p:nvSpPr>
-          <p:cNvPr id="22" name="TextBox 21"/>
+          <p:cNvPr id="24" name="TextBox 23"/>
           <p:cNvSpPr txBox="1"/>
           <p:nvPr/>
         </p:nvSpPr>
@@ -45366,45 +47066,95 @@
           </a:p>
         </p:txBody>
       </p:sp>
-      <p:cxnSp>
-        <p:nvCxnSpPr>
-          <p:cNvPr id="23" name="Connector 22"/>
-          <p:cNvCxnSpPr/>
-          <p:nvPr/>
-        </p:nvCxnSpPr>
-        <p:spPr>
-          <a:xfrm>
-            <a:off x="9144000" y="3981450"/>
-            <a:ext cx="0" cy="876300"/>
-          </a:xfrm>
-          <a:prstGeom prst="line">
-            <a:avLst/>
-          </a:prstGeom>
-          <a:ln w="38100">
-            <a:solidFill>
-              <a:srgbClr val="CC2200"/>
-            </a:solidFill>
-            <a:tailEnd type="triangle" w="med" len="med"/>
-          </a:ln>
-        </p:spPr>
-        <p:style>
-          <a:lnRef idx="2">
-            <a:schemeClr val="accent1"/>
-          </a:lnRef>
-          <a:fillRef idx="0">
-            <a:schemeClr val="accent1"/>
-          </a:fillRef>
-          <a:effectRef idx="1">
-            <a:schemeClr val="accent1"/>
-          </a:effectRef>
-          <a:fontRef idx="minor">
-            <a:schemeClr val="tx1"/>
-          </a:fontRef>
-        </p:style>
-      </p:cxnSp>
-      <p:sp>
-        <p:nvSpPr>
-          <p:cNvPr id="24" name="TextBox 23"/>
+      <p:sp>
+        <p:nvSpPr>
+          <p:cNvPr id="25" name="Rectangle 24"/>
+          <p:cNvSpPr/>
+          <p:nvPr/>
+        </p:nvSpPr>
+        <p:spPr>
+          <a:xfrm>
+            <a:off x="9124950" y="3962400"/>
+            <a:ext cx="38100" cy="777240"/>
+          </a:xfrm>
+          <a:prstGeom prst="rect">
+            <a:avLst/>
+          </a:prstGeom>
+          <a:solidFill>
+            <a:srgbClr val="CC2200"/>
+          </a:solidFill>
+          <a:ln>
+            <a:noFill/>
+          </a:ln>
+          <a:effectLst/>
+        </p:spPr>
+        <p:style>
+          <a:lnRef idx="1">
+            <a:schemeClr val="accent1"/>
+          </a:lnRef>
+          <a:fillRef idx="3">
+            <a:schemeClr val="accent1"/>
+          </a:fillRef>
+          <a:effectRef idx="2">
+            <a:schemeClr val="accent1"/>
+          </a:effectRef>
+          <a:fontRef idx="minor">
+            <a:schemeClr val="lt1"/>
+          </a:fontRef>
+        </p:style>
+        <p:txBody>
+          <a:bodyPr rtlCol="0" anchor="ctr"/>
+          <a:lstStyle/>
+          <a:p/>
+        </p:txBody>
+      </p:sp>
+      <p:sp>
+        <p:nvSpPr>
+          <p:cNvPr id="26" name="Isosceles Triangle 25"/>
+          <p:cNvSpPr/>
+          <p:nvPr/>
+        </p:nvSpPr>
+        <p:spPr>
+          <a:xfrm rot="10800000">
+            <a:off x="9067800" y="4705350"/>
+            <a:ext cx="152400" cy="152400"/>
+          </a:xfrm>
+          <a:prstGeom prst="triangle">
+            <a:avLst/>
+          </a:prstGeom>
+          <a:solidFill>
+            <a:srgbClr val="CC2200"/>
+          </a:solidFill>
+          <a:ln>
+            <a:noFill/>
+          </a:ln>
+          <a:effectLst/>
+        </p:spPr>
+        <p:style>
+          <a:lnRef idx="1">
+            <a:schemeClr val="accent1"/>
+          </a:lnRef>
+          <a:fillRef idx="3">
+            <a:schemeClr val="accent1"/>
+          </a:fillRef>
+          <a:effectRef idx="2">
+            <a:schemeClr val="accent1"/>
+          </a:effectRef>
+          <a:fontRef idx="minor">
+            <a:schemeClr val="lt1"/>
+          </a:fontRef>
+        </p:style>
+        <p:txBody>
+          <a:bodyPr rtlCol="0" anchor="ctr"/>
+          <a:lstStyle/>
+          <a:p>
+            <a:pPr algn="ctr"/>
+          </a:p>
+        </p:txBody>
+      </p:sp>
+      <p:sp>
+        <p:nvSpPr>
+          <p:cNvPr id="27" name="TextBox 26"/>
           <p:cNvSpPr txBox="1"/>
           <p:nvPr/>
         </p:nvSpPr>
@@ -45452,7 +47202,7 @@
       </p:sp>
       <p:sp>
         <p:nvSpPr>
-          <p:cNvPr id="25" name="TextBox 24"/>
+          <p:cNvPr id="28" name="TextBox 27"/>
           <p:cNvSpPr txBox="1"/>
           <p:nvPr/>
         </p:nvSpPr>
@@ -45489,7 +47239,7 @@
       </p:sp>
       <p:sp>
         <p:nvSpPr>
-          <p:cNvPr id="26" name="TextBox 25"/>
+          <p:cNvPr id="29" name="TextBox 28"/>
           <p:cNvSpPr txBox="1"/>
           <p:nvPr/>
         </p:nvSpPr>
@@ -45537,7 +47287,7 @@
       </p:sp>
       <p:sp>
         <p:nvSpPr>
-          <p:cNvPr id="27" name="TextBox 26"/>
+          <p:cNvPr id="30" name="TextBox 29"/>
           <p:cNvSpPr txBox="1"/>
           <p:nvPr/>
         </p:nvSpPr>
@@ -59184,181 +60934,216 @@
           </a:fontRef>
         </p:style>
       </p:cxnSp>
-      <p:cxnSp>
-        <p:nvCxnSpPr>
-          <p:cNvPr id="341" name="Connector 340"/>
-          <p:cNvCxnSpPr/>
-          <p:nvPr/>
-        </p:nvCxnSpPr>
-        <p:spPr>
-          <a:xfrm>
-            <a:off x="2476500" y="4381500"/>
-            <a:ext cx="0" cy="762000"/>
-          </a:xfrm>
-          <a:prstGeom prst="line">
-            <a:avLst/>
-          </a:prstGeom>
-          <a:ln w="28575">
-            <a:solidFill>
-              <a:srgbClr val="9A7878"/>
-            </a:solidFill>
-          </a:ln>
-        </p:spPr>
-        <p:style>
-          <a:lnRef idx="2">
-            <a:schemeClr val="accent1"/>
-          </a:lnRef>
-          <a:fillRef idx="0">
-            <a:schemeClr val="accent1"/>
-          </a:fillRef>
-          <a:effectRef idx="1">
-            <a:schemeClr val="accent1"/>
-          </a:effectRef>
-          <a:fontRef idx="minor">
-            <a:schemeClr val="tx1"/>
-          </a:fontRef>
-        </p:style>
-      </p:cxnSp>
-      <p:cxnSp>
-        <p:nvCxnSpPr>
-          <p:cNvPr id="342" name="Connector 341"/>
-          <p:cNvCxnSpPr/>
-          <p:nvPr/>
-        </p:nvCxnSpPr>
-        <p:spPr>
-          <a:xfrm>
-            <a:off x="5334000" y="4381500"/>
-            <a:ext cx="0" cy="762000"/>
-          </a:xfrm>
-          <a:prstGeom prst="line">
-            <a:avLst/>
-          </a:prstGeom>
-          <a:ln w="28575">
-            <a:solidFill>
-              <a:srgbClr val="9A7878"/>
-            </a:solidFill>
-          </a:ln>
-        </p:spPr>
-        <p:style>
-          <a:lnRef idx="2">
-            <a:schemeClr val="accent1"/>
-          </a:lnRef>
-          <a:fillRef idx="0">
-            <a:schemeClr val="accent1"/>
-          </a:fillRef>
-          <a:effectRef idx="1">
-            <a:schemeClr val="accent1"/>
-          </a:effectRef>
-          <a:fontRef idx="minor">
-            <a:schemeClr val="tx1"/>
-          </a:fontRef>
-        </p:style>
-      </p:cxnSp>
-      <p:cxnSp>
-        <p:nvCxnSpPr>
-          <p:cNvPr id="343" name="Connector 342"/>
-          <p:cNvCxnSpPr/>
-          <p:nvPr/>
-        </p:nvCxnSpPr>
-        <p:spPr>
-          <a:xfrm>
-            <a:off x="8191500" y="4381500"/>
-            <a:ext cx="0" cy="762000"/>
-          </a:xfrm>
-          <a:prstGeom prst="line">
-            <a:avLst/>
-          </a:prstGeom>
-          <a:ln w="28575">
-            <a:solidFill>
-              <a:srgbClr val="9A7878"/>
-            </a:solidFill>
-          </a:ln>
-        </p:spPr>
-        <p:style>
-          <a:lnRef idx="2">
-            <a:schemeClr val="accent1"/>
-          </a:lnRef>
-          <a:fillRef idx="0">
-            <a:schemeClr val="accent1"/>
-          </a:fillRef>
-          <a:effectRef idx="1">
-            <a:schemeClr val="accent1"/>
-          </a:effectRef>
-          <a:fontRef idx="minor">
-            <a:schemeClr val="tx1"/>
-          </a:fontRef>
-        </p:style>
-      </p:cxnSp>
-      <p:cxnSp>
-        <p:nvCxnSpPr>
-          <p:cNvPr id="344" name="Connector 343"/>
-          <p:cNvCxnSpPr/>
-          <p:nvPr/>
-        </p:nvCxnSpPr>
-        <p:spPr>
-          <a:xfrm>
-            <a:off x="11049000" y="4381500"/>
-            <a:ext cx="0" cy="762000"/>
-          </a:xfrm>
-          <a:prstGeom prst="line">
-            <a:avLst/>
-          </a:prstGeom>
-          <a:ln w="28575">
-            <a:solidFill>
-              <a:srgbClr val="9A7878"/>
-            </a:solidFill>
-          </a:ln>
-        </p:spPr>
-        <p:style>
-          <a:lnRef idx="2">
-            <a:schemeClr val="accent1"/>
-          </a:lnRef>
-          <a:fillRef idx="0">
-            <a:schemeClr val="accent1"/>
-          </a:fillRef>
-          <a:effectRef idx="1">
-            <a:schemeClr val="accent1"/>
-          </a:effectRef>
-          <a:fontRef idx="minor">
-            <a:schemeClr val="tx1"/>
-          </a:fontRef>
-        </p:style>
-      </p:cxnSp>
-      <p:cxnSp>
-        <p:nvCxnSpPr>
-          <p:cNvPr id="345" name="Connector 344"/>
-          <p:cNvCxnSpPr/>
-          <p:nvPr/>
-        </p:nvCxnSpPr>
-        <p:spPr>
-          <a:xfrm>
-            <a:off x="13906500" y="4381500"/>
-            <a:ext cx="0" cy="762000"/>
-          </a:xfrm>
-          <a:prstGeom prst="line">
-            <a:avLst/>
-          </a:prstGeom>
-          <a:ln w="28575">
-            <a:solidFill>
-              <a:srgbClr val="9A7878"/>
-            </a:solidFill>
-          </a:ln>
-        </p:spPr>
-        <p:style>
-          <a:lnRef idx="2">
-            <a:schemeClr val="accent1"/>
-          </a:lnRef>
-          <a:fillRef idx="0">
-            <a:schemeClr val="accent1"/>
-          </a:fillRef>
-          <a:effectRef idx="1">
-            <a:schemeClr val="accent1"/>
-          </a:effectRef>
-          <a:fontRef idx="minor">
-            <a:schemeClr val="tx1"/>
-          </a:fontRef>
-        </p:style>
-      </p:cxnSp>
+      <p:sp>
+        <p:nvSpPr>
+          <p:cNvPr id="341" name="Rectangle 340"/>
+          <p:cNvSpPr/>
+          <p:nvPr/>
+        </p:nvSpPr>
+        <p:spPr>
+          <a:xfrm>
+            <a:off x="2462212" y="4367212"/>
+            <a:ext cx="28575" cy="790575"/>
+          </a:xfrm>
+          <a:prstGeom prst="rect">
+            <a:avLst/>
+          </a:prstGeom>
+          <a:solidFill>
+            <a:srgbClr val="9A7878"/>
+          </a:solidFill>
+          <a:ln>
+            <a:noFill/>
+          </a:ln>
+          <a:effectLst/>
+        </p:spPr>
+        <p:style>
+          <a:lnRef idx="1">
+            <a:schemeClr val="accent1"/>
+          </a:lnRef>
+          <a:fillRef idx="3">
+            <a:schemeClr val="accent1"/>
+          </a:fillRef>
+          <a:effectRef idx="2">
+            <a:schemeClr val="accent1"/>
+          </a:effectRef>
+          <a:fontRef idx="minor">
+            <a:schemeClr val="lt1"/>
+          </a:fontRef>
+        </p:style>
+        <p:txBody>
+          <a:bodyPr rtlCol="0" anchor="ctr"/>
+          <a:lstStyle/>
+          <a:p/>
+        </p:txBody>
+      </p:sp>
+      <p:sp>
+        <p:nvSpPr>
+          <p:cNvPr id="342" name="Rectangle 341"/>
+          <p:cNvSpPr/>
+          <p:nvPr/>
+        </p:nvSpPr>
+        <p:spPr>
+          <a:xfrm>
+            <a:off x="5319712" y="4367212"/>
+            <a:ext cx="28575" cy="790575"/>
+          </a:xfrm>
+          <a:prstGeom prst="rect">
+            <a:avLst/>
+          </a:prstGeom>
+          <a:solidFill>
+            <a:srgbClr val="9A7878"/>
+          </a:solidFill>
+          <a:ln>
+            <a:noFill/>
+          </a:ln>
+          <a:effectLst/>
+        </p:spPr>
+        <p:style>
+          <a:lnRef idx="1">
+            <a:schemeClr val="accent1"/>
+          </a:lnRef>
+          <a:fillRef idx="3">
+            <a:schemeClr val="accent1"/>
+          </a:fillRef>
+          <a:effectRef idx="2">
+            <a:schemeClr val="accent1"/>
+          </a:effectRef>
+          <a:fontRef idx="minor">
+            <a:schemeClr val="lt1"/>
+          </a:fontRef>
+        </p:style>
+        <p:txBody>
+          <a:bodyPr rtlCol="0" anchor="ctr"/>
+          <a:lstStyle/>
+          <a:p/>
+        </p:txBody>
+      </p:sp>
+      <p:sp>
+        <p:nvSpPr>
+          <p:cNvPr id="343" name="Rectangle 342"/>
+          <p:cNvSpPr/>
+          <p:nvPr/>
+        </p:nvSpPr>
+        <p:spPr>
+          <a:xfrm>
+            <a:off x="8177212" y="4367212"/>
+            <a:ext cx="28575" cy="790575"/>
+          </a:xfrm>
+          <a:prstGeom prst="rect">
+            <a:avLst/>
+          </a:prstGeom>
+          <a:solidFill>
+            <a:srgbClr val="9A7878"/>
+          </a:solidFill>
+          <a:ln>
+            <a:noFill/>
+          </a:ln>
+          <a:effectLst/>
+        </p:spPr>
+        <p:style>
+          <a:lnRef idx="1">
+            <a:schemeClr val="accent1"/>
+          </a:lnRef>
+          <a:fillRef idx="3">
+            <a:schemeClr val="accent1"/>
+          </a:fillRef>
+          <a:effectRef idx="2">
+            <a:schemeClr val="accent1"/>
+          </a:effectRef>
+          <a:fontRef idx="minor">
+            <a:schemeClr val="lt1"/>
+          </a:fontRef>
+        </p:style>
+        <p:txBody>
+          <a:bodyPr rtlCol="0" anchor="ctr"/>
+          <a:lstStyle/>
+          <a:p/>
+        </p:txBody>
+      </p:sp>
+      <p:sp>
+        <p:nvSpPr>
+          <p:cNvPr id="344" name="Rectangle 343"/>
+          <p:cNvSpPr/>
+          <p:nvPr/>
+        </p:nvSpPr>
+        <p:spPr>
+          <a:xfrm>
+            <a:off x="11034712" y="4367212"/>
+            <a:ext cx="28575" cy="790575"/>
+          </a:xfrm>
+          <a:prstGeom prst="rect">
+            <a:avLst/>
+          </a:prstGeom>
+          <a:solidFill>
+            <a:srgbClr val="9A7878"/>
+          </a:solidFill>
+          <a:ln>
+            <a:noFill/>
+          </a:ln>
+          <a:effectLst/>
+        </p:spPr>
+        <p:style>
+          <a:lnRef idx="1">
+            <a:schemeClr val="accent1"/>
+          </a:lnRef>
+          <a:fillRef idx="3">
+            <a:schemeClr val="accent1"/>
+          </a:fillRef>
+          <a:effectRef idx="2">
+            <a:schemeClr val="accent1"/>
+          </a:effectRef>
+          <a:fontRef idx="minor">
+            <a:schemeClr val="lt1"/>
+          </a:fontRef>
+        </p:style>
+        <p:txBody>
+          <a:bodyPr rtlCol="0" anchor="ctr"/>
+          <a:lstStyle/>
+          <a:p/>
+        </p:txBody>
+      </p:sp>
+      <p:sp>
+        <p:nvSpPr>
+          <p:cNvPr id="345" name="Rectangle 344"/>
+          <p:cNvSpPr/>
+          <p:nvPr/>
+        </p:nvSpPr>
+        <p:spPr>
+          <a:xfrm>
+            <a:off x="13892212" y="4367212"/>
+            <a:ext cx="28575" cy="790575"/>
+          </a:xfrm>
+          <a:prstGeom prst="rect">
+            <a:avLst/>
+          </a:prstGeom>
+          <a:solidFill>
+            <a:srgbClr val="9A7878"/>
+          </a:solidFill>
+          <a:ln>
+            <a:noFill/>
+          </a:ln>
+          <a:effectLst/>
+        </p:spPr>
+        <p:style>
+          <a:lnRef idx="1">
+            <a:schemeClr val="accent1"/>
+          </a:lnRef>
+          <a:fillRef idx="3">
+            <a:schemeClr val="accent1"/>
+          </a:fillRef>
+          <a:effectRef idx="2">
+            <a:schemeClr val="accent1"/>
+          </a:effectRef>
+          <a:fontRef idx="minor">
+            <a:schemeClr val="lt1"/>
+          </a:fontRef>
+        </p:style>
+        <p:txBody>
+          <a:bodyPr rtlCol="0" anchor="ctr"/>
+          <a:lstStyle/>
+          <a:p/>
+        </p:txBody>
+      </p:sp>
       <p:sp>
         <p:nvSpPr>
           <p:cNvPr id="346" name="Rounded Rectangle 345"/>
@@ -59442,41 +61227,48 @@
           </a:p>
         </p:txBody>
       </p:sp>
-      <p:cxnSp>
-        <p:nvCxnSpPr>
-          <p:cNvPr id="348" name="Connector 347"/>
-          <p:cNvCxnSpPr/>
-          <p:nvPr/>
-        </p:nvCxnSpPr>
-        <p:spPr>
-          <a:xfrm>
-            <a:off x="13906500" y="5143500"/>
-            <a:ext cx="1524000" cy="0"/>
-          </a:xfrm>
-          <a:prstGeom prst="line">
-            <a:avLst/>
-          </a:prstGeom>
-          <a:ln w="28575">
-            <a:solidFill>
-              <a:srgbClr val="9A7878"/>
-            </a:solidFill>
-          </a:ln>
-        </p:spPr>
-        <p:style>
-          <a:lnRef idx="2">
-            <a:schemeClr val="accent1"/>
-          </a:lnRef>
-          <a:fillRef idx="0">
-            <a:schemeClr val="accent1"/>
-          </a:fillRef>
-          <a:effectRef idx="1">
-            <a:schemeClr val="accent1"/>
-          </a:effectRef>
-          <a:fontRef idx="minor">
-            <a:schemeClr val="tx1"/>
-          </a:fontRef>
-        </p:style>
-      </p:cxnSp>
+      <p:sp>
+        <p:nvSpPr>
+          <p:cNvPr id="348" name="Rectangle 347"/>
+          <p:cNvSpPr/>
+          <p:nvPr/>
+        </p:nvSpPr>
+        <p:spPr>
+          <a:xfrm>
+            <a:off x="13892212" y="5129212"/>
+            <a:ext cx="1552575" cy="28575"/>
+          </a:xfrm>
+          <a:prstGeom prst="rect">
+            <a:avLst/>
+          </a:prstGeom>
+          <a:solidFill>
+            <a:srgbClr val="9A7878"/>
+          </a:solidFill>
+          <a:ln>
+            <a:noFill/>
+          </a:ln>
+          <a:effectLst/>
+        </p:spPr>
+        <p:style>
+          <a:lnRef idx="1">
+            <a:schemeClr val="accent1"/>
+          </a:lnRef>
+          <a:fillRef idx="3">
+            <a:schemeClr val="accent1"/>
+          </a:fillRef>
+          <a:effectRef idx="2">
+            <a:schemeClr val="accent1"/>
+          </a:effectRef>
+          <a:fontRef idx="minor">
+            <a:schemeClr val="lt1"/>
+          </a:fontRef>
+        </p:style>
+        <p:txBody>
+          <a:bodyPr rtlCol="0" anchor="ctr"/>
+          <a:lstStyle/>
+          <a:p/>
+        </p:txBody>
+      </p:sp>
       <p:sp>
         <p:nvSpPr>
           <p:cNvPr id="349" name="TextBox 348"/>
